--- a/slides/04-grafana.pptx
+++ b/slides/04-grafana.pptx
@@ -607,7 +607,9 @@
           <a:p>
             <a:r>
               <a:rPr lang="en-US" dirty="0"/>
-              <a:t>This prompt shows several safe habits. Secrets stay in the azd environment and never print. The preview shows exactly what will be created. The agent is told how to handle failures: smallest safe fix, rerun, and log it in issues.md. And the deploy itself stays in your hands.</a:t>
+              <a:t>This prompt shows several safe habits. Secrets stay in the azd environment and never print. The preview shows exactly what will be created. The agent is told how to handle failures: smallest safe fix, rerun, and log it in issues.md. And the deploy itself stays in your hands.
+Full prompt:
+Generate the infrastructure for that plan: Bicep in infra-grafana/ and azure.yaml. Generate a secure admin password and store it only in the azd environment. Prepare the azd environment for westus and my current subscription, then run azd provision --preview and summarize what it will create. Don't run azd up. If a step fails, inspect the relevant logs, make the smallest safe correction, rerun the failed step, and record the problem and resolution in issues.md. Do not print secrets.</a:t>
             </a:r>
             <a:endParaRPr lang="en-US" dirty="0"/>
           </a:p>
@@ -871,7 +873,7 @@
           <a:p>
             <a:r>
               <a:rPr lang="en-US" dirty="0"/>
-              <a:t>Scale to zero saves money, and the cost is a cold start. If the first request is slow or returns a 502, wait and refresh. Knowing what normal looks like saves a lot of unnecessary troubleshooting.</a:t>
+              <a:t>Scale to zero saves money, and the cost is a cold start. When no one has used Grafana for a while, it scales to zero. The first request starts the container, which can take 30 to 60 seconds, and may return a 502 while it starts. After that, it is fast. Knowing what normal looks like saves a lot of unnecessary troubleshooting.</a:t>
             </a:r>
             <a:endParaRPr lang="en-US" dirty="0"/>
           </a:p>
@@ -1047,7 +1049,9 @@
           <a:p>
             <a:r>
               <a:rPr lang="en-US" dirty="0"/>
-              <a:t>The same agent that deployed Grafana can now operate it. It writes a small script that uses the Grafana HTTP API. Argument arrays avoid shell interpolation and work on Windows, Mac, and Linux. Open the printed URL to see the dashboard.</a:t>
+              <a:t>The same agent that deployed Grafana can now operate it. It writes a small script that uses the Grafana HTTP API. Argument arrays avoid shell interpolation and work on Windows, Mac, and Linux. Open the printed URL to see the dashboard.
+Full prompt:
+Create scripts/create-grafana-dashboard.mjs. It reads GRAFANA_URL and GRAFANA_ADMIN_PASSWORD through azd env get-value with argument arrays and never prints the password. Through the Grafana HTTP API, it creates the built-in TestData data source if it doesn't exist, then creates a dashboard named "Hello from Azure" with one time series panel that uses it, and prints the dashboard URL. Then run the script.</a:t>
             </a:r>
             <a:endParaRPr lang="en-US" dirty="0"/>
           </a:p>
@@ -1839,7 +1843,9 @@
           <a:p>
             <a:r>
               <a:rPr lang="en-US" dirty="0"/>
-              <a:t>Plan first, with an explicit "don't create anything yet." You should get a list of resources, SKUs, and a monthly estimate around 10 to 20 dollars. This is where you catch surprises before they are billable.</a:t>
+              <a:t>Plan first, with an explicit "don't create anything yet." You should get a list of resources, SKUs, and a monthly estimate around 10 to 20 dollars. This is where you catch surprises before they are billable.
+Full prompt:
+Plan a Grafana deployment to Azure Container Apps with Bicep and azd: SQLite in the container's local storage (no Azure Files mount), minReplicas: 0 and maxReplicas: 1, /api/health for probes, and the westus region. List each Azure resource, its SKU, and the estimated monthly cost if left running. Don't create files or Azure resources yet.</a:t>
             </a:r>
             <a:endParaRPr lang="en-US" dirty="0"/>
           </a:p>
@@ -2396,12 +2402,12 @@
         </p:nvSpPr>
         <p:spPr>
           <a:xfrm>
-            <a:off x="7740700" y="152400"/>
-            <a:ext cx="819150" cy="266700"/>
+            <a:off x="7652742" y="152400"/>
+            <a:ext cx="907107" cy="279350"/>
           </a:xfrm>
           <a:prstGeom prst="roundRect">
             <a:avLst>
-              <a:gd name="adj" fmla="val 23810"/>
+              <a:gd name="adj" fmla="val 22731"/>
             </a:avLst>
           </a:prstGeom>
           <a:solidFill>
@@ -2428,8 +2434,8 @@
         </p:nvSpPr>
         <p:spPr>
           <a:xfrm>
-            <a:off x="7861998" y="219075"/>
-            <a:ext cx="576554" cy="133350"/>
+            <a:off x="7786064" y="220563"/>
+            <a:ext cx="640464" cy="142875"/>
           </a:xfrm>
           <a:prstGeom prst="rect">
             <a:avLst/>
@@ -2445,7 +2451,7 @@
               <a:buNone/>
             </a:pPr>
             <a:r>
-              <a:rPr lang="en-US" sz="900" b="1" dirty="0">
+              <a:rPr lang="en-US" sz="1000" b="1" dirty="0">
                 <a:solidFill>
                   <a:srgbClr val="FFFFFF"/>
                 </a:solidFill>
@@ -2455,7 +2461,7 @@
               </a:rPr>
               <a:t>GRAFANA</a:t>
             </a:r>
-            <a:endParaRPr lang="en-US" sz="900" dirty="0"/>
+            <a:endParaRPr lang="en-US" sz="1000" dirty="0"/>
           </a:p>
         </p:txBody>
       </p:sp>
@@ -2524,7 +2530,7 @@
         <p:spPr>
           <a:xfrm>
             <a:off x="482501" y="1053852"/>
-            <a:ext cx="7772400" cy="152400"/>
+            <a:ext cx="7772400" cy="171450"/>
           </a:xfrm>
           <a:prstGeom prst="rect">
             <a:avLst/>
@@ -2543,7 +2549,7 @@
               <a:buNone/>
             </a:pPr>
             <a:r>
-              <a:rPr lang="en-US" sz="1100" b="1" dirty="0">
+              <a:rPr lang="en-US" sz="1200" b="1" dirty="0">
                 <a:solidFill>
                   <a:srgbClr val="1A7F37"/>
                 </a:solidFill>
@@ -2553,7 +2559,7 @@
               </a:rPr>
               <a:t>AGENTIC JOURNEY · GITHUB AND AZURE</a:t>
             </a:r>
-            <a:endParaRPr lang="en-US" sz="1100" dirty="0"/>
+            <a:endParaRPr lang="en-US" sz="1200" dirty="0"/>
           </a:p>
         </p:txBody>
       </p:sp>
@@ -2565,7 +2571,7 @@
         </p:nvSpPr>
         <p:spPr>
           <a:xfrm>
-            <a:off x="482501" y="1282452"/>
+            <a:off x="482501" y="1301502"/>
             <a:ext cx="7772400" cy="584150"/>
           </a:xfrm>
           <a:prstGeom prst="rect">
@@ -2607,8 +2613,8 @@
         </p:nvSpPr>
         <p:spPr>
           <a:xfrm>
-            <a:off x="482501" y="2019002"/>
-            <a:ext cx="7772400" cy="558701"/>
+            <a:off x="482501" y="2038052"/>
+            <a:ext cx="7772400" cy="584299"/>
           </a:xfrm>
           <a:prstGeom prst="rect">
             <a:avLst/>
@@ -2622,7 +2628,7 @@
           <a:p>
             <a:pPr algn="l" indent="0" marL="0">
               <a:lnSpc>
-                <a:spcPts val="2200"/>
+                <a:spcPts val="2300"/>
               </a:lnSpc>
               <a:spcBef>
                 <a:spcPts val="1200"/>
@@ -2630,7 +2636,7 @@
               <a:buNone/>
             </a:pPr>
             <a:r>
-              <a:rPr lang="en-US" sz="1600" dirty="0">
+              <a:rPr lang="en-US" sz="1700" dirty="0">
                 <a:solidFill>
                   <a:srgbClr val="59636E"/>
                 </a:solidFill>
@@ -2640,7 +2646,7 @@
               </a:rPr>
               <a:t>What if you could deploy a working dashboard app to Azure by describing it, then break it on purpose to learn why?</a:t>
             </a:r>
-            <a:endParaRPr lang="en-US" sz="1600" dirty="0"/>
+            <a:endParaRPr lang="en-US" sz="1700" dirty="0"/>
           </a:p>
         </p:txBody>
       </p:sp>
@@ -2652,12 +2658,12 @@
         </p:nvSpPr>
         <p:spPr>
           <a:xfrm>
-            <a:off x="482501" y="3022550"/>
-            <a:ext cx="355550" cy="355550"/>
+            <a:off x="482501" y="2946350"/>
+            <a:ext cx="431750" cy="431750"/>
           </a:xfrm>
           <a:prstGeom prst="roundRect">
             <a:avLst>
-              <a:gd name="adj" fmla="val 21432"/>
+              <a:gd name="adj" fmla="val 17649"/>
             </a:avLst>
           </a:prstGeom>
           <a:solidFill>
@@ -2692,8 +2698,8 @@
         </p:blipFill>
         <p:spPr>
           <a:xfrm>
-            <a:off x="558701" y="3098750"/>
-            <a:ext cx="203150" cy="203150"/>
+            <a:off x="577751" y="3041600"/>
+            <a:ext cx="241250" cy="241250"/>
           </a:xfrm>
           <a:prstGeom prst="rect">
             <a:avLst/>
@@ -2708,8 +2714,8 @@
         </p:nvSpPr>
         <p:spPr>
           <a:xfrm>
-            <a:off x="952351" y="3051125"/>
-            <a:ext cx="812155" cy="114300"/>
+            <a:off x="1028551" y="2973288"/>
+            <a:ext cx="947109" cy="142875"/>
           </a:xfrm>
           <a:prstGeom prst="rect">
             <a:avLst/>
@@ -2725,7 +2731,7 @@
               <a:buNone/>
             </a:pPr>
             <a:r>
-              <a:rPr lang="en-US" sz="850" b="1" dirty="0">
+              <a:rPr lang="en-US" sz="1000" b="1" dirty="0">
                 <a:solidFill>
                   <a:srgbClr val="59636E"/>
                 </a:solidFill>
@@ -2735,7 +2741,7 @@
               </a:rPr>
               <a:t>SESSION</a:t>
             </a:r>
-            <a:endParaRPr lang="en-US" sz="850" dirty="0"/>
+            <a:endParaRPr lang="en-US" sz="1000" dirty="0"/>
           </a:p>
         </p:txBody>
       </p:sp>
@@ -2747,8 +2753,8 @@
         </p:nvSpPr>
         <p:spPr>
           <a:xfrm>
-            <a:off x="952351" y="3178076"/>
-            <a:ext cx="812155" cy="171450"/>
+            <a:off x="1028551" y="3141464"/>
+            <a:ext cx="947109" cy="209550"/>
           </a:xfrm>
           <a:prstGeom prst="rect">
             <a:avLst/>
@@ -2764,7 +2770,7 @@
               <a:buNone/>
             </a:pPr>
             <a:r>
-              <a:rPr lang="en-US" sz="1200" b="1" dirty="0">
+              <a:rPr lang="en-US" sz="1400" b="1" dirty="0">
                 <a:solidFill>
                   <a:srgbClr val="1F2328"/>
                 </a:solidFill>
@@ -2774,7 +2780,7 @@
               </a:rPr>
               <a:t>60 minutes</a:t>
             </a:r>
-            <a:endParaRPr lang="en-US" sz="1200" dirty="0"/>
+            <a:endParaRPr lang="en-US" sz="1400" dirty="0"/>
           </a:p>
         </p:txBody>
       </p:sp>
@@ -2786,12 +2792,12 @@
         </p:nvSpPr>
         <p:spPr>
           <a:xfrm>
-            <a:off x="2129582" y="3022550"/>
-            <a:ext cx="355550" cy="355550"/>
+            <a:off x="2312640" y="2946350"/>
+            <a:ext cx="431750" cy="431750"/>
           </a:xfrm>
           <a:prstGeom prst="roundRect">
             <a:avLst>
-              <a:gd name="adj" fmla="val 21432"/>
+              <a:gd name="adj" fmla="val 17649"/>
             </a:avLst>
           </a:prstGeom>
           <a:solidFill>
@@ -2826,8 +2832,8 @@
         </p:blipFill>
         <p:spPr>
           <a:xfrm>
-            <a:off x="2205782" y="3098750"/>
-            <a:ext cx="203150" cy="203150"/>
+            <a:off x="2407890" y="3041600"/>
+            <a:ext cx="241250" cy="241250"/>
           </a:xfrm>
           <a:prstGeom prst="rect">
             <a:avLst/>
@@ -2842,8 +2848,8 @@
         </p:nvSpPr>
         <p:spPr>
           <a:xfrm>
-            <a:off x="2599432" y="3051125"/>
-            <a:ext cx="1284268" cy="114300"/>
+            <a:off x="2858691" y="2973288"/>
+            <a:ext cx="1510912" cy="142875"/>
           </a:xfrm>
           <a:prstGeom prst="rect">
             <a:avLst/>
@@ -2859,7 +2865,7 @@
               <a:buNone/>
             </a:pPr>
             <a:r>
-              <a:rPr lang="en-US" sz="850" b="1" dirty="0">
+              <a:rPr lang="en-US" sz="1000" b="1" dirty="0">
                 <a:solidFill>
                   <a:srgbClr val="59636E"/>
                 </a:solidFill>
@@ -2869,7 +2875,7 @@
               </a:rPr>
               <a:t>COST IF LEFT RUNNING</a:t>
             </a:r>
-            <a:endParaRPr lang="en-US" sz="850" dirty="0"/>
+            <a:endParaRPr lang="en-US" sz="1000" dirty="0"/>
           </a:p>
         </p:txBody>
       </p:sp>
@@ -2881,8 +2887,8 @@
         </p:nvSpPr>
         <p:spPr>
           <a:xfrm>
-            <a:off x="2599432" y="3178076"/>
-            <a:ext cx="1284268" cy="171450"/>
+            <a:off x="2858691" y="3141464"/>
+            <a:ext cx="1510912" cy="209550"/>
           </a:xfrm>
           <a:prstGeom prst="rect">
             <a:avLst/>
@@ -2898,7 +2904,7 @@
               <a:buNone/>
             </a:pPr>
             <a:r>
-              <a:rPr lang="en-US" sz="1200" b="1" dirty="0">
+              <a:rPr lang="en-US" sz="1400" b="1" dirty="0">
                 <a:solidFill>
                   <a:srgbClr val="1F2328"/>
                 </a:solidFill>
@@ -2908,7 +2914,7 @@
               </a:rPr>
               <a:t>~$10–20/month</a:t>
             </a:r>
-            <a:endParaRPr lang="en-US" sz="1200" dirty="0"/>
+            <a:endParaRPr lang="en-US" sz="1400" dirty="0"/>
           </a:p>
         </p:txBody>
       </p:sp>
@@ -2920,12 +2926,12 @@
         </p:nvSpPr>
         <p:spPr>
           <a:xfrm>
-            <a:off x="4239518" y="3022550"/>
-            <a:ext cx="355550" cy="355550"/>
+            <a:off x="4695527" y="2946350"/>
+            <a:ext cx="431750" cy="431750"/>
           </a:xfrm>
           <a:prstGeom prst="roundRect">
             <a:avLst>
-              <a:gd name="adj" fmla="val 21432"/>
+              <a:gd name="adj" fmla="val 17649"/>
             </a:avLst>
           </a:prstGeom>
           <a:solidFill>
@@ -2960,8 +2966,8 @@
         </p:blipFill>
         <p:spPr>
           <a:xfrm>
-            <a:off x="4315718" y="3098750"/>
-            <a:ext cx="203150" cy="203150"/>
+            <a:off x="4790777" y="3041600"/>
+            <a:ext cx="241250" cy="241250"/>
           </a:xfrm>
           <a:prstGeom prst="rect">
             <a:avLst/>
@@ -2976,8 +2982,8 @@
         </p:nvSpPr>
         <p:spPr>
           <a:xfrm>
-            <a:off x="4709368" y="3051125"/>
-            <a:ext cx="1626587" cy="114300"/>
+            <a:off x="5241578" y="2973288"/>
+            <a:ext cx="1897103" cy="142875"/>
           </a:xfrm>
           <a:prstGeom prst="rect">
             <a:avLst/>
@@ -2993,7 +2999,7 @@
               <a:buNone/>
             </a:pPr>
             <a:r>
-              <a:rPr lang="en-US" sz="850" b="1" dirty="0">
+              <a:rPr lang="en-US" sz="1000" b="1" dirty="0">
                 <a:solidFill>
                   <a:srgbClr val="59636E"/>
                 </a:solidFill>
@@ -3003,7 +3009,7 @@
               </a:rPr>
               <a:t>RUNS ON</a:t>
             </a:r>
-            <a:endParaRPr lang="en-US" sz="850" dirty="0"/>
+            <a:endParaRPr lang="en-US" sz="1000" dirty="0"/>
           </a:p>
         </p:txBody>
       </p:sp>
@@ -3015,8 +3021,8 @@
         </p:nvSpPr>
         <p:spPr>
           <a:xfrm>
-            <a:off x="4709368" y="3178076"/>
-            <a:ext cx="1626587" cy="171450"/>
+            <a:off x="5241578" y="3141464"/>
+            <a:ext cx="1897103" cy="209550"/>
           </a:xfrm>
           <a:prstGeom prst="rect">
             <a:avLst/>
@@ -3032,7 +3038,7 @@
               <a:buNone/>
             </a:pPr>
             <a:r>
-              <a:rPr lang="en-US" sz="1200" b="1" dirty="0">
+              <a:rPr lang="en-US" sz="1400" b="1" dirty="0">
                 <a:solidFill>
                   <a:srgbClr val="1F2328"/>
                 </a:solidFill>
@@ -3042,7 +3048,7 @@
               </a:rPr>
               <a:t>Azure Container Apps</a:t>
             </a:r>
-            <a:endParaRPr lang="en-US" sz="1200" dirty="0"/>
+            <a:endParaRPr lang="en-US" sz="1400" dirty="0"/>
           </a:p>
         </p:txBody>
       </p:sp>
@@ -3054,8 +3060,8 @@
         </p:nvSpPr>
         <p:spPr>
           <a:xfrm>
-            <a:off x="482501" y="3759101"/>
-            <a:ext cx="8342275" cy="133350"/>
+            <a:off x="482501" y="3708350"/>
+            <a:ext cx="8342275" cy="142875"/>
           </a:xfrm>
           <a:prstGeom prst="rect">
             <a:avLst/>
@@ -3071,7 +3077,7 @@
               <a:buNone/>
             </a:pPr>
             <a:r>
-              <a:rPr lang="en-US" sz="900" b="1" dirty="0">
+              <a:rPr lang="en-US" sz="1000" b="1" dirty="0">
                 <a:solidFill>
                   <a:srgbClr val="59636E"/>
                 </a:solidFill>
@@ -3081,7 +3087,7 @@
               </a:rPr>
               <a:t>IN THIS SESSION</a:t>
             </a:r>
-            <a:endParaRPr lang="en-US" sz="900" dirty="0"/>
+            <a:endParaRPr lang="en-US" sz="1000" dirty="0"/>
           </a:p>
         </p:txBody>
       </p:sp>
@@ -3093,12 +3099,12 @@
         </p:nvSpPr>
         <p:spPr>
           <a:xfrm>
-            <a:off x="482501" y="3981301"/>
-            <a:ext cx="1526232" cy="336352"/>
+            <a:off x="482501" y="3952726"/>
+            <a:ext cx="1719858" cy="361652"/>
           </a:xfrm>
           <a:prstGeom prst="roundRect">
             <a:avLst>
-              <a:gd name="adj" fmla="val 52861"/>
+              <a:gd name="adj" fmla="val 52675"/>
             </a:avLst>
           </a:prstGeom>
           <a:solidFill>
@@ -3129,12 +3135,12 @@
         </p:nvSpPr>
         <p:spPr>
           <a:xfrm>
-            <a:off x="568226" y="4054227"/>
-            <a:ext cx="190500" cy="190500"/>
+            <a:off x="568226" y="4025652"/>
+            <a:ext cx="215801" cy="215801"/>
           </a:xfrm>
           <a:prstGeom prst="roundRect">
             <a:avLst>
-              <a:gd name="adj" fmla="val 480000"/>
+              <a:gd name="adj" fmla="val 423724"/>
             </a:avLst>
           </a:prstGeom>
           <a:solidFill>
@@ -3161,8 +3167,8 @@
         </p:nvSpPr>
         <p:spPr>
           <a:xfrm>
-            <a:off x="634633" y="4092327"/>
-            <a:ext cx="57686" cy="114300"/>
+            <a:off x="643640" y="4066877"/>
+            <a:ext cx="64972" cy="133350"/>
           </a:xfrm>
           <a:prstGeom prst="rect">
             <a:avLst/>
@@ -3178,7 +3184,7 @@
               <a:buNone/>
             </a:pPr>
             <a:r>
-              <a:rPr lang="en-US" sz="800" b="1" dirty="0">
+              <a:rPr lang="en-US" sz="900" b="1" dirty="0">
                 <a:solidFill>
                   <a:srgbClr val="FFFFFF"/>
                 </a:solidFill>
@@ -3188,7 +3194,7 @@
               </a:rPr>
               <a:t>1</a:t>
             </a:r>
-            <a:endParaRPr lang="en-US" sz="800" dirty="0"/>
+            <a:endParaRPr lang="en-US" sz="900" dirty="0"/>
           </a:p>
         </p:txBody>
       </p:sp>
@@ -3200,8 +3206,8 @@
         </p:nvSpPr>
         <p:spPr>
           <a:xfrm>
-            <a:off x="834926" y="4078039"/>
-            <a:ext cx="1058079" cy="142875"/>
+            <a:off x="860227" y="4047827"/>
+            <a:ext cx="1216866" cy="171450"/>
           </a:xfrm>
           <a:prstGeom prst="rect">
             <a:avLst/>
@@ -3217,7 +3223,7 @@
               <a:buNone/>
             </a:pPr>
             <a:r>
-              <a:rPr lang="en-US" sz="1000" b="1" dirty="0">
+              <a:rPr lang="en-US" sz="1150" b="1" dirty="0">
                 <a:solidFill>
                   <a:srgbClr val="0969DA"/>
                 </a:solidFill>
@@ -3227,7 +3233,7 @@
               </a:rPr>
               <a:t>Plan and preview</a:t>
             </a:r>
-            <a:endParaRPr lang="en-US" sz="1000" dirty="0"/>
+            <a:endParaRPr lang="en-US" sz="1150" dirty="0"/>
           </a:p>
         </p:txBody>
       </p:sp>
@@ -3239,12 +3245,12 @@
         </p:nvSpPr>
         <p:spPr>
           <a:xfrm>
-            <a:off x="2110234" y="3981301"/>
-            <a:ext cx="1547366" cy="336352"/>
+            <a:off x="2303859" y="3952726"/>
+            <a:ext cx="1744117" cy="361652"/>
           </a:xfrm>
           <a:prstGeom prst="roundRect">
             <a:avLst>
-              <a:gd name="adj" fmla="val 52861"/>
+              <a:gd name="adj" fmla="val 52675"/>
             </a:avLst>
           </a:prstGeom>
           <a:solidFill>
@@ -3275,12 +3281,12 @@
         </p:nvSpPr>
         <p:spPr>
           <a:xfrm>
-            <a:off x="2195959" y="4054227"/>
-            <a:ext cx="190500" cy="190500"/>
+            <a:off x="2389584" y="4025652"/>
+            <a:ext cx="215801" cy="215801"/>
           </a:xfrm>
           <a:prstGeom prst="roundRect">
             <a:avLst>
-              <a:gd name="adj" fmla="val 480000"/>
+              <a:gd name="adj" fmla="val 423724"/>
             </a:avLst>
           </a:prstGeom>
           <a:solidFill>
@@ -3307,8 +3313,8 @@
         </p:nvSpPr>
         <p:spPr>
           <a:xfrm>
-            <a:off x="2262366" y="4092327"/>
-            <a:ext cx="57686" cy="114300"/>
+            <a:off x="2464999" y="4066877"/>
+            <a:ext cx="64972" cy="133350"/>
           </a:xfrm>
           <a:prstGeom prst="rect">
             <a:avLst/>
@@ -3324,7 +3330,7 @@
               <a:buNone/>
             </a:pPr>
             <a:r>
-              <a:rPr lang="en-US" sz="800" b="1" dirty="0">
+              <a:rPr lang="en-US" sz="900" b="1" dirty="0">
                 <a:solidFill>
                   <a:srgbClr val="FFFFFF"/>
                 </a:solidFill>
@@ -3334,7 +3340,7 @@
               </a:rPr>
               <a:t>2</a:t>
             </a:r>
-            <a:endParaRPr lang="en-US" sz="800" dirty="0"/>
+            <a:endParaRPr lang="en-US" sz="900" dirty="0"/>
           </a:p>
         </p:txBody>
       </p:sp>
@@ -3346,8 +3352,8 @@
         </p:nvSpPr>
         <p:spPr>
           <a:xfrm>
-            <a:off x="2462659" y="4078039"/>
-            <a:ext cx="1079635" cy="142875"/>
+            <a:off x="2681585" y="4047827"/>
+            <a:ext cx="1241611" cy="171450"/>
           </a:xfrm>
           <a:prstGeom prst="rect">
             <a:avLst/>
@@ -3363,7 +3369,7 @@
               <a:buNone/>
             </a:pPr>
             <a:r>
-              <a:rPr lang="en-US" sz="1000" b="1" dirty="0">
+              <a:rPr lang="en-US" sz="1150" b="1" dirty="0">
                 <a:solidFill>
                   <a:srgbClr val="8250DF"/>
                 </a:solidFill>
@@ -3373,7 +3379,7 @@
               </a:rPr>
               <a:t>Deploy and verify</a:t>
             </a:r>
-            <a:endParaRPr lang="en-US" sz="1000" dirty="0"/>
+            <a:endParaRPr lang="en-US" sz="1150" dirty="0"/>
           </a:p>
         </p:txBody>
       </p:sp>
@@ -3385,12 +3391,12 @@
         </p:nvSpPr>
         <p:spPr>
           <a:xfrm>
-            <a:off x="3759101" y="3981301"/>
-            <a:ext cx="1568648" cy="336352"/>
+            <a:off x="4149477" y="3952726"/>
+            <a:ext cx="1768525" cy="361652"/>
           </a:xfrm>
           <a:prstGeom prst="roundRect">
             <a:avLst>
-              <a:gd name="adj" fmla="val 52861"/>
+              <a:gd name="adj" fmla="val 52675"/>
             </a:avLst>
           </a:prstGeom>
           <a:solidFill>
@@ -3421,12 +3427,12 @@
         </p:nvSpPr>
         <p:spPr>
           <a:xfrm>
-            <a:off x="3844826" y="4054227"/>
-            <a:ext cx="190500" cy="190500"/>
+            <a:off x="4235202" y="4025652"/>
+            <a:ext cx="215801" cy="215801"/>
           </a:xfrm>
           <a:prstGeom prst="roundRect">
             <a:avLst>
-              <a:gd name="adj" fmla="val 480000"/>
+              <a:gd name="adj" fmla="val 423724"/>
             </a:avLst>
           </a:prstGeom>
           <a:solidFill>
@@ -3453,8 +3459,8 @@
         </p:nvSpPr>
         <p:spPr>
           <a:xfrm>
-            <a:off x="3911233" y="4092327"/>
-            <a:ext cx="57686" cy="114300"/>
+            <a:off x="4310616" y="4066877"/>
+            <a:ext cx="64972" cy="133350"/>
           </a:xfrm>
           <a:prstGeom prst="rect">
             <a:avLst/>
@@ -3470,7 +3476,7 @@
               <a:buNone/>
             </a:pPr>
             <a:r>
-              <a:rPr lang="en-US" sz="800" b="1" dirty="0">
+              <a:rPr lang="en-US" sz="900" b="1" dirty="0">
                 <a:solidFill>
                   <a:srgbClr val="FFFFFF"/>
                 </a:solidFill>
@@ -3480,7 +3486,7 @@
               </a:rPr>
               <a:t>3</a:t>
             </a:r>
-            <a:endParaRPr lang="en-US" sz="800" dirty="0"/>
+            <a:endParaRPr lang="en-US" sz="900" dirty="0"/>
           </a:p>
         </p:txBody>
       </p:sp>
@@ -3492,8 +3498,8 @@
         </p:nvSpPr>
         <p:spPr>
           <a:xfrm>
-            <a:off x="4111526" y="4078039"/>
-            <a:ext cx="1101343" cy="142875"/>
+            <a:off x="4527203" y="4047827"/>
+            <a:ext cx="1266507" cy="171450"/>
           </a:xfrm>
           <a:prstGeom prst="rect">
             <a:avLst/>
@@ -3509,7 +3515,7 @@
               <a:buNone/>
             </a:pPr>
             <a:r>
-              <a:rPr lang="en-US" sz="1000" b="1" dirty="0">
+              <a:rPr lang="en-US" sz="1150" b="1" dirty="0">
                 <a:solidFill>
                   <a:srgbClr val="1A7F37"/>
                 </a:solidFill>
@@ -3519,7 +3525,7 @@
               </a:rPr>
               <a:t>Operate and learn</a:t>
             </a:r>
-            <a:endParaRPr lang="en-US" sz="1000" dirty="0"/>
+            <a:endParaRPr lang="en-US" sz="1150" dirty="0"/>
           </a:p>
         </p:txBody>
       </p:sp>
@@ -3531,8 +3537,8 @@
         </p:nvSpPr>
         <p:spPr>
           <a:xfrm>
-            <a:off x="482501" y="4724400"/>
-            <a:ext cx="2396237" cy="142875"/>
+            <a:off x="482501" y="4673501"/>
+            <a:ext cx="2635329" cy="152400"/>
           </a:xfrm>
           <a:prstGeom prst="rect">
             <a:avLst/>
@@ -3548,7 +3554,7 @@
               <a:buNone/>
             </a:pPr>
             <a:r>
-              <a:rPr lang="en-US" sz="1000" b="1" dirty="0">
+              <a:rPr lang="en-US" sz="1100" b="1" dirty="0">
                 <a:solidFill>
                   <a:srgbClr val="0969DA"/>
                 </a:solidFill>
@@ -3558,7 +3564,7 @@
               </a:rPr>
               <a:t>github.com/microsoft/agentic-journeys</a:t>
             </a:r>
-            <a:endParaRPr lang="en-US" sz="1000" dirty="0"/>
+            <a:endParaRPr lang="en-US" sz="1100" dirty="0"/>
           </a:p>
         </p:txBody>
       </p:sp>
@@ -3602,12 +3608,12 @@
         </p:nvSpPr>
         <p:spPr>
           <a:xfrm>
-            <a:off x="7740700" y="152400"/>
-            <a:ext cx="819150" cy="266700"/>
+            <a:off x="7652742" y="152400"/>
+            <a:ext cx="907107" cy="279350"/>
           </a:xfrm>
           <a:prstGeom prst="roundRect">
             <a:avLst>
-              <a:gd name="adj" fmla="val 23810"/>
+              <a:gd name="adj" fmla="val 22731"/>
             </a:avLst>
           </a:prstGeom>
           <a:solidFill>
@@ -3634,8 +3640,8 @@
         </p:nvSpPr>
         <p:spPr>
           <a:xfrm>
-            <a:off x="7861998" y="219075"/>
-            <a:ext cx="576554" cy="133350"/>
+            <a:off x="7786064" y="220563"/>
+            <a:ext cx="640464" cy="142875"/>
           </a:xfrm>
           <a:prstGeom prst="rect">
             <a:avLst/>
@@ -3651,7 +3657,7 @@
               <a:buNone/>
             </a:pPr>
             <a:r>
-              <a:rPr lang="en-US" sz="900" b="1" dirty="0">
+              <a:rPr lang="en-US" sz="1000" b="1" dirty="0">
                 <a:solidFill>
                   <a:srgbClr val="FFFFFF"/>
                 </a:solidFill>
@@ -3661,7 +3667,7 @@
               </a:rPr>
               <a:t>GRAFANA</a:t>
             </a:r>
-            <a:endParaRPr lang="en-US" sz="900" dirty="0"/>
+            <a:endParaRPr lang="en-US" sz="1000" dirty="0"/>
           </a:p>
         </p:txBody>
       </p:sp>
@@ -3698,7 +3704,7 @@
         <p:spPr>
           <a:xfrm>
             <a:off x="482501" y="330101"/>
-            <a:ext cx="7772400" cy="142875"/>
+            <a:ext cx="8342275" cy="152400"/>
           </a:xfrm>
           <a:prstGeom prst="rect">
             <a:avLst/>
@@ -3714,7 +3720,7 @@
               <a:buNone/>
             </a:pPr>
             <a:r>
-              <a:rPr lang="en-US" sz="1000" b="1" dirty="0">
+              <a:rPr lang="en-US" sz="1100" b="1" dirty="0">
                 <a:solidFill>
                   <a:srgbClr val="0969DA"/>
                 </a:solidFill>
@@ -3724,7 +3730,7 @@
               </a:rPr>
               <a:t>GENERATE AND PREVIEW</a:t>
             </a:r>
-            <a:endParaRPr lang="en-US" sz="1000" dirty="0"/>
+            <a:endParaRPr lang="en-US" sz="1100" dirty="0"/>
           </a:p>
         </p:txBody>
       </p:sp>
@@ -3736,8 +3742,8 @@
         </p:nvSpPr>
         <p:spPr>
           <a:xfrm>
-            <a:off x="482501" y="523726"/>
-            <a:ext cx="7772400" cy="393650"/>
+            <a:off x="482501" y="533251"/>
+            <a:ext cx="8342275" cy="419100"/>
           </a:xfrm>
           <a:prstGeom prst="rect">
             <a:avLst/>
@@ -3751,7 +3757,7 @@
           <a:p>
             <a:pPr algn="l" indent="0" marL="0">
               <a:lnSpc>
-                <a:spcPts val="3100"/>
+                <a:spcPts val="3300"/>
               </a:lnSpc>
               <a:spcBef>
                 <a:spcPts val="400"/>
@@ -3759,7 +3765,7 @@
               <a:buNone/>
             </a:pPr>
             <a:r>
-              <a:rPr lang="en-US" sz="2600" b="1" dirty="0">
+              <a:rPr lang="en-US" sz="2800" b="1" dirty="0">
                 <a:solidFill>
                   <a:srgbClr val="1F2328"/>
                 </a:solidFill>
@@ -3769,7 +3775,7 @@
               </a:rPr>
               <a:t>Generate, then preview. Don't deploy yet.</a:t>
             </a:r>
-            <a:endParaRPr lang="en-US" sz="2600" dirty="0"/>
+            <a:endParaRPr lang="en-US" sz="2800" dirty="0"/>
           </a:p>
         </p:txBody>
       </p:sp>
@@ -3781,12 +3787,12 @@
         </p:nvSpPr>
         <p:spPr>
           <a:xfrm>
-            <a:off x="634901" y="1946077"/>
-            <a:ext cx="7873901" cy="2178248"/>
+            <a:off x="634901" y="1846064"/>
+            <a:ext cx="7873901" cy="2429173"/>
           </a:xfrm>
           <a:prstGeom prst="roundRect">
             <a:avLst>
-              <a:gd name="adj" fmla="val 4664"/>
+              <a:gd name="adj" fmla="val 4183"/>
             </a:avLst>
           </a:prstGeom>
           <a:solidFill>
@@ -3820,7 +3826,7 @@
         </p:nvSpPr>
         <p:spPr>
           <a:xfrm>
-            <a:off x="634901" y="1950839"/>
+            <a:off x="634901" y="1850827"/>
             <a:ext cx="7873901" cy="0"/>
           </a:xfrm>
           <a:prstGeom prst="line">
@@ -3843,8 +3849,8 @@
         </p:nvSpPr>
         <p:spPr>
           <a:xfrm>
-            <a:off x="8504039" y="1946077"/>
-            <a:ext cx="0" cy="2178248"/>
+            <a:off x="8504039" y="1846064"/>
+            <a:ext cx="0" cy="2429173"/>
           </a:xfrm>
           <a:prstGeom prst="line">
             <a:avLst/>
@@ -3866,7 +3872,7 @@
         </p:nvSpPr>
         <p:spPr>
           <a:xfrm>
-            <a:off x="634901" y="4119563"/>
+            <a:off x="634901" y="4270474"/>
             <a:ext cx="7873901" cy="0"/>
           </a:xfrm>
           <a:prstGeom prst="line">
@@ -3889,8 +3895,8 @@
         </p:nvSpPr>
         <p:spPr>
           <a:xfrm>
-            <a:off x="663476" y="1946077"/>
-            <a:ext cx="0" cy="2178248"/>
+            <a:off x="663476" y="1846064"/>
+            <a:ext cx="0" cy="2429173"/>
           </a:xfrm>
           <a:prstGeom prst="line">
             <a:avLst/>
@@ -3920,8 +3926,8 @@
         </p:blipFill>
         <p:spPr>
           <a:xfrm>
-            <a:off x="945952" y="2158752"/>
-            <a:ext cx="165050" cy="165050"/>
+            <a:off x="971401" y="2084189"/>
+            <a:ext cx="190500" cy="190500"/>
           </a:xfrm>
           <a:prstGeom prst="rect">
             <a:avLst/>
@@ -3936,8 +3942,8 @@
         </p:nvSpPr>
         <p:spPr>
           <a:xfrm>
-            <a:off x="1187202" y="2174528"/>
-            <a:ext cx="498830" cy="133350"/>
+            <a:off x="1238101" y="2103239"/>
+            <a:ext cx="1423169" cy="152400"/>
           </a:xfrm>
           <a:prstGeom prst="rect">
             <a:avLst/>
@@ -3953,7 +3959,7 @@
               <a:buNone/>
             </a:pPr>
             <a:r>
-              <a:rPr lang="en-US" sz="900" b="1" dirty="0">
+              <a:rPr lang="en-US" sz="1050" dirty="0">
                 <a:solidFill>
                   <a:srgbClr val="8250DF"/>
                 </a:solidFill>
@@ -3963,7 +3969,21 @@
               </a:rPr>
               <a:t>PROMPT</a:t>
             </a:r>
-            <a:endParaRPr lang="en-US" sz="900" dirty="0"/>
+            <a:pPr algn="l" indent="0" marL="0">
+              <a:buNone/>
+            </a:pPr>
+            <a:r>
+              <a:rPr lang="en-US" sz="1050" b="1" dirty="0">
+                <a:solidFill>
+                  <a:srgbClr val="818B98"/>
+                </a:solidFill>
+                <a:latin typeface="Arial" pitchFamily="34" charset="0"/>
+                <a:ea typeface="Arial" pitchFamily="34" charset="-122"/>
+                <a:cs typeface="Arial" pitchFamily="34" charset="-120"/>
+              </a:rPr>
+              <a:t> · ABRIDGED</a:t>
+            </a:r>
+            <a:endParaRPr lang="en-US" sz="1050" dirty="0"/>
           </a:p>
         </p:txBody>
       </p:sp>
@@ -3975,8 +3995,8 @@
         </p:nvSpPr>
         <p:spPr>
           <a:xfrm>
-            <a:off x="945952" y="2425303"/>
-            <a:ext cx="7445413" cy="1460897"/>
+            <a:off x="971401" y="2388840"/>
+            <a:ext cx="7393496" cy="1622971"/>
           </a:xfrm>
           <a:prstGeom prst="rect">
             <a:avLst/>
@@ -3990,12 +4010,12 @@
           <a:p>
             <a:pPr algn="l" indent="0" marL="0">
               <a:lnSpc>
-                <a:spcPts val="1917"/>
+                <a:spcPts val="2556"/>
               </a:lnSpc>
               <a:buNone/>
             </a:pPr>
             <a:r>
-              <a:rPr lang="en-US" sz="1350" dirty="0">
+              <a:rPr lang="en-US" sz="1800" dirty="0">
                 <a:solidFill>
                   <a:srgbClr val="1F2328"/>
                 </a:solidFill>
@@ -4007,12 +4027,12 @@
             </a:r>
             <a:pPr algn="l" indent="0" marL="0">
               <a:lnSpc>
-                <a:spcPts val="1917"/>
+                <a:spcPts val="2556"/>
               </a:lnSpc>
               <a:buNone/>
             </a:pPr>
             <a:r>
-              <a:rPr lang="en-US" sz="1350" b="1" dirty="0">
+              <a:rPr lang="en-US" sz="1800" b="1" dirty="0">
                 <a:solidFill>
                   <a:srgbClr val="1F2328"/>
                 </a:solidFill>
@@ -4024,12 +4044,12 @@
             </a:r>
             <a:pPr algn="l" indent="0" marL="0">
               <a:lnSpc>
-                <a:spcPts val="1917"/>
+                <a:spcPts val="2556"/>
               </a:lnSpc>
               <a:buNone/>
             </a:pPr>
             <a:r>
-              <a:rPr lang="en-US" sz="1350" dirty="0">
+              <a:rPr lang="en-US" sz="1800" dirty="0">
                 <a:solidFill>
                   <a:srgbClr val="1F2328"/>
                 </a:solidFill>
@@ -4037,16 +4057,16 @@
                 <a:ea typeface="Arial" pitchFamily="34" charset="-122"/>
                 <a:cs typeface="Arial" pitchFamily="34" charset="-120"/>
               </a:rPr>
-              <a:t>. Prepare the azd environment for westus and my current subscription, then </a:t>
+              <a:t>. … Then </a:t>
             </a:r>
             <a:pPr algn="l" indent="0" marL="0">
               <a:lnSpc>
-                <a:spcPts val="1917"/>
+                <a:spcPts val="2556"/>
               </a:lnSpc>
               <a:buNone/>
             </a:pPr>
             <a:r>
-              <a:rPr lang="en-US" sz="1350" b="1" dirty="0">
+              <a:rPr lang="en-US" sz="1800" b="1" dirty="0">
                 <a:solidFill>
                   <a:srgbClr val="1F2328"/>
                 </a:solidFill>
@@ -4058,12 +4078,12 @@
             </a:r>
             <a:pPr algn="l" indent="0" marL="0">
               <a:lnSpc>
-                <a:spcPts val="1917"/>
+                <a:spcPts val="2556"/>
               </a:lnSpc>
               <a:buNone/>
             </a:pPr>
             <a:r>
-              <a:rPr lang="en-US" sz="1350" dirty="0">
+              <a:rPr lang="en-US" sz="1800" dirty="0">
                 <a:solidFill>
                   <a:srgbClr val="1F2328"/>
                 </a:solidFill>
@@ -4075,12 +4095,12 @@
             </a:r>
             <a:pPr algn="l" indent="0" marL="0">
               <a:lnSpc>
-                <a:spcPts val="1917"/>
+                <a:spcPts val="2556"/>
               </a:lnSpc>
               <a:buNone/>
             </a:pPr>
             <a:r>
-              <a:rPr lang="en-US" sz="1350" b="1" dirty="0">
+              <a:rPr lang="en-US" sz="1800" b="1" dirty="0">
                 <a:solidFill>
                   <a:srgbClr val="1F2328"/>
                 </a:solidFill>
@@ -4092,12 +4112,12 @@
             </a:r>
             <a:pPr algn="l" indent="0" marL="0">
               <a:lnSpc>
-                <a:spcPts val="1917"/>
+                <a:spcPts val="2556"/>
               </a:lnSpc>
               <a:buNone/>
             </a:pPr>
             <a:r>
-              <a:rPr lang="en-US" sz="1350" dirty="0">
+              <a:rPr lang="en-US" sz="1800" dirty="0">
                 <a:solidFill>
                   <a:srgbClr val="1F2328"/>
                 </a:solidFill>
@@ -4105,16 +4125,16 @@
                 <a:ea typeface="Arial" pitchFamily="34" charset="-122"/>
                 <a:cs typeface="Arial" pitchFamily="34" charset="-120"/>
               </a:rPr>
-              <a:t> If a step fails, inspect the relevant logs, make the smallest safe correction, rerun the failed step, and record the problem and resolution in issues.md. </a:t>
+              <a:t> … </a:t>
             </a:r>
             <a:pPr algn="l" indent="0" marL="0">
               <a:lnSpc>
-                <a:spcPts val="1917"/>
+                <a:spcPts val="2556"/>
               </a:lnSpc>
               <a:buNone/>
             </a:pPr>
             <a:r>
-              <a:rPr lang="en-US" sz="1350" b="1" dirty="0">
+              <a:rPr lang="en-US" sz="1800" b="1" dirty="0">
                 <a:solidFill>
                   <a:srgbClr val="1F2328"/>
                 </a:solidFill>
@@ -4124,7 +4144,7 @@
               </a:rPr>
               <a:t>Do not print secrets.</a:t>
             </a:r>
-            <a:endParaRPr lang="en-US" sz="1350" dirty="0"/>
+            <a:endParaRPr lang="en-US" sz="1800" dirty="0"/>
           </a:p>
         </p:txBody>
       </p:sp>
@@ -4168,12 +4188,12 @@
         </p:nvSpPr>
         <p:spPr>
           <a:xfrm>
-            <a:off x="7740700" y="152400"/>
-            <a:ext cx="819150" cy="266700"/>
+            <a:off x="7652742" y="152400"/>
+            <a:ext cx="907107" cy="279350"/>
           </a:xfrm>
           <a:prstGeom prst="roundRect">
             <a:avLst>
-              <a:gd name="adj" fmla="val 23810"/>
+              <a:gd name="adj" fmla="val 22731"/>
             </a:avLst>
           </a:prstGeom>
           <a:solidFill>
@@ -4200,8 +4220,8 @@
         </p:nvSpPr>
         <p:spPr>
           <a:xfrm>
-            <a:off x="7861998" y="219075"/>
-            <a:ext cx="576554" cy="133350"/>
+            <a:off x="7786064" y="220563"/>
+            <a:ext cx="640464" cy="142875"/>
           </a:xfrm>
           <a:prstGeom prst="rect">
             <a:avLst/>
@@ -4217,7 +4237,7 @@
               <a:buNone/>
             </a:pPr>
             <a:r>
-              <a:rPr lang="en-US" sz="900" b="1" dirty="0">
+              <a:rPr lang="en-US" sz="1000" b="1" dirty="0">
                 <a:solidFill>
                   <a:srgbClr val="FFFFFF"/>
                 </a:solidFill>
@@ -4227,7 +4247,7 @@
               </a:rPr>
               <a:t>GRAFANA</a:t>
             </a:r>
-            <a:endParaRPr lang="en-US" sz="900" dirty="0"/>
+            <a:endParaRPr lang="en-US" sz="1000" dirty="0"/>
           </a:p>
         </p:txBody>
       </p:sp>
@@ -4336,7 +4356,7 @@
         <p:spPr>
           <a:xfrm>
             <a:off x="558701" y="1828651"/>
-            <a:ext cx="3886200" cy="142875"/>
+            <a:ext cx="3886200" cy="152400"/>
           </a:xfrm>
           <a:prstGeom prst="rect">
             <a:avLst/>
@@ -4355,7 +4375,7 @@
               <a:buNone/>
             </a:pPr>
             <a:r>
-              <a:rPr lang="en-US" sz="1000" b="1" dirty="0">
+              <a:rPr lang="en-US" sz="1100" b="1" dirty="0">
                 <a:solidFill>
                   <a:srgbClr val="59636E"/>
                 </a:solidFill>
@@ -4365,7 +4385,7 @@
               </a:rPr>
               <a:t>SECTION 2 OF 3</a:t>
             </a:r>
-            <a:endParaRPr lang="en-US" sz="1000" dirty="0"/>
+            <a:endParaRPr lang="en-US" sz="1100" dirty="0"/>
           </a:p>
         </p:txBody>
       </p:sp>
@@ -4377,8 +4397,8 @@
         </p:nvSpPr>
         <p:spPr>
           <a:xfrm>
-            <a:off x="558701" y="2034927"/>
-            <a:ext cx="3886200" cy="444550"/>
+            <a:off x="558701" y="2044452"/>
+            <a:ext cx="3886200" cy="469850"/>
           </a:xfrm>
           <a:prstGeom prst="rect">
             <a:avLst/>
@@ -4392,7 +4412,7 @@
           <a:p>
             <a:pPr algn="l" indent="0" marL="0">
               <a:lnSpc>
-                <a:spcPts val="3500"/>
+                <a:spcPts val="3700"/>
               </a:lnSpc>
               <a:spcBef>
                 <a:spcPts val="500"/>
@@ -4400,7 +4420,7 @@
               <a:buNone/>
             </a:pPr>
             <a:r>
-              <a:rPr lang="en-US" sz="3000" b="1" dirty="0">
+              <a:rPr lang="en-US" sz="3200" b="1" dirty="0">
                 <a:solidFill>
                   <a:srgbClr val="1F2328"/>
                 </a:solidFill>
@@ -4410,7 +4430,7 @@
               </a:rPr>
               <a:t>Deploy and verify</a:t>
             </a:r>
-            <a:endParaRPr lang="en-US" sz="3000" dirty="0"/>
+            <a:endParaRPr lang="en-US" sz="3200" dirty="0"/>
           </a:p>
         </p:txBody>
       </p:sp>
@@ -4422,8 +4442,8 @@
         </p:nvSpPr>
         <p:spPr>
           <a:xfrm>
-            <a:off x="558701" y="2606427"/>
-            <a:ext cx="3886200" cy="482501"/>
+            <a:off x="558701" y="2666702"/>
+            <a:ext cx="3886200" cy="533400"/>
           </a:xfrm>
           <a:prstGeom prst="rect">
             <a:avLst/>
@@ -4437,15 +4457,15 @@
           <a:p>
             <a:pPr algn="l" indent="0" marL="0">
               <a:lnSpc>
-                <a:spcPts val="1900"/>
+                <a:spcPts val="2100"/>
               </a:lnSpc>
               <a:spcBef>
-                <a:spcPts val="1000"/>
+                <a:spcPts val="1200"/>
               </a:spcBef>
               <a:buNone/>
             </a:pPr>
             <a:r>
-              <a:rPr lang="en-US" sz="1400" dirty="0">
+              <a:rPr lang="en-US" sz="1600" dirty="0">
                 <a:solidFill>
                   <a:srgbClr val="59636E"/>
                 </a:solidFill>
@@ -4455,7 +4475,7 @@
               </a:rPr>
               <a:t>One command to deploy. A checked-in verifier to prove it.</a:t>
             </a:r>
-            <a:endParaRPr lang="en-US" sz="1400" dirty="0"/>
+            <a:endParaRPr lang="en-US" sz="1600" dirty="0"/>
           </a:p>
         </p:txBody>
       </p:sp>
@@ -4524,11 +4544,11 @@
         <p:spPr>
           <a:xfrm>
             <a:off x="558701" y="4368701"/>
-            <a:ext cx="1422797" cy="336352"/>
+            <a:ext cx="1564184" cy="361652"/>
           </a:xfrm>
           <a:prstGeom prst="roundRect">
             <a:avLst>
-              <a:gd name="adj" fmla="val 52861"/>
+              <a:gd name="adj" fmla="val 52675"/>
             </a:avLst>
           </a:prstGeom>
           <a:solidFill>
@@ -4560,11 +4580,11 @@
         <p:spPr>
           <a:xfrm>
             <a:off x="644426" y="4441627"/>
-            <a:ext cx="190500" cy="190500"/>
+            <a:ext cx="215801" cy="215801"/>
           </a:xfrm>
           <a:prstGeom prst="roundRect">
             <a:avLst>
-              <a:gd name="adj" fmla="val 480000"/>
+              <a:gd name="adj" fmla="val 423724"/>
             </a:avLst>
           </a:prstGeom>
           <a:solidFill>
@@ -4591,8 +4611,8 @@
         </p:nvSpPr>
         <p:spPr>
           <a:xfrm>
-            <a:off x="710833" y="4479727"/>
-            <a:ext cx="57686" cy="114300"/>
+            <a:off x="719840" y="4482852"/>
+            <a:ext cx="64972" cy="133350"/>
           </a:xfrm>
           <a:prstGeom prst="rect">
             <a:avLst/>
@@ -4608,7 +4628,7 @@
               <a:buNone/>
             </a:pPr>
             <a:r>
-              <a:rPr lang="en-US" sz="800" b="1" dirty="0">
+              <a:rPr lang="en-US" sz="900" b="1" dirty="0">
                 <a:solidFill>
                   <a:srgbClr val="818B98"/>
                 </a:solidFill>
@@ -4618,7 +4638,7 @@
               </a:rPr>
               <a:t>1</a:t>
             </a:r>
-            <a:endParaRPr lang="en-US" sz="800" dirty="0"/>
+            <a:endParaRPr lang="en-US" sz="900" dirty="0"/>
           </a:p>
         </p:txBody>
       </p:sp>
@@ -4630,8 +4650,8 @@
         </p:nvSpPr>
         <p:spPr>
           <a:xfrm>
-            <a:off x="911126" y="4470202"/>
-            <a:ext cx="952574" cy="133350"/>
+            <a:off x="936427" y="4478089"/>
+            <a:ext cx="1058079" cy="142875"/>
           </a:xfrm>
           <a:prstGeom prst="rect">
             <a:avLst/>
@@ -4647,7 +4667,7 @@
               <a:buNone/>
             </a:pPr>
             <a:r>
-              <a:rPr lang="en-US" sz="900" b="1" dirty="0">
+              <a:rPr lang="en-US" sz="1000" b="1" dirty="0">
                 <a:solidFill>
                   <a:srgbClr val="818B98"/>
                 </a:solidFill>
@@ -4657,7 +4677,7 @@
               </a:rPr>
               <a:t>Plan and preview</a:t>
             </a:r>
-            <a:endParaRPr lang="en-US" sz="900" dirty="0"/>
+            <a:endParaRPr lang="en-US" sz="1000" dirty="0"/>
           </a:p>
         </p:txBody>
       </p:sp>
@@ -4669,12 +4689,12 @@
         </p:nvSpPr>
         <p:spPr>
           <a:xfrm>
-            <a:off x="2082998" y="4368701"/>
-            <a:ext cx="1441698" cy="336352"/>
+            <a:off x="2224385" y="4368701"/>
+            <a:ext cx="1585317" cy="361652"/>
           </a:xfrm>
           <a:prstGeom prst="roundRect">
             <a:avLst>
-              <a:gd name="adj" fmla="val 52861"/>
+              <a:gd name="adj" fmla="val 52675"/>
             </a:avLst>
           </a:prstGeom>
           <a:solidFill>
@@ -4705,12 +4725,12 @@
         </p:nvSpPr>
         <p:spPr>
           <a:xfrm>
-            <a:off x="2168723" y="4441627"/>
-            <a:ext cx="190500" cy="190500"/>
+            <a:off x="2310110" y="4441627"/>
+            <a:ext cx="215801" cy="215801"/>
           </a:xfrm>
           <a:prstGeom prst="roundRect">
             <a:avLst>
-              <a:gd name="adj" fmla="val 480000"/>
+              <a:gd name="adj" fmla="val 423724"/>
             </a:avLst>
           </a:prstGeom>
           <a:solidFill>
@@ -4737,8 +4757,8 @@
         </p:nvSpPr>
         <p:spPr>
           <a:xfrm>
-            <a:off x="2235131" y="4479727"/>
-            <a:ext cx="57686" cy="114300"/>
+            <a:off x="2385524" y="4482852"/>
+            <a:ext cx="64972" cy="133350"/>
           </a:xfrm>
           <a:prstGeom prst="rect">
             <a:avLst/>
@@ -4754,7 +4774,7 @@
               <a:buNone/>
             </a:pPr>
             <a:r>
-              <a:rPr lang="en-US" sz="800" b="1" dirty="0">
+              <a:rPr lang="en-US" sz="900" b="1" dirty="0">
                 <a:solidFill>
                   <a:srgbClr val="8250DF"/>
                 </a:solidFill>
@@ -4764,7 +4784,7 @@
               </a:rPr>
               <a:t>2</a:t>
             </a:r>
-            <a:endParaRPr lang="en-US" sz="800" dirty="0"/>
+            <a:endParaRPr lang="en-US" sz="900" dirty="0"/>
           </a:p>
         </p:txBody>
       </p:sp>
@@ -4776,8 +4796,8 @@
         </p:nvSpPr>
         <p:spPr>
           <a:xfrm>
-            <a:off x="2435423" y="4470202"/>
-            <a:ext cx="971854" cy="133350"/>
+            <a:off x="2602111" y="4478089"/>
+            <a:ext cx="1079635" cy="142875"/>
           </a:xfrm>
           <a:prstGeom prst="rect">
             <a:avLst/>
@@ -4793,7 +4813,7 @@
               <a:buNone/>
             </a:pPr>
             <a:r>
-              <a:rPr lang="en-US" sz="900" b="1" dirty="0">
+              <a:rPr lang="en-US" sz="1000" b="1" dirty="0">
                 <a:solidFill>
                   <a:srgbClr val="FFFFFF"/>
                 </a:solidFill>
@@ -4803,7 +4823,7 @@
               </a:rPr>
               <a:t>Deploy and verify</a:t>
             </a:r>
-            <a:endParaRPr lang="en-US" sz="900" dirty="0"/>
+            <a:endParaRPr lang="en-US" sz="1000" dirty="0"/>
           </a:p>
         </p:txBody>
       </p:sp>
@@ -4815,12 +4835,12 @@
         </p:nvSpPr>
         <p:spPr>
           <a:xfrm>
-            <a:off x="3626197" y="4368701"/>
-            <a:ext cx="1460897" cy="336352"/>
+            <a:off x="3911203" y="4368701"/>
+            <a:ext cx="1606600" cy="361652"/>
           </a:xfrm>
           <a:prstGeom prst="roundRect">
             <a:avLst>
-              <a:gd name="adj" fmla="val 52861"/>
+              <a:gd name="adj" fmla="val 52675"/>
             </a:avLst>
           </a:prstGeom>
           <a:solidFill>
@@ -4851,12 +4871,12 @@
         </p:nvSpPr>
         <p:spPr>
           <a:xfrm>
-            <a:off x="3711922" y="4441627"/>
-            <a:ext cx="190500" cy="190500"/>
+            <a:off x="3996928" y="4441627"/>
+            <a:ext cx="215801" cy="215801"/>
           </a:xfrm>
           <a:prstGeom prst="roundRect">
             <a:avLst>
-              <a:gd name="adj" fmla="val 480000"/>
+              <a:gd name="adj" fmla="val 423724"/>
             </a:avLst>
           </a:prstGeom>
           <a:solidFill>
@@ -4883,8 +4903,8 @@
         </p:nvSpPr>
         <p:spPr>
           <a:xfrm>
-            <a:off x="3778329" y="4479727"/>
-            <a:ext cx="57686" cy="114300"/>
+            <a:off x="4072342" y="4482852"/>
+            <a:ext cx="64972" cy="133350"/>
           </a:xfrm>
           <a:prstGeom prst="rect">
             <a:avLst/>
@@ -4900,7 +4920,7 @@
               <a:buNone/>
             </a:pPr>
             <a:r>
-              <a:rPr lang="en-US" sz="800" b="1" dirty="0">
+              <a:rPr lang="en-US" sz="900" b="1" dirty="0">
                 <a:solidFill>
                   <a:srgbClr val="818B98"/>
                 </a:solidFill>
@@ -4910,7 +4930,7 @@
               </a:rPr>
               <a:t>3</a:t>
             </a:r>
-            <a:endParaRPr lang="en-US" sz="800" dirty="0"/>
+            <a:endParaRPr lang="en-US" sz="900" dirty="0"/>
           </a:p>
         </p:txBody>
       </p:sp>
@@ -4922,8 +4942,8 @@
         </p:nvSpPr>
         <p:spPr>
           <a:xfrm>
-            <a:off x="3978622" y="4470202"/>
-            <a:ext cx="991436" cy="133350"/>
+            <a:off x="4288929" y="4478089"/>
+            <a:ext cx="1101343" cy="142875"/>
           </a:xfrm>
           <a:prstGeom prst="rect">
             <a:avLst/>
@@ -4939,7 +4959,7 @@
               <a:buNone/>
             </a:pPr>
             <a:r>
-              <a:rPr lang="en-US" sz="900" b="1" dirty="0">
+              <a:rPr lang="en-US" sz="1000" b="1" dirty="0">
                 <a:solidFill>
                   <a:srgbClr val="818B98"/>
                 </a:solidFill>
@@ -4949,7 +4969,7 @@
               </a:rPr>
               <a:t>Operate and learn</a:t>
             </a:r>
-            <a:endParaRPr lang="en-US" sz="900" dirty="0"/>
+            <a:endParaRPr lang="en-US" sz="1000" dirty="0"/>
           </a:p>
         </p:txBody>
       </p:sp>
@@ -4993,12 +5013,12 @@
         </p:nvSpPr>
         <p:spPr>
           <a:xfrm>
-            <a:off x="7740700" y="152400"/>
-            <a:ext cx="819150" cy="266700"/>
+            <a:off x="7652742" y="152400"/>
+            <a:ext cx="907107" cy="279350"/>
           </a:xfrm>
           <a:prstGeom prst="roundRect">
             <a:avLst>
-              <a:gd name="adj" fmla="val 23810"/>
+              <a:gd name="adj" fmla="val 22731"/>
             </a:avLst>
           </a:prstGeom>
           <a:solidFill>
@@ -5025,8 +5045,8 @@
         </p:nvSpPr>
         <p:spPr>
           <a:xfrm>
-            <a:off x="7861998" y="219075"/>
-            <a:ext cx="576554" cy="133350"/>
+            <a:off x="7786064" y="220563"/>
+            <a:ext cx="640464" cy="142875"/>
           </a:xfrm>
           <a:prstGeom prst="rect">
             <a:avLst/>
@@ -5042,7 +5062,7 @@
               <a:buNone/>
             </a:pPr>
             <a:r>
-              <a:rPr lang="en-US" sz="900" b="1" dirty="0">
+              <a:rPr lang="en-US" sz="1000" b="1" dirty="0">
                 <a:solidFill>
                   <a:srgbClr val="FFFFFF"/>
                 </a:solidFill>
@@ -5052,7 +5072,7 @@
               </a:rPr>
               <a:t>GRAFANA</a:t>
             </a:r>
-            <a:endParaRPr lang="en-US" sz="900" dirty="0"/>
+            <a:endParaRPr lang="en-US" sz="1000" dirty="0"/>
           </a:p>
         </p:txBody>
       </p:sp>
@@ -5089,7 +5109,7 @@
         <p:spPr>
           <a:xfrm>
             <a:off x="482501" y="330101"/>
-            <a:ext cx="7772400" cy="142875"/>
+            <a:ext cx="8342275" cy="152400"/>
           </a:xfrm>
           <a:prstGeom prst="rect">
             <a:avLst/>
@@ -5105,7 +5125,7 @@
               <a:buNone/>
             </a:pPr>
             <a:r>
-              <a:rPr lang="en-US" sz="1000" b="1" dirty="0">
+              <a:rPr lang="en-US" sz="1100" b="1" dirty="0">
                 <a:solidFill>
                   <a:srgbClr val="8250DF"/>
                 </a:solidFill>
@@ -5115,7 +5135,7 @@
               </a:rPr>
               <a:t>SHIP AND VERIFY</a:t>
             </a:r>
-            <a:endParaRPr lang="en-US" sz="1000" dirty="0"/>
+            <a:endParaRPr lang="en-US" sz="1100" dirty="0"/>
           </a:p>
         </p:txBody>
       </p:sp>
@@ -5127,8 +5147,8 @@
         </p:nvSpPr>
         <p:spPr>
           <a:xfrm>
-            <a:off x="482501" y="523726"/>
-            <a:ext cx="7772400" cy="393650"/>
+            <a:off x="482501" y="533251"/>
+            <a:ext cx="8342275" cy="419100"/>
           </a:xfrm>
           <a:prstGeom prst="rect">
             <a:avLst/>
@@ -5142,7 +5162,7 @@
           <a:p>
             <a:pPr algn="l" indent="0" marL="0">
               <a:lnSpc>
-                <a:spcPts val="3100"/>
+                <a:spcPts val="3300"/>
               </a:lnSpc>
               <a:spcBef>
                 <a:spcPts val="400"/>
@@ -5150,7 +5170,7 @@
               <a:buNone/>
             </a:pPr>
             <a:r>
-              <a:rPr lang="en-US" sz="2600" b="1" dirty="0">
+              <a:rPr lang="en-US" sz="2800" b="1" dirty="0">
                 <a:solidFill>
                   <a:srgbClr val="1F2328"/>
                 </a:solidFill>
@@ -5160,7 +5180,7 @@
               </a:rPr>
               <a:t>Deploy, then prove it</a:t>
             </a:r>
-            <a:endParaRPr lang="en-US" sz="2600" dirty="0"/>
+            <a:endParaRPr lang="en-US" sz="2800" dirty="0"/>
           </a:p>
         </p:txBody>
       </p:sp>
@@ -5172,7 +5192,7 @@
         </p:nvSpPr>
         <p:spPr>
           <a:xfrm>
-            <a:off x="1015901" y="1739801"/>
+            <a:off x="1015901" y="1714649"/>
             <a:ext cx="7111901" cy="1879402"/>
           </a:xfrm>
           <a:prstGeom prst="roundRect">
@@ -5211,7 +5231,7 @@
         </p:nvSpPr>
         <p:spPr>
           <a:xfrm>
-            <a:off x="1015901" y="1739801"/>
+            <a:off x="1015901" y="1714649"/>
             <a:ext cx="7111901" cy="253901"/>
           </a:xfrm>
           <a:prstGeom prst="roundRect">
@@ -5243,7 +5263,7 @@
         </p:nvSpPr>
         <p:spPr>
           <a:xfrm>
-            <a:off x="1142851" y="1822252"/>
+            <a:off x="1142851" y="1797100"/>
             <a:ext cx="88850" cy="88850"/>
           </a:xfrm>
           <a:prstGeom prst="roundRect">
@@ -5275,7 +5295,7 @@
         </p:nvSpPr>
         <p:spPr>
           <a:xfrm>
-            <a:off x="1295102" y="1822252"/>
+            <a:off x="1295102" y="1797100"/>
             <a:ext cx="88850" cy="88850"/>
           </a:xfrm>
           <a:prstGeom prst="roundRect">
@@ -5307,7 +5327,7 @@
         </p:nvSpPr>
         <p:spPr>
           <a:xfrm>
-            <a:off x="1447354" y="1822252"/>
+            <a:off x="1447354" y="1797100"/>
             <a:ext cx="88850" cy="88850"/>
           </a:xfrm>
           <a:prstGeom prst="roundRect">
@@ -5339,8 +5359,8 @@
         </p:nvSpPr>
         <p:spPr>
           <a:xfrm>
-            <a:off x="1701105" y="1809601"/>
-            <a:ext cx="528584" cy="114300"/>
+            <a:off x="1701105" y="1770162"/>
+            <a:ext cx="621792" cy="142875"/>
           </a:xfrm>
           <a:prstGeom prst="rect">
             <a:avLst/>
@@ -5356,7 +5376,7 @@
               <a:buNone/>
             </a:pPr>
             <a:r>
-              <a:rPr lang="en-US" sz="850" dirty="0">
+              <a:rPr lang="en-US" sz="1000" dirty="0">
                 <a:solidFill>
                   <a:srgbClr val="8B949E"/>
                 </a:solidFill>
@@ -5366,7 +5386,7 @@
               </a:rPr>
               <a:t>Terminal</a:t>
             </a:r>
-            <a:endParaRPr lang="en-US" sz="850" dirty="0"/>
+            <a:endParaRPr lang="en-US" sz="1000" dirty="0"/>
           </a:p>
         </p:txBody>
       </p:sp>
@@ -5378,7 +5398,7 @@
         </p:nvSpPr>
         <p:spPr>
           <a:xfrm>
-            <a:off x="1244501" y="2171402"/>
+            <a:off x="1244501" y="2146250"/>
             <a:ext cx="6787795" cy="275630"/>
           </a:xfrm>
           <a:prstGeom prst="rect">
@@ -5437,7 +5457,7 @@
         </p:nvSpPr>
         <p:spPr>
           <a:xfrm>
-            <a:off x="1244501" y="2589163"/>
+            <a:off x="1244501" y="2564011"/>
             <a:ext cx="6787795" cy="275630"/>
           </a:xfrm>
           <a:prstGeom prst="rect">
@@ -5496,7 +5516,7 @@
         </p:nvSpPr>
         <p:spPr>
           <a:xfrm>
-            <a:off x="1244501" y="2864793"/>
+            <a:off x="1244501" y="2839641"/>
             <a:ext cx="6787795" cy="275630"/>
           </a:xfrm>
           <a:prstGeom prst="rect">
@@ -5538,7 +5558,7 @@
         </p:nvSpPr>
         <p:spPr>
           <a:xfrm>
-            <a:off x="1244501" y="3140422"/>
+            <a:off x="1244501" y="3115270"/>
             <a:ext cx="6787795" cy="275630"/>
           </a:xfrm>
           <a:prstGeom prst="rect">
@@ -5566,7 +5586,7 @@
                 <a:ea typeface="Courier New" pitchFamily="34" charset="-122"/>
                 <a:cs typeface="Courier New" pitchFamily="34" charset="-120"/>
               </a:rPr>
-              <a:t>HTTP 200 and database=ok</a:t>
+              <a:t>​ HTTP 200 and database=ok</a:t>
             </a:r>
             <a:endParaRPr lang="en-US" sz="1400" dirty="0"/>
           </a:p>
@@ -5588,8 +5608,8 @@
         </p:blipFill>
         <p:spPr>
           <a:xfrm>
-            <a:off x="1015901" y="3968502"/>
-            <a:ext cx="190500" cy="190500"/>
+            <a:off x="1015901" y="4006751"/>
+            <a:ext cx="215801" cy="215801"/>
           </a:xfrm>
           <a:prstGeom prst="rect">
             <a:avLst/>
@@ -5604,8 +5624,8 @@
         </p:nvSpPr>
         <p:spPr>
           <a:xfrm>
-            <a:off x="1307902" y="3847802"/>
-            <a:ext cx="6956298" cy="431899"/>
+            <a:off x="1333202" y="3873401"/>
+            <a:ext cx="6930491" cy="482501"/>
           </a:xfrm>
           <a:prstGeom prst="rect">
             <a:avLst/>
@@ -5619,12 +5639,12 @@
           <a:p>
             <a:pPr algn="l" indent="0" marL="0">
               <a:lnSpc>
-                <a:spcPts val="1700"/>
+                <a:spcPts val="1900"/>
               </a:lnSpc>
               <a:buNone/>
             </a:pPr>
             <a:r>
-              <a:rPr lang="en-US" sz="1250" dirty="0">
+              <a:rPr lang="en-US" sz="1400" dirty="0">
                 <a:solidFill>
                   <a:srgbClr val="1F2328"/>
                 </a:solidFill>
@@ -5636,12 +5656,12 @@
             </a:r>
             <a:pPr algn="l" indent="0" marL="0">
               <a:lnSpc>
-                <a:spcPts val="1700"/>
+                <a:spcPts val="1900"/>
               </a:lnSpc>
               <a:buNone/>
             </a:pPr>
             <a:r>
-              <a:rPr lang="en-US" sz="1250" b="1" dirty="0">
+              <a:rPr lang="en-US" sz="1400" b="1" dirty="0">
                 <a:solidFill>
                   <a:srgbClr val="1F2328"/>
                 </a:solidFill>
@@ -5653,12 +5673,12 @@
             </a:r>
             <a:pPr algn="l" indent="0" marL="0">
               <a:lnSpc>
-                <a:spcPts val="1700"/>
+                <a:spcPts val="1900"/>
               </a:lnSpc>
               <a:buNone/>
             </a:pPr>
             <a:r>
-              <a:rPr lang="en-US" sz="1250" dirty="0">
+              <a:rPr lang="en-US" sz="1400" dirty="0">
                 <a:solidFill>
                   <a:srgbClr val="1F2328"/>
                 </a:solidFill>
@@ -5670,12 +5690,12 @@
             </a:r>
             <a:pPr algn="l" indent="0" marL="0">
               <a:lnSpc>
-                <a:spcPts val="1700"/>
+                <a:spcPts val="1900"/>
               </a:lnSpc>
               <a:buNone/>
             </a:pPr>
             <a:r>
-              <a:rPr lang="en-US" sz="1250" b="1" dirty="0">
+              <a:rPr lang="en-US" sz="1400" b="1" dirty="0">
                 <a:solidFill>
                   <a:srgbClr val="1F2328"/>
                 </a:solidFill>
@@ -5687,12 +5707,12 @@
             </a:r>
             <a:pPr algn="l" indent="0" marL="0">
               <a:lnSpc>
-                <a:spcPts val="1700"/>
+                <a:spcPts val="1900"/>
               </a:lnSpc>
               <a:buNone/>
             </a:pPr>
             <a:r>
-              <a:rPr lang="en-US" sz="1250" dirty="0">
+              <a:rPr lang="en-US" sz="1400" dirty="0">
                 <a:solidFill>
                   <a:srgbClr val="1F2328"/>
                 </a:solidFill>
@@ -5702,7 +5722,7 @@
               </a:rPr>
               <a:t>.</a:t>
             </a:r>
-            <a:endParaRPr lang="en-US" sz="1250" dirty="0"/>
+            <a:endParaRPr lang="en-US" sz="1400" dirty="0"/>
           </a:p>
         </p:txBody>
       </p:sp>
@@ -5746,12 +5766,12 @@
         </p:nvSpPr>
         <p:spPr>
           <a:xfrm>
-            <a:off x="7740700" y="152400"/>
-            <a:ext cx="819150" cy="266700"/>
+            <a:off x="7652742" y="152400"/>
+            <a:ext cx="907107" cy="279350"/>
           </a:xfrm>
           <a:prstGeom prst="roundRect">
             <a:avLst>
-              <a:gd name="adj" fmla="val 23810"/>
+              <a:gd name="adj" fmla="val 22731"/>
             </a:avLst>
           </a:prstGeom>
           <a:solidFill>
@@ -5778,8 +5798,8 @@
         </p:nvSpPr>
         <p:spPr>
           <a:xfrm>
-            <a:off x="7861998" y="219075"/>
-            <a:ext cx="576554" cy="133350"/>
+            <a:off x="7786064" y="220563"/>
+            <a:ext cx="640464" cy="142875"/>
           </a:xfrm>
           <a:prstGeom prst="rect">
             <a:avLst/>
@@ -5795,7 +5815,7 @@
               <a:buNone/>
             </a:pPr>
             <a:r>
-              <a:rPr lang="en-US" sz="900" b="1" dirty="0">
+              <a:rPr lang="en-US" sz="1000" b="1" dirty="0">
                 <a:solidFill>
                   <a:srgbClr val="FFFFFF"/>
                 </a:solidFill>
@@ -5805,7 +5825,7 @@
               </a:rPr>
               <a:t>GRAFANA</a:t>
             </a:r>
-            <a:endParaRPr lang="en-US" sz="900" dirty="0"/>
+            <a:endParaRPr lang="en-US" sz="1000" dirty="0"/>
           </a:p>
         </p:txBody>
       </p:sp>
@@ -5841,33 +5861,130 @@
         </p:nvSpPr>
         <p:spPr>
           <a:xfrm>
-            <a:off x="888950" y="1154311"/>
-            <a:ext cx="558701" cy="558701"/>
-          </a:xfrm>
-          <a:prstGeom prst="roundRect">
-            <a:avLst>
-              <a:gd name="adj" fmla="val 13639"/>
-            </a:avLst>
-          </a:prstGeom>
-          <a:solidFill>
-            <a:srgbClr val="FBEFFF"/>
-          </a:solidFill>
-          <a:ln/>
-        </p:spPr>
-        <p:txBody>
-          <a:bodyPr wrap="square" rtlCol="0" anchor="ctr"/>
-          <a:lstStyle/>
-          <a:p>
-            <a:pPr indent="0" marL="0">
-              <a:buNone/>
-            </a:pPr>
-            <a:endParaRPr lang="en-US" dirty="0"/>
+            <a:off x="482501" y="330101"/>
+            <a:ext cx="8342275" cy="152400"/>
+          </a:xfrm>
+          <a:prstGeom prst="rect">
+            <a:avLst/>
+          </a:prstGeom>
+          <a:noFill/>
+          <a:ln/>
+        </p:spPr>
+        <p:txBody>
+          <a:bodyPr wrap="square" lIns="0" tIns="0" rIns="0" bIns="0" rtlCol="0" anchor="t"/>
+          <a:lstStyle/>
+          <a:p>
+            <a:pPr algn="l" indent="0" marL="0">
+              <a:buNone/>
+            </a:pPr>
+            <a:r>
+              <a:rPr lang="en-US" sz="1100" b="1" dirty="0">
+                <a:solidFill>
+                  <a:srgbClr val="8250DF"/>
+                </a:solidFill>
+                <a:latin typeface="Arial" pitchFamily="34" charset="0"/>
+                <a:ea typeface="Arial" pitchFamily="34" charset="-122"/>
+                <a:cs typeface="Arial" pitchFamily="34" charset="-120"/>
+              </a:rPr>
+              <a:t>EXPECT THIS</a:t>
+            </a:r>
+            <a:endParaRPr lang="en-US" sz="1100" dirty="0"/>
+          </a:p>
+        </p:txBody>
+      </p:sp>
+      <p:sp>
+        <p:nvSpPr>
+          <p:cNvPr id="6" name="Text 3"/>
+          <p:cNvSpPr/>
+          <p:nvPr/>
+        </p:nvSpPr>
+        <p:spPr>
+          <a:xfrm>
+            <a:off x="482501" y="533251"/>
+            <a:ext cx="8342275" cy="419100"/>
+          </a:xfrm>
+          <a:prstGeom prst="rect">
+            <a:avLst/>
+          </a:prstGeom>
+          <a:noFill/>
+          <a:ln/>
+        </p:spPr>
+        <p:txBody>
+          <a:bodyPr wrap="square" lIns="0" tIns="0" rIns="0" bIns="0" rtlCol="0" anchor="t"/>
+          <a:lstStyle/>
+          <a:p>
+            <a:pPr algn="l" indent="0" marL="0">
+              <a:lnSpc>
+                <a:spcPts val="3300"/>
+              </a:lnSpc>
+              <a:spcBef>
+                <a:spcPts val="400"/>
+              </a:spcBef>
+              <a:buNone/>
+            </a:pPr>
+            <a:r>
+              <a:rPr lang="en-US" sz="2800" b="1" dirty="0">
+                <a:solidFill>
+                  <a:srgbClr val="1F2328"/>
+                </a:solidFill>
+                <a:latin typeface="Arial" pitchFamily="34" charset="0"/>
+                <a:ea typeface="Arial" pitchFamily="34" charset="-122"/>
+                <a:cs typeface="Arial" pitchFamily="34" charset="-120"/>
+              </a:rPr>
+              <a:t>A slow first request or a 502 is normal</a:t>
+            </a:r>
+            <a:endParaRPr lang="en-US" sz="2800" dirty="0"/>
+          </a:p>
+        </p:txBody>
+      </p:sp>
+      <p:sp>
+        <p:nvSpPr>
+          <p:cNvPr id="7" name="Text 4"/>
+          <p:cNvSpPr/>
+          <p:nvPr/>
+        </p:nvSpPr>
+        <p:spPr>
+          <a:xfrm>
+            <a:off x="482501" y="1028551"/>
+            <a:ext cx="8342275" cy="254050"/>
+          </a:xfrm>
+          <a:prstGeom prst="rect">
+            <a:avLst/>
+          </a:prstGeom>
+          <a:noFill/>
+          <a:ln/>
+        </p:spPr>
+        <p:txBody>
+          <a:bodyPr wrap="square" lIns="0" tIns="0" rIns="0" bIns="0" rtlCol="0" anchor="t"/>
+          <a:lstStyle/>
+          <a:p>
+            <a:pPr algn="l" indent="0" marL="0">
+              <a:lnSpc>
+                <a:spcPts val="2000"/>
+              </a:lnSpc>
+              <a:spcBef>
+                <a:spcPts val="600"/>
+              </a:spcBef>
+              <a:buNone/>
+            </a:pPr>
+            <a:r>
+              <a:rPr lang="en-US" sz="1600" dirty="0">
+                <a:solidFill>
+                  <a:srgbClr val="59636E"/>
+                </a:solidFill>
+                <a:latin typeface="Arial" pitchFamily="34" charset="0"/>
+                <a:ea typeface="Arial" pitchFamily="34" charset="-122"/>
+                <a:cs typeface="Arial" pitchFamily="34" charset="-120"/>
+              </a:rPr>
+              <a:t>With minReplicas set to 0, the first request wakes the app. Give it 30–60 seconds.</a:t>
+            </a:r>
+            <a:endParaRPr lang="en-US" sz="1600" dirty="0"/>
           </a:p>
         </p:txBody>
       </p:sp>
       <p:pic>
         <p:nvPicPr>
-          <p:cNvPr id="6" name="Image 1" descr="/Users/danwahlin/.copilot/session-state/a2da67da-2d7a-45f2-aa6a-2a42a7b82a72/files/build/icons/GoHourglass-8250DF.png">    </p:cNvPr>
+          <p:cNvPr id="8" name="Image 1" descr="/Users/danwahlin/.copilot/session-state/a2da67da-2d7a-45f2-aa6a-2a42a7b82a72/files/build/img/gen-cold-start.png">    </p:cNvPr>
           <p:cNvPicPr>
             <a:picLocks noChangeAspect="1"/>
           </p:cNvPicPr>
@@ -5881,143 +5998,14 @@
         </p:blipFill>
         <p:spPr>
           <a:xfrm>
-            <a:off x="1009501" y="1274862"/>
-            <a:ext cx="317450" cy="317450"/>
+            <a:off x="1150441" y="1498550"/>
+            <a:ext cx="6842671" cy="3352800"/>
           </a:xfrm>
           <a:prstGeom prst="rect">
             <a:avLst/>
           </a:prstGeom>
         </p:spPr>
       </p:pic>
-      <p:sp>
-        <p:nvSpPr>
-          <p:cNvPr id="7" name="Text 3"/>
-          <p:cNvSpPr/>
-          <p:nvPr/>
-        </p:nvSpPr>
-        <p:spPr>
-          <a:xfrm>
-            <a:off x="888950" y="1941612"/>
-            <a:ext cx="7513269" cy="142875"/>
-          </a:xfrm>
-          <a:prstGeom prst="rect">
-            <a:avLst/>
-          </a:prstGeom>
-          <a:noFill/>
-          <a:ln/>
-        </p:spPr>
-        <p:txBody>
-          <a:bodyPr wrap="square" lIns="0" tIns="0" rIns="0" bIns="0" rtlCol="0" anchor="t"/>
-          <a:lstStyle/>
-          <a:p>
-            <a:pPr algn="l" indent="0" marL="0">
-              <a:spcAft>
-                <a:spcPts val="1000"/>
-              </a:spcAft>
-              <a:buNone/>
-            </a:pPr>
-            <a:r>
-              <a:rPr lang="en-US" sz="1000" b="1" dirty="0">
-                <a:solidFill>
-                  <a:srgbClr val="8250DF"/>
-                </a:solidFill>
-                <a:latin typeface="Arial" pitchFamily="34" charset="0"/>
-                <a:ea typeface="Arial" pitchFamily="34" charset="-122"/>
-                <a:cs typeface="Arial" pitchFamily="34" charset="-120"/>
-              </a:rPr>
-              <a:t>EXPECT THIS</a:t>
-            </a:r>
-            <a:endParaRPr lang="en-US" sz="1000" dirty="0"/>
-          </a:p>
-        </p:txBody>
-      </p:sp>
-      <p:sp>
-        <p:nvSpPr>
-          <p:cNvPr id="8" name="Text 4"/>
-          <p:cNvSpPr/>
-          <p:nvPr/>
-        </p:nvSpPr>
-        <p:spPr>
-          <a:xfrm>
-            <a:off x="888950" y="2211437"/>
-            <a:ext cx="7513269" cy="1015901"/>
-          </a:xfrm>
-          <a:prstGeom prst="rect">
-            <a:avLst/>
-          </a:prstGeom>
-          <a:noFill/>
-          <a:ln/>
-        </p:spPr>
-        <p:txBody>
-          <a:bodyPr wrap="square" lIns="0" tIns="0" rIns="0" bIns="0" rtlCol="0" anchor="t"/>
-          <a:lstStyle/>
-          <a:p>
-            <a:pPr algn="l" indent="0" marL="0">
-              <a:lnSpc>
-                <a:spcPts val="4000"/>
-              </a:lnSpc>
-              <a:buNone/>
-            </a:pPr>
-            <a:r>
-              <a:rPr lang="en-US" sz="3200" b="1" dirty="0">
-                <a:solidFill>
-                  <a:srgbClr val="1F2328"/>
-                </a:solidFill>
-                <a:latin typeface="Arial" pitchFamily="34" charset="0"/>
-                <a:ea typeface="Arial" pitchFamily="34" charset="-122"/>
-                <a:cs typeface="Arial" pitchFamily="34" charset="-120"/>
-              </a:rPr>
-              <a:t>A slow first request or a 502 is normal.</a:t>
-            </a:r>
-            <a:endParaRPr lang="en-US" sz="3200" dirty="0"/>
-          </a:p>
-        </p:txBody>
-      </p:sp>
-      <p:sp>
-        <p:nvSpPr>
-          <p:cNvPr id="9" name="Text 5"/>
-          <p:cNvSpPr/>
-          <p:nvPr/>
-        </p:nvSpPr>
-        <p:spPr>
-          <a:xfrm>
-            <a:off x="888950" y="3430488"/>
-            <a:ext cx="7513269" cy="558701"/>
-          </a:xfrm>
-          <a:prstGeom prst="rect">
-            <a:avLst/>
-          </a:prstGeom>
-          <a:noFill/>
-          <a:ln/>
-        </p:spPr>
-        <p:txBody>
-          <a:bodyPr wrap="square" lIns="0" tIns="0" rIns="0" bIns="0" rtlCol="0" anchor="t"/>
-          <a:lstStyle/>
-          <a:p>
-            <a:pPr algn="l" indent="0" marL="0">
-              <a:lnSpc>
-                <a:spcPts val="2200"/>
-              </a:lnSpc>
-              <a:spcBef>
-                <a:spcPts val="1600"/>
-              </a:spcBef>
-              <a:buNone/>
-            </a:pPr>
-            <a:r>
-              <a:rPr lang="en-US" sz="1600" dirty="0">
-                <a:solidFill>
-                  <a:srgbClr val="59636E"/>
-                </a:solidFill>
-                <a:latin typeface="Arial" pitchFamily="34" charset="0"/>
-                <a:ea typeface="Arial" pitchFamily="34" charset="-122"/>
-                <a:cs typeface="Arial" pitchFamily="34" charset="-120"/>
-              </a:rPr>
-              <a:t>With minReplicas set to 0, the app scales to zero. The first request wakes it up in about 30–60 seconds.</a:t>
-            </a:r>
-            <a:endParaRPr lang="en-US" sz="1600" dirty="0"/>
-          </a:p>
-        </p:txBody>
-      </p:sp>
     </p:spTree>
   </p:cSld>
   <p:clrMapOvr>
@@ -6058,12 +6046,12 @@
         </p:nvSpPr>
         <p:spPr>
           <a:xfrm>
-            <a:off x="7740700" y="152400"/>
-            <a:ext cx="819150" cy="266700"/>
+            <a:off x="7652742" y="152400"/>
+            <a:ext cx="907107" cy="279350"/>
           </a:xfrm>
           <a:prstGeom prst="roundRect">
             <a:avLst>
-              <a:gd name="adj" fmla="val 23810"/>
+              <a:gd name="adj" fmla="val 22731"/>
             </a:avLst>
           </a:prstGeom>
           <a:solidFill>
@@ -6090,8 +6078,8 @@
         </p:nvSpPr>
         <p:spPr>
           <a:xfrm>
-            <a:off x="7861998" y="219075"/>
-            <a:ext cx="576554" cy="133350"/>
+            <a:off x="7786064" y="220563"/>
+            <a:ext cx="640464" cy="142875"/>
           </a:xfrm>
           <a:prstGeom prst="rect">
             <a:avLst/>
@@ -6107,7 +6095,7 @@
               <a:buNone/>
             </a:pPr>
             <a:r>
-              <a:rPr lang="en-US" sz="900" b="1" dirty="0">
+              <a:rPr lang="en-US" sz="1000" b="1" dirty="0">
                 <a:solidFill>
                   <a:srgbClr val="FFFFFF"/>
                 </a:solidFill>
@@ -6117,7 +6105,7 @@
               </a:rPr>
               <a:t>GRAFANA</a:t>
             </a:r>
-            <a:endParaRPr lang="en-US" sz="900" dirty="0"/>
+            <a:endParaRPr lang="en-US" sz="1000" dirty="0"/>
           </a:p>
         </p:txBody>
       </p:sp>
@@ -6226,7 +6214,7 @@
         <p:spPr>
           <a:xfrm>
             <a:off x="558701" y="1828651"/>
-            <a:ext cx="3886200" cy="142875"/>
+            <a:ext cx="3886200" cy="152400"/>
           </a:xfrm>
           <a:prstGeom prst="rect">
             <a:avLst/>
@@ -6245,7 +6233,7 @@
               <a:buNone/>
             </a:pPr>
             <a:r>
-              <a:rPr lang="en-US" sz="1000" b="1" dirty="0">
+              <a:rPr lang="en-US" sz="1100" b="1" dirty="0">
                 <a:solidFill>
                   <a:srgbClr val="59636E"/>
                 </a:solidFill>
@@ -6255,7 +6243,7 @@
               </a:rPr>
               <a:t>SECTION 3 OF 3</a:t>
             </a:r>
-            <a:endParaRPr lang="en-US" sz="1000" dirty="0"/>
+            <a:endParaRPr lang="en-US" sz="1100" dirty="0"/>
           </a:p>
         </p:txBody>
       </p:sp>
@@ -6267,8 +6255,8 @@
         </p:nvSpPr>
         <p:spPr>
           <a:xfrm>
-            <a:off x="558701" y="2034927"/>
-            <a:ext cx="3886200" cy="444550"/>
+            <a:off x="558701" y="2044452"/>
+            <a:ext cx="3886200" cy="469850"/>
           </a:xfrm>
           <a:prstGeom prst="rect">
             <a:avLst/>
@@ -6282,7 +6270,7 @@
           <a:p>
             <a:pPr algn="l" indent="0" marL="0">
               <a:lnSpc>
-                <a:spcPts val="3500"/>
+                <a:spcPts val="3700"/>
               </a:lnSpc>
               <a:spcBef>
                 <a:spcPts val="500"/>
@@ -6290,7 +6278,7 @@
               <a:buNone/>
             </a:pPr>
             <a:r>
-              <a:rPr lang="en-US" sz="3000" b="1" dirty="0">
+              <a:rPr lang="en-US" sz="3200" b="1" dirty="0">
                 <a:solidFill>
                   <a:srgbClr val="1F2328"/>
                 </a:solidFill>
@@ -6300,7 +6288,7 @@
               </a:rPr>
               <a:t>Operate and learn</a:t>
             </a:r>
-            <a:endParaRPr lang="en-US" sz="3000" dirty="0"/>
+            <a:endParaRPr lang="en-US" sz="3200" dirty="0"/>
           </a:p>
         </p:txBody>
       </p:sp>
@@ -6312,8 +6300,8 @@
         </p:nvSpPr>
         <p:spPr>
           <a:xfrm>
-            <a:off x="558701" y="2606427"/>
-            <a:ext cx="3886200" cy="482501"/>
+            <a:off x="558701" y="2666702"/>
+            <a:ext cx="3886200" cy="800100"/>
           </a:xfrm>
           <a:prstGeom prst="rect">
             <a:avLst/>
@@ -6327,15 +6315,15 @@
           <a:p>
             <a:pPr algn="l" indent="0" marL="0">
               <a:lnSpc>
-                <a:spcPts val="1900"/>
+                <a:spcPts val="2100"/>
               </a:lnSpc>
               <a:spcBef>
-                <a:spcPts val="1000"/>
+                <a:spcPts val="1200"/>
               </a:spcBef>
               <a:buNone/>
             </a:pPr>
             <a:r>
-              <a:rPr lang="en-US" sz="1400" dirty="0">
+              <a:rPr lang="en-US" sz="1600" dirty="0">
                 <a:solidFill>
                   <a:srgbClr val="59636E"/>
                 </a:solidFill>
@@ -6345,7 +6333,7 @@
               </a:rPr>
               <a:t>Use the agent to operate the app through its API, then restart it and watch what happens.</a:t>
             </a:r>
-            <a:endParaRPr lang="en-US" sz="1400" dirty="0"/>
+            <a:endParaRPr lang="en-US" sz="1600" dirty="0"/>
           </a:p>
         </p:txBody>
       </p:sp>
@@ -6414,11 +6402,11 @@
         <p:spPr>
           <a:xfrm>
             <a:off x="558701" y="4368701"/>
-            <a:ext cx="1422797" cy="336352"/>
+            <a:ext cx="1564184" cy="361652"/>
           </a:xfrm>
           <a:prstGeom prst="roundRect">
             <a:avLst>
-              <a:gd name="adj" fmla="val 52861"/>
+              <a:gd name="adj" fmla="val 52675"/>
             </a:avLst>
           </a:prstGeom>
           <a:solidFill>
@@ -6450,11 +6438,11 @@
         <p:spPr>
           <a:xfrm>
             <a:off x="644426" y="4441627"/>
-            <a:ext cx="190500" cy="190500"/>
+            <a:ext cx="215801" cy="215801"/>
           </a:xfrm>
           <a:prstGeom prst="roundRect">
             <a:avLst>
-              <a:gd name="adj" fmla="val 480000"/>
+              <a:gd name="adj" fmla="val 423724"/>
             </a:avLst>
           </a:prstGeom>
           <a:solidFill>
@@ -6481,8 +6469,8 @@
         </p:nvSpPr>
         <p:spPr>
           <a:xfrm>
-            <a:off x="710833" y="4479727"/>
-            <a:ext cx="57686" cy="114300"/>
+            <a:off x="719840" y="4482852"/>
+            <a:ext cx="64972" cy="133350"/>
           </a:xfrm>
           <a:prstGeom prst="rect">
             <a:avLst/>
@@ -6498,7 +6486,7 @@
               <a:buNone/>
             </a:pPr>
             <a:r>
-              <a:rPr lang="en-US" sz="800" b="1" dirty="0">
+              <a:rPr lang="en-US" sz="900" b="1" dirty="0">
                 <a:solidFill>
                   <a:srgbClr val="818B98"/>
                 </a:solidFill>
@@ -6508,7 +6496,7 @@
               </a:rPr>
               <a:t>1</a:t>
             </a:r>
-            <a:endParaRPr lang="en-US" sz="800" dirty="0"/>
+            <a:endParaRPr lang="en-US" sz="900" dirty="0"/>
           </a:p>
         </p:txBody>
       </p:sp>
@@ -6520,8 +6508,8 @@
         </p:nvSpPr>
         <p:spPr>
           <a:xfrm>
-            <a:off x="911126" y="4470202"/>
-            <a:ext cx="952574" cy="133350"/>
+            <a:off x="936427" y="4478089"/>
+            <a:ext cx="1058079" cy="142875"/>
           </a:xfrm>
           <a:prstGeom prst="rect">
             <a:avLst/>
@@ -6537,7 +6525,7 @@
               <a:buNone/>
             </a:pPr>
             <a:r>
-              <a:rPr lang="en-US" sz="900" b="1" dirty="0">
+              <a:rPr lang="en-US" sz="1000" b="1" dirty="0">
                 <a:solidFill>
                   <a:srgbClr val="818B98"/>
                 </a:solidFill>
@@ -6547,7 +6535,7 @@
               </a:rPr>
               <a:t>Plan and preview</a:t>
             </a:r>
-            <a:endParaRPr lang="en-US" sz="900" dirty="0"/>
+            <a:endParaRPr lang="en-US" sz="1000" dirty="0"/>
           </a:p>
         </p:txBody>
       </p:sp>
@@ -6559,12 +6547,12 @@
         </p:nvSpPr>
         <p:spPr>
           <a:xfrm>
-            <a:off x="2082998" y="4368701"/>
-            <a:ext cx="1441698" cy="336352"/>
+            <a:off x="2224385" y="4368701"/>
+            <a:ext cx="1585317" cy="361652"/>
           </a:xfrm>
           <a:prstGeom prst="roundRect">
             <a:avLst>
-              <a:gd name="adj" fmla="val 52861"/>
+              <a:gd name="adj" fmla="val 52675"/>
             </a:avLst>
           </a:prstGeom>
           <a:solidFill>
@@ -6595,12 +6583,12 @@
         </p:nvSpPr>
         <p:spPr>
           <a:xfrm>
-            <a:off x="2168723" y="4441627"/>
-            <a:ext cx="190500" cy="190500"/>
+            <a:off x="2310110" y="4441627"/>
+            <a:ext cx="215801" cy="215801"/>
           </a:xfrm>
           <a:prstGeom prst="roundRect">
             <a:avLst>
-              <a:gd name="adj" fmla="val 480000"/>
+              <a:gd name="adj" fmla="val 423724"/>
             </a:avLst>
           </a:prstGeom>
           <a:solidFill>
@@ -6627,8 +6615,8 @@
         </p:nvSpPr>
         <p:spPr>
           <a:xfrm>
-            <a:off x="2235131" y="4479727"/>
-            <a:ext cx="57686" cy="114300"/>
+            <a:off x="2385524" y="4482852"/>
+            <a:ext cx="64972" cy="133350"/>
           </a:xfrm>
           <a:prstGeom prst="rect">
             <a:avLst/>
@@ -6644,7 +6632,7 @@
               <a:buNone/>
             </a:pPr>
             <a:r>
-              <a:rPr lang="en-US" sz="800" b="1" dirty="0">
+              <a:rPr lang="en-US" sz="900" b="1" dirty="0">
                 <a:solidFill>
                   <a:srgbClr val="818B98"/>
                 </a:solidFill>
@@ -6654,7 +6642,7 @@
               </a:rPr>
               <a:t>2</a:t>
             </a:r>
-            <a:endParaRPr lang="en-US" sz="800" dirty="0"/>
+            <a:endParaRPr lang="en-US" sz="900" dirty="0"/>
           </a:p>
         </p:txBody>
       </p:sp>
@@ -6666,8 +6654,8 @@
         </p:nvSpPr>
         <p:spPr>
           <a:xfrm>
-            <a:off x="2435423" y="4470202"/>
-            <a:ext cx="971854" cy="133350"/>
+            <a:off x="2602111" y="4478089"/>
+            <a:ext cx="1079635" cy="142875"/>
           </a:xfrm>
           <a:prstGeom prst="rect">
             <a:avLst/>
@@ -6683,7 +6671,7 @@
               <a:buNone/>
             </a:pPr>
             <a:r>
-              <a:rPr lang="en-US" sz="900" b="1" dirty="0">
+              <a:rPr lang="en-US" sz="1000" b="1" dirty="0">
                 <a:solidFill>
                   <a:srgbClr val="818B98"/>
                 </a:solidFill>
@@ -6693,7 +6681,7 @@
               </a:rPr>
               <a:t>Deploy and verify</a:t>
             </a:r>
-            <a:endParaRPr lang="en-US" sz="900" dirty="0"/>
+            <a:endParaRPr lang="en-US" sz="1000" dirty="0"/>
           </a:p>
         </p:txBody>
       </p:sp>
@@ -6705,12 +6693,12 @@
         </p:nvSpPr>
         <p:spPr>
           <a:xfrm>
-            <a:off x="3626197" y="4368701"/>
-            <a:ext cx="1460897" cy="336352"/>
+            <a:off x="3911203" y="4368701"/>
+            <a:ext cx="1606600" cy="361652"/>
           </a:xfrm>
           <a:prstGeom prst="roundRect">
             <a:avLst>
-              <a:gd name="adj" fmla="val 52861"/>
+              <a:gd name="adj" fmla="val 52675"/>
             </a:avLst>
           </a:prstGeom>
           <a:solidFill>
@@ -6741,12 +6729,12 @@
         </p:nvSpPr>
         <p:spPr>
           <a:xfrm>
-            <a:off x="3711922" y="4441627"/>
-            <a:ext cx="190500" cy="190500"/>
+            <a:off x="3996928" y="4441627"/>
+            <a:ext cx="215801" cy="215801"/>
           </a:xfrm>
           <a:prstGeom prst="roundRect">
             <a:avLst>
-              <a:gd name="adj" fmla="val 480000"/>
+              <a:gd name="adj" fmla="val 423724"/>
             </a:avLst>
           </a:prstGeom>
           <a:solidFill>
@@ -6773,8 +6761,8 @@
         </p:nvSpPr>
         <p:spPr>
           <a:xfrm>
-            <a:off x="3778329" y="4479727"/>
-            <a:ext cx="57686" cy="114300"/>
+            <a:off x="4072342" y="4482852"/>
+            <a:ext cx="64972" cy="133350"/>
           </a:xfrm>
           <a:prstGeom prst="rect">
             <a:avLst/>
@@ -6790,7 +6778,7 @@
               <a:buNone/>
             </a:pPr>
             <a:r>
-              <a:rPr lang="en-US" sz="800" b="1" dirty="0">
+              <a:rPr lang="en-US" sz="900" b="1" dirty="0">
                 <a:solidFill>
                   <a:srgbClr val="1A7F37"/>
                 </a:solidFill>
@@ -6800,7 +6788,7 @@
               </a:rPr>
               <a:t>3</a:t>
             </a:r>
-            <a:endParaRPr lang="en-US" sz="800" dirty="0"/>
+            <a:endParaRPr lang="en-US" sz="900" dirty="0"/>
           </a:p>
         </p:txBody>
       </p:sp>
@@ -6812,8 +6800,8 @@
         </p:nvSpPr>
         <p:spPr>
           <a:xfrm>
-            <a:off x="3978622" y="4470202"/>
-            <a:ext cx="991436" cy="133350"/>
+            <a:off x="4288929" y="4478089"/>
+            <a:ext cx="1101343" cy="142875"/>
           </a:xfrm>
           <a:prstGeom prst="rect">
             <a:avLst/>
@@ -6829,7 +6817,7 @@
               <a:buNone/>
             </a:pPr>
             <a:r>
-              <a:rPr lang="en-US" sz="900" b="1" dirty="0">
+              <a:rPr lang="en-US" sz="1000" b="1" dirty="0">
                 <a:solidFill>
                   <a:srgbClr val="FFFFFF"/>
                 </a:solidFill>
@@ -6839,7 +6827,7 @@
               </a:rPr>
               <a:t>Operate and learn</a:t>
             </a:r>
-            <a:endParaRPr lang="en-US" sz="900" dirty="0"/>
+            <a:endParaRPr lang="en-US" sz="1000" dirty="0"/>
           </a:p>
         </p:txBody>
       </p:sp>
@@ -6883,12 +6871,12 @@
         </p:nvSpPr>
         <p:spPr>
           <a:xfrm>
-            <a:off x="7740700" y="152400"/>
-            <a:ext cx="819150" cy="266700"/>
+            <a:off x="7652742" y="152400"/>
+            <a:ext cx="907107" cy="279350"/>
           </a:xfrm>
           <a:prstGeom prst="roundRect">
             <a:avLst>
-              <a:gd name="adj" fmla="val 23810"/>
+              <a:gd name="adj" fmla="val 22731"/>
             </a:avLst>
           </a:prstGeom>
           <a:solidFill>
@@ -6915,8 +6903,8 @@
         </p:nvSpPr>
         <p:spPr>
           <a:xfrm>
-            <a:off x="7861998" y="219075"/>
-            <a:ext cx="576554" cy="133350"/>
+            <a:off x="7786064" y="220563"/>
+            <a:ext cx="640464" cy="142875"/>
           </a:xfrm>
           <a:prstGeom prst="rect">
             <a:avLst/>
@@ -6932,7 +6920,7 @@
               <a:buNone/>
             </a:pPr>
             <a:r>
-              <a:rPr lang="en-US" sz="900" b="1" dirty="0">
+              <a:rPr lang="en-US" sz="1000" b="1" dirty="0">
                 <a:solidFill>
                   <a:srgbClr val="FFFFFF"/>
                 </a:solidFill>
@@ -6942,7 +6930,7 @@
               </a:rPr>
               <a:t>GRAFANA</a:t>
             </a:r>
-            <a:endParaRPr lang="en-US" sz="900" dirty="0"/>
+            <a:endParaRPr lang="en-US" sz="1000" dirty="0"/>
           </a:p>
         </p:txBody>
       </p:sp>
@@ -6979,7 +6967,7 @@
         <p:spPr>
           <a:xfrm>
             <a:off x="482501" y="330101"/>
-            <a:ext cx="7772400" cy="142875"/>
+            <a:ext cx="8342275" cy="152400"/>
           </a:xfrm>
           <a:prstGeom prst="rect">
             <a:avLst/>
@@ -6995,7 +6983,7 @@
               <a:buNone/>
             </a:pPr>
             <a:r>
-              <a:rPr lang="en-US" sz="1000" b="1" dirty="0">
+              <a:rPr lang="en-US" sz="1100" b="1" dirty="0">
                 <a:solidFill>
                   <a:srgbClr val="1A7F37"/>
                 </a:solidFill>
@@ -7005,7 +6993,7 @@
               </a:rPr>
               <a:t>OPERATE THROUGH THE API</a:t>
             </a:r>
-            <a:endParaRPr lang="en-US" sz="1000" dirty="0"/>
+            <a:endParaRPr lang="en-US" sz="1100" dirty="0"/>
           </a:p>
         </p:txBody>
       </p:sp>
@@ -7017,8 +7005,8 @@
         </p:nvSpPr>
         <p:spPr>
           <a:xfrm>
-            <a:off x="482501" y="523726"/>
-            <a:ext cx="7772400" cy="393650"/>
+            <a:off x="482501" y="533251"/>
+            <a:ext cx="8342275" cy="419100"/>
           </a:xfrm>
           <a:prstGeom prst="rect">
             <a:avLst/>
@@ -7032,7 +7020,7 @@
           <a:p>
             <a:pPr algn="l" indent="0" marL="0">
               <a:lnSpc>
-                <a:spcPts val="3100"/>
+                <a:spcPts val="3300"/>
               </a:lnSpc>
               <a:spcBef>
                 <a:spcPts val="400"/>
@@ -7040,7 +7028,7 @@
               <a:buNone/>
             </a:pPr>
             <a:r>
-              <a:rPr lang="en-US" sz="2600" b="1" dirty="0">
+              <a:rPr lang="en-US" sz="2800" b="1" dirty="0">
                 <a:solidFill>
                   <a:srgbClr val="1F2328"/>
                 </a:solidFill>
@@ -7050,7 +7038,7 @@
               </a:rPr>
               <a:t>Let the agent build the dashboard</a:t>
             </a:r>
-            <a:endParaRPr lang="en-US" sz="2600" dirty="0"/>
+            <a:endParaRPr lang="en-US" sz="2800" dirty="0"/>
           </a:p>
         </p:txBody>
       </p:sp>
@@ -7062,12 +7050,12 @@
         </p:nvSpPr>
         <p:spPr>
           <a:xfrm>
-            <a:off x="634901" y="1858566"/>
-            <a:ext cx="7873901" cy="2353419"/>
+            <a:off x="634901" y="1846064"/>
+            <a:ext cx="7873901" cy="2429173"/>
           </a:xfrm>
           <a:prstGeom prst="roundRect">
             <a:avLst>
-              <a:gd name="adj" fmla="val 4317"/>
+              <a:gd name="adj" fmla="val 4183"/>
             </a:avLst>
           </a:prstGeom>
           <a:solidFill>
@@ -7101,7 +7089,7 @@
         </p:nvSpPr>
         <p:spPr>
           <a:xfrm>
-            <a:off x="634901" y="1863328"/>
+            <a:off x="634901" y="1850827"/>
             <a:ext cx="7873901" cy="0"/>
           </a:xfrm>
           <a:prstGeom prst="line">
@@ -7124,8 +7112,8 @@
         </p:nvSpPr>
         <p:spPr>
           <a:xfrm>
-            <a:off x="8504039" y="1858566"/>
-            <a:ext cx="0" cy="2353419"/>
+            <a:off x="8504039" y="1846064"/>
+            <a:ext cx="0" cy="2429173"/>
           </a:xfrm>
           <a:prstGeom prst="line">
             <a:avLst/>
@@ -7147,7 +7135,7 @@
         </p:nvSpPr>
         <p:spPr>
           <a:xfrm>
-            <a:off x="634901" y="4207222"/>
+            <a:off x="634901" y="4270474"/>
             <a:ext cx="7873901" cy="0"/>
           </a:xfrm>
           <a:prstGeom prst="line">
@@ -7170,8 +7158,8 @@
         </p:nvSpPr>
         <p:spPr>
           <a:xfrm>
-            <a:off x="663476" y="1858566"/>
-            <a:ext cx="0" cy="2353419"/>
+            <a:off x="663476" y="1846064"/>
+            <a:ext cx="0" cy="2429173"/>
           </a:xfrm>
           <a:prstGeom prst="line">
             <a:avLst/>
@@ -7201,8 +7189,8 @@
         </p:blipFill>
         <p:spPr>
           <a:xfrm>
-            <a:off x="945952" y="2071241"/>
-            <a:ext cx="165050" cy="165050"/>
+            <a:off x="971401" y="2084189"/>
+            <a:ext cx="190500" cy="190500"/>
           </a:xfrm>
           <a:prstGeom prst="rect">
             <a:avLst/>
@@ -7217,8 +7205,8 @@
         </p:nvSpPr>
         <p:spPr>
           <a:xfrm>
-            <a:off x="1187202" y="2087017"/>
-            <a:ext cx="498830" cy="133350"/>
+            <a:off x="1238101" y="2103239"/>
+            <a:ext cx="1423169" cy="152400"/>
           </a:xfrm>
           <a:prstGeom prst="rect">
             <a:avLst/>
@@ -7234,7 +7222,7 @@
               <a:buNone/>
             </a:pPr>
             <a:r>
-              <a:rPr lang="en-US" sz="900" b="1" dirty="0">
+              <a:rPr lang="en-US" sz="1050" dirty="0">
                 <a:solidFill>
                   <a:srgbClr val="8250DF"/>
                 </a:solidFill>
@@ -7244,7 +7232,21 @@
               </a:rPr>
               <a:t>PROMPT</a:t>
             </a:r>
-            <a:endParaRPr lang="en-US" sz="900" dirty="0"/>
+            <a:pPr algn="l" indent="0" marL="0">
+              <a:buNone/>
+            </a:pPr>
+            <a:r>
+              <a:rPr lang="en-US" sz="1050" b="1" dirty="0">
+                <a:solidFill>
+                  <a:srgbClr val="818B98"/>
+                </a:solidFill>
+                <a:latin typeface="Arial" pitchFamily="34" charset="0"/>
+                <a:ea typeface="Arial" pitchFamily="34" charset="-122"/>
+                <a:cs typeface="Arial" pitchFamily="34" charset="-120"/>
+              </a:rPr>
+              <a:t> · ABRIDGED</a:t>
+            </a:r>
+            <a:endParaRPr lang="en-US" sz="1050" dirty="0"/>
           </a:p>
         </p:txBody>
       </p:sp>
@@ -7256,8 +7258,8 @@
         </p:nvSpPr>
         <p:spPr>
           <a:xfrm>
-            <a:off x="945952" y="2350443"/>
-            <a:ext cx="7445413" cy="1623417"/>
+            <a:off x="971401" y="2388840"/>
+            <a:ext cx="7393496" cy="1622971"/>
           </a:xfrm>
           <a:prstGeom prst="rect">
             <a:avLst/>
@@ -7271,12 +7273,12 @@
           <a:p>
             <a:pPr algn="l" indent="0" marL="0">
               <a:lnSpc>
-                <a:spcPts val="2130"/>
+                <a:spcPts val="2556"/>
               </a:lnSpc>
               <a:buNone/>
             </a:pPr>
             <a:r>
-              <a:rPr lang="en-US" sz="1500" dirty="0">
+              <a:rPr lang="en-US" sz="1800" dirty="0">
                 <a:solidFill>
                   <a:srgbClr val="1F2328"/>
                 </a:solidFill>
@@ -7284,16 +7286,16 @@
                 <a:ea typeface="Arial" pitchFamily="34" charset="-122"/>
                 <a:cs typeface="Arial" pitchFamily="34" charset="-120"/>
               </a:rPr>
-              <a:t>Create scripts/create-grafana-dashboard.mjs. It reads GRAFANA_URL and GRAFANA_ADMIN_PASSWORD through azd env get-value with argument arrays and </a:t>
+              <a:t>Create scripts/create-grafana-dashboard.mjs. … It </a:t>
             </a:r>
             <a:pPr algn="l" indent="0" marL="0">
               <a:lnSpc>
-                <a:spcPts val="2130"/>
+                <a:spcPts val="2556"/>
               </a:lnSpc>
               <a:buNone/>
             </a:pPr>
             <a:r>
-              <a:rPr lang="en-US" sz="1500" b="1" dirty="0">
+              <a:rPr lang="en-US" sz="1800" b="1" dirty="0">
                 <a:solidFill>
                   <a:srgbClr val="1F2328"/>
                 </a:solidFill>
@@ -7305,12 +7307,12 @@
             </a:r>
             <a:pPr algn="l" indent="0" marL="0">
               <a:lnSpc>
-                <a:spcPts val="2130"/>
+                <a:spcPts val="2556"/>
               </a:lnSpc>
               <a:buNone/>
             </a:pPr>
             <a:r>
-              <a:rPr lang="en-US" sz="1500" dirty="0">
+              <a:rPr lang="en-US" sz="1800" dirty="0">
                 <a:solidFill>
                   <a:srgbClr val="1F2328"/>
                 </a:solidFill>
@@ -7322,12 +7324,12 @@
             </a:r>
             <a:pPr algn="l" indent="0" marL="0">
               <a:lnSpc>
-                <a:spcPts val="2130"/>
+                <a:spcPts val="2556"/>
               </a:lnSpc>
               <a:buNone/>
             </a:pPr>
             <a:r>
-              <a:rPr lang="en-US" sz="1500" b="1" dirty="0">
+              <a:rPr lang="en-US" sz="1800" b="1" dirty="0">
                 <a:solidFill>
                   <a:srgbClr val="1F2328"/>
                 </a:solidFill>
@@ -7339,12 +7341,12 @@
             </a:r>
             <a:pPr algn="l" indent="0" marL="0">
               <a:lnSpc>
-                <a:spcPts val="2130"/>
+                <a:spcPts val="2556"/>
               </a:lnSpc>
               <a:buNone/>
             </a:pPr>
             <a:r>
-              <a:rPr lang="en-US" sz="1500" dirty="0">
+              <a:rPr lang="en-US" sz="1800" dirty="0">
                 <a:solidFill>
                   <a:srgbClr val="1F2328"/>
                 </a:solidFill>
@@ -7352,9 +7354,9 @@
                 <a:ea typeface="Arial" pitchFamily="34" charset="-122"/>
                 <a:cs typeface="Arial" pitchFamily="34" charset="-120"/>
               </a:rPr>
-              <a:t> with one time series panel that uses it, and prints the dashboard URL. Then run the script.</a:t>
-            </a:r>
-            <a:endParaRPr lang="en-US" sz="1500" dirty="0"/>
+              <a:t> … and prints the dashboard URL. Then run the script.</a:t>
+            </a:r>
+            <a:endParaRPr lang="en-US" sz="1800" dirty="0"/>
           </a:p>
         </p:txBody>
       </p:sp>
@@ -7398,12 +7400,12 @@
         </p:nvSpPr>
         <p:spPr>
           <a:xfrm>
-            <a:off x="7740700" y="152400"/>
-            <a:ext cx="819150" cy="266700"/>
+            <a:off x="7652742" y="152400"/>
+            <a:ext cx="907107" cy="279350"/>
           </a:xfrm>
           <a:prstGeom prst="roundRect">
             <a:avLst>
-              <a:gd name="adj" fmla="val 23810"/>
+              <a:gd name="adj" fmla="val 22731"/>
             </a:avLst>
           </a:prstGeom>
           <a:solidFill>
@@ -7430,8 +7432,8 @@
         </p:nvSpPr>
         <p:spPr>
           <a:xfrm>
-            <a:off x="7861998" y="219075"/>
-            <a:ext cx="576554" cy="133350"/>
+            <a:off x="7786064" y="220563"/>
+            <a:ext cx="640464" cy="142875"/>
           </a:xfrm>
           <a:prstGeom prst="rect">
             <a:avLst/>
@@ -7447,7 +7449,7 @@
               <a:buNone/>
             </a:pPr>
             <a:r>
-              <a:rPr lang="en-US" sz="900" b="1" dirty="0">
+              <a:rPr lang="en-US" sz="1000" b="1" dirty="0">
                 <a:solidFill>
                   <a:srgbClr val="FFFFFF"/>
                 </a:solidFill>
@@ -7457,7 +7459,7 @@
               </a:rPr>
               <a:t>GRAFANA</a:t>
             </a:r>
-            <a:endParaRPr lang="en-US" sz="900" dirty="0"/>
+            <a:endParaRPr lang="en-US" sz="1000" dirty="0"/>
           </a:p>
         </p:txBody>
       </p:sp>
@@ -7494,7 +7496,7 @@
         <p:spPr>
           <a:xfrm>
             <a:off x="482501" y="330101"/>
-            <a:ext cx="7772400" cy="142875"/>
+            <a:ext cx="8342275" cy="152400"/>
           </a:xfrm>
           <a:prstGeom prst="rect">
             <a:avLst/>
@@ -7510,7 +7512,7 @@
               <a:buNone/>
             </a:pPr>
             <a:r>
-              <a:rPr lang="en-US" sz="1000" b="1" dirty="0">
+              <a:rPr lang="en-US" sz="1100" b="1" dirty="0">
                 <a:solidFill>
                   <a:srgbClr val="1A7F37"/>
                 </a:solidFill>
@@ -7520,7 +7522,7 @@
               </a:rPr>
               <a:t>BREAK IT ON PURPOSE</a:t>
             </a:r>
-            <a:endParaRPr lang="en-US" sz="1000" dirty="0"/>
+            <a:endParaRPr lang="en-US" sz="1100" dirty="0"/>
           </a:p>
         </p:txBody>
       </p:sp>
@@ -7532,8 +7534,8 @@
         </p:nvSpPr>
         <p:spPr>
           <a:xfrm>
-            <a:off x="482501" y="523726"/>
-            <a:ext cx="7772400" cy="393650"/>
+            <a:off x="482501" y="533251"/>
+            <a:ext cx="8342275" cy="419100"/>
           </a:xfrm>
           <a:prstGeom prst="rect">
             <a:avLst/>
@@ -7547,7 +7549,7 @@
           <a:p>
             <a:pPr algn="l" indent="0" marL="0">
               <a:lnSpc>
-                <a:spcPts val="3100"/>
+                <a:spcPts val="3300"/>
               </a:lnSpc>
               <a:spcBef>
                 <a:spcPts val="400"/>
@@ -7555,7 +7557,7 @@
               <a:buNone/>
             </a:pPr>
             <a:r>
-              <a:rPr lang="en-US" sz="2600" b="1" dirty="0">
+              <a:rPr lang="en-US" sz="2800" b="1" dirty="0">
                 <a:solidFill>
                   <a:srgbClr val="1F2328"/>
                 </a:solidFill>
@@ -7565,7 +7567,7 @@
               </a:rPr>
               <a:t>Restart it and watch the dashboard vanish</a:t>
             </a:r>
-            <a:endParaRPr lang="en-US" sz="2600" dirty="0"/>
+            <a:endParaRPr lang="en-US" sz="2800" dirty="0"/>
           </a:p>
         </p:txBody>
       </p:sp>
@@ -7577,7 +7579,7 @@
         </p:nvSpPr>
         <p:spPr>
           <a:xfrm>
-            <a:off x="901601" y="1903065"/>
+            <a:off x="901601" y="1741438"/>
             <a:ext cx="584150" cy="584150"/>
           </a:xfrm>
           <a:prstGeom prst="roundRect">
@@ -7617,7 +7619,7 @@
         </p:blipFill>
         <p:spPr>
           <a:xfrm>
-            <a:off x="1028551" y="2030016"/>
+            <a:off x="1028551" y="1868388"/>
             <a:ext cx="330101" cy="330101"/>
           </a:xfrm>
           <a:prstGeom prst="rect">
@@ -7633,8 +7635,8 @@
         </p:nvSpPr>
         <p:spPr>
           <a:xfrm>
-            <a:off x="931585" y="2588716"/>
-            <a:ext cx="524182" cy="206425"/>
+            <a:off x="891205" y="2427089"/>
+            <a:ext cx="604942" cy="238125"/>
           </a:xfrm>
           <a:prstGeom prst="rect">
             <a:avLst/>
@@ -7648,12 +7650,12 @@
           <a:p>
             <a:pPr algn="ctr" indent="0" marL="0">
               <a:lnSpc>
-                <a:spcPts val="1625"/>
+                <a:spcPts val="1875"/>
               </a:lnSpc>
               <a:buNone/>
             </a:pPr>
             <a:r>
-              <a:rPr lang="en-US" sz="1300" b="1" dirty="0">
+              <a:rPr lang="en-US" sz="1500" b="1" dirty="0">
                 <a:solidFill>
                   <a:srgbClr val="1F2328"/>
                 </a:solidFill>
@@ -7663,7 +7665,7 @@
               </a:rPr>
               <a:t>Create</a:t>
             </a:r>
-            <a:endParaRPr lang="en-US" sz="1300" dirty="0"/>
+            <a:endParaRPr lang="en-US" sz="1500" dirty="0"/>
           </a:p>
         </p:txBody>
       </p:sp>
@@ -7675,8 +7677,8 @@
         </p:nvSpPr>
         <p:spPr>
           <a:xfrm>
-            <a:off x="474803" y="2896642"/>
-            <a:ext cx="1437894" cy="360164"/>
+            <a:off x="474803" y="2766715"/>
+            <a:ext cx="1437894" cy="428625"/>
           </a:xfrm>
           <a:prstGeom prst="rect">
             <a:avLst/>
@@ -7690,12 +7692,12 @@
           <a:p>
             <a:pPr algn="ctr" indent="0" marL="0">
               <a:lnSpc>
-                <a:spcPts val="1418"/>
+                <a:spcPts val="1688"/>
               </a:lnSpc>
               <a:buNone/>
             </a:pPr>
             <a:r>
-              <a:rPr lang="en-US" sz="1050" dirty="0">
+              <a:rPr lang="en-US" sz="1250" dirty="0">
                 <a:solidFill>
                   <a:srgbClr val="59636E"/>
                 </a:solidFill>
@@ -7705,7 +7707,7 @@
               </a:rPr>
               <a:t>"Hello from Azure" dashboard</a:t>
             </a:r>
-            <a:endParaRPr lang="en-US" sz="1050" dirty="0"/>
+            <a:endParaRPr lang="en-US" sz="1250" dirty="0"/>
           </a:p>
         </p:txBody>
       </p:sp>
@@ -7717,8 +7719,8 @@
         </p:nvSpPr>
         <p:spPr>
           <a:xfrm>
-            <a:off x="1934519" y="2076004"/>
-            <a:ext cx="207365" cy="238125"/>
+            <a:off x="1921615" y="1900089"/>
+            <a:ext cx="233172" cy="266700"/>
           </a:xfrm>
           <a:prstGeom prst="rect">
             <a:avLst/>
@@ -7734,7 +7736,7 @@
               <a:buNone/>
             </a:pPr>
             <a:r>
-              <a:rPr lang="en-US" sz="1600" dirty="0">
+              <a:rPr lang="en-US" sz="1800" dirty="0">
                 <a:solidFill>
                   <a:srgbClr val="818B98"/>
                 </a:solidFill>
@@ -7744,7 +7746,7 @@
               </a:rPr>
               <a:t>→</a:t>
             </a:r>
-            <a:endParaRPr lang="en-US" sz="1600" dirty="0"/>
+            <a:endParaRPr lang="en-US" sz="1800" dirty="0"/>
           </a:p>
         </p:txBody>
       </p:sp>
@@ -7756,7 +7758,7 @@
         </p:nvSpPr>
         <p:spPr>
           <a:xfrm>
-            <a:off x="2590651" y="1903065"/>
+            <a:off x="2590651" y="1741438"/>
             <a:ext cx="584150" cy="584150"/>
           </a:xfrm>
           <a:prstGeom prst="roundRect">
@@ -7796,7 +7798,7 @@
         </p:blipFill>
         <p:spPr>
           <a:xfrm>
-            <a:off x="2717602" y="2030016"/>
+            <a:off x="2717602" y="1868388"/>
             <a:ext cx="330101" cy="330101"/>
           </a:xfrm>
           <a:prstGeom prst="rect">
@@ -7812,8 +7814,8 @@
         </p:nvSpPr>
         <p:spPr>
           <a:xfrm>
-            <a:off x="2592702" y="2588716"/>
-            <a:ext cx="580198" cy="206425"/>
+            <a:off x="2547921" y="2427089"/>
+            <a:ext cx="669610" cy="238125"/>
           </a:xfrm>
           <a:prstGeom prst="rect">
             <a:avLst/>
@@ -7827,12 +7829,12 @@
           <a:p>
             <a:pPr algn="ctr" indent="0" marL="0">
               <a:lnSpc>
-                <a:spcPts val="1625"/>
+                <a:spcPts val="1875"/>
               </a:lnSpc>
               <a:buNone/>
             </a:pPr>
             <a:r>
-              <a:rPr lang="en-US" sz="1300" b="1" dirty="0">
+              <a:rPr lang="en-US" sz="1500" b="1" dirty="0">
                 <a:solidFill>
                   <a:srgbClr val="1F2328"/>
                 </a:solidFill>
@@ -7842,7 +7844,7 @@
               </a:rPr>
               <a:t>Restart</a:t>
             </a:r>
-            <a:endParaRPr lang="en-US" sz="1300" dirty="0"/>
+            <a:endParaRPr lang="en-US" sz="1500" dirty="0"/>
           </a:p>
         </p:txBody>
       </p:sp>
@@ -7854,8 +7856,8 @@
         </p:nvSpPr>
         <p:spPr>
           <a:xfrm>
-            <a:off x="2163854" y="2896642"/>
-            <a:ext cx="1437894" cy="360164"/>
+            <a:off x="2163854" y="2766715"/>
+            <a:ext cx="1437894" cy="428625"/>
           </a:xfrm>
           <a:prstGeom prst="rect">
             <a:avLst/>
@@ -7869,12 +7871,12 @@
           <a:p>
             <a:pPr algn="ctr" indent="0" marL="0">
               <a:lnSpc>
-                <a:spcPts val="1418"/>
+                <a:spcPts val="1688"/>
               </a:lnSpc>
               <a:buNone/>
             </a:pPr>
             <a:r>
-              <a:rPr lang="en-US" sz="1050" dirty="0">
+              <a:rPr lang="en-US" sz="1250" dirty="0">
                 <a:solidFill>
                   <a:srgbClr val="59636E"/>
                 </a:solidFill>
@@ -7884,7 +7886,7 @@
               </a:rPr>
               <a:t>Restart my Grafana container app.</a:t>
             </a:r>
-            <a:endParaRPr lang="en-US" sz="1050" dirty="0"/>
+            <a:endParaRPr lang="en-US" sz="1250" dirty="0"/>
           </a:p>
         </p:txBody>
       </p:sp>
@@ -7896,8 +7898,8 @@
         </p:nvSpPr>
         <p:spPr>
           <a:xfrm>
-            <a:off x="3623569" y="2076004"/>
-            <a:ext cx="207365" cy="238125"/>
+            <a:off x="3610666" y="1900089"/>
+            <a:ext cx="233172" cy="266700"/>
           </a:xfrm>
           <a:prstGeom prst="rect">
             <a:avLst/>
@@ -7913,7 +7915,7 @@
               <a:buNone/>
             </a:pPr>
             <a:r>
-              <a:rPr lang="en-US" sz="1600" dirty="0">
+              <a:rPr lang="en-US" sz="1800" dirty="0">
                 <a:solidFill>
                   <a:srgbClr val="818B98"/>
                 </a:solidFill>
@@ -7923,7 +7925,7 @@
               </a:rPr>
               <a:t>→</a:t>
             </a:r>
-            <a:endParaRPr lang="en-US" sz="1600" dirty="0"/>
+            <a:endParaRPr lang="en-US" sz="1800" dirty="0"/>
           </a:p>
         </p:txBody>
       </p:sp>
@@ -7935,7 +7937,7 @@
         </p:nvSpPr>
         <p:spPr>
           <a:xfrm>
-            <a:off x="4279702" y="1903065"/>
+            <a:off x="4279702" y="1741438"/>
             <a:ext cx="584150" cy="584150"/>
           </a:xfrm>
           <a:prstGeom prst="roundRect">
@@ -7975,7 +7977,7 @@
         </p:blipFill>
         <p:spPr>
           <a:xfrm>
-            <a:off x="4406652" y="2030016"/>
+            <a:off x="4406652" y="1868388"/>
             <a:ext cx="330101" cy="330101"/>
           </a:xfrm>
           <a:prstGeom prst="rect">
@@ -7991,8 +7993,8 @@
         </p:nvSpPr>
         <p:spPr>
           <a:xfrm>
-            <a:off x="4229076" y="2588716"/>
-            <a:ext cx="685550" cy="206425"/>
+            <a:off x="4176248" y="2427089"/>
+            <a:ext cx="791206" cy="238125"/>
           </a:xfrm>
           <a:prstGeom prst="rect">
             <a:avLst/>
@@ -8006,12 +8008,12 @@
           <a:p>
             <a:pPr algn="ctr" indent="0" marL="0">
               <a:lnSpc>
-                <a:spcPts val="1625"/>
+                <a:spcPts val="1875"/>
               </a:lnSpc>
               <a:buNone/>
             </a:pPr>
             <a:r>
-              <a:rPr lang="en-US" sz="1300" b="1" dirty="0">
+              <a:rPr lang="en-US" sz="1500" b="1" dirty="0">
                 <a:solidFill>
                   <a:srgbClr val="1F2328"/>
                 </a:solidFill>
@@ -8021,7 +8023,7 @@
               </a:rPr>
               <a:t>It's gone</a:t>
             </a:r>
-            <a:endParaRPr lang="en-US" sz="1300" dirty="0"/>
+            <a:endParaRPr lang="en-US" sz="1500" dirty="0"/>
           </a:p>
         </p:txBody>
       </p:sp>
@@ -8033,8 +8035,8 @@
         </p:nvSpPr>
         <p:spPr>
           <a:xfrm>
-            <a:off x="3852904" y="2896642"/>
-            <a:ext cx="1437894" cy="360164"/>
+            <a:off x="3852904" y="2766715"/>
+            <a:ext cx="1437894" cy="428625"/>
           </a:xfrm>
           <a:prstGeom prst="rect">
             <a:avLst/>
@@ -8048,12 +8050,12 @@
           <a:p>
             <a:pPr algn="ctr" indent="0" marL="0">
               <a:lnSpc>
-                <a:spcPts val="1418"/>
+                <a:spcPts val="1688"/>
               </a:lnSpc>
               <a:buNone/>
             </a:pPr>
             <a:r>
-              <a:rPr lang="en-US" sz="1050" dirty="0">
+              <a:rPr lang="en-US" sz="1250" dirty="0">
                 <a:solidFill>
                   <a:srgbClr val="59636E"/>
                 </a:solidFill>
@@ -8063,7 +8065,7 @@
               </a:rPr>
               <a:t>SQLite lived in the container</a:t>
             </a:r>
-            <a:endParaRPr lang="en-US" sz="1050" dirty="0"/>
+            <a:endParaRPr lang="en-US" sz="1250" dirty="0"/>
           </a:p>
         </p:txBody>
       </p:sp>
@@ -8075,8 +8077,8 @@
         </p:nvSpPr>
         <p:spPr>
           <a:xfrm>
-            <a:off x="5312619" y="2076004"/>
-            <a:ext cx="207365" cy="238125"/>
+            <a:off x="5299716" y="1900089"/>
+            <a:ext cx="233172" cy="266700"/>
           </a:xfrm>
           <a:prstGeom prst="rect">
             <a:avLst/>
@@ -8092,7 +8094,7 @@
               <a:buNone/>
             </a:pPr>
             <a:r>
-              <a:rPr lang="en-US" sz="1600" dirty="0">
+              <a:rPr lang="en-US" sz="1800" dirty="0">
                 <a:solidFill>
                   <a:srgbClr val="818B98"/>
                 </a:solidFill>
@@ -8102,7 +8104,7 @@
               </a:rPr>
               <a:t>→</a:t>
             </a:r>
-            <a:endParaRPr lang="en-US" sz="1600" dirty="0"/>
+            <a:endParaRPr lang="en-US" sz="1800" dirty="0"/>
           </a:p>
         </p:txBody>
       </p:sp>
@@ -8114,7 +8116,7 @@
         </p:nvSpPr>
         <p:spPr>
           <a:xfrm>
-            <a:off x="5968752" y="1903065"/>
+            <a:off x="5968752" y="1741438"/>
             <a:ext cx="584150" cy="584150"/>
           </a:xfrm>
           <a:prstGeom prst="roundRect">
@@ -8154,7 +8156,7 @@
         </p:blipFill>
         <p:spPr>
           <a:xfrm>
-            <a:off x="6095702" y="2030016"/>
+            <a:off x="6095702" y="1868388"/>
             <a:ext cx="330101" cy="330101"/>
           </a:xfrm>
           <a:prstGeom prst="rect">
@@ -8170,8 +8172,8 @@
         </p:nvSpPr>
         <p:spPr>
           <a:xfrm>
-            <a:off x="5919341" y="2588716"/>
-            <a:ext cx="683121" cy="206425"/>
+            <a:off x="5866665" y="2427089"/>
+            <a:ext cx="788474" cy="238125"/>
           </a:xfrm>
           <a:prstGeom prst="rect">
             <a:avLst/>
@@ -8185,12 +8187,12 @@
           <a:p>
             <a:pPr algn="ctr" indent="0" marL="0">
               <a:lnSpc>
-                <a:spcPts val="1625"/>
+                <a:spcPts val="1875"/>
               </a:lnSpc>
               <a:buNone/>
             </a:pPr>
             <a:r>
-              <a:rPr lang="en-US" sz="1300" b="1" dirty="0">
+              <a:rPr lang="en-US" sz="1500" b="1" dirty="0">
                 <a:solidFill>
                   <a:srgbClr val="1F2328"/>
                 </a:solidFill>
@@ -8200,7 +8202,7 @@
               </a:rPr>
               <a:t>Ask why</a:t>
             </a:r>
-            <a:endParaRPr lang="en-US" sz="1300" dirty="0"/>
+            <a:endParaRPr lang="en-US" sz="1500" dirty="0"/>
           </a:p>
         </p:txBody>
       </p:sp>
@@ -8212,8 +8214,8 @@
         </p:nvSpPr>
         <p:spPr>
           <a:xfrm>
-            <a:off x="5541955" y="2896642"/>
-            <a:ext cx="1437894" cy="360164"/>
+            <a:off x="5541955" y="2766715"/>
+            <a:ext cx="1437894" cy="642938"/>
           </a:xfrm>
           <a:prstGeom prst="rect">
             <a:avLst/>
@@ -8227,12 +8229,12 @@
           <a:p>
             <a:pPr algn="ctr" indent="0" marL="0">
               <a:lnSpc>
-                <a:spcPts val="1418"/>
+                <a:spcPts val="1688"/>
               </a:lnSpc>
               <a:buNone/>
             </a:pPr>
             <a:r>
-              <a:rPr lang="en-US" sz="1050" dirty="0">
+              <a:rPr lang="en-US" sz="1250" dirty="0">
                 <a:solidFill>
                   <a:srgbClr val="59636E"/>
                 </a:solidFill>
@@ -8242,7 +8244,7 @@
               </a:rPr>
               <a:t>Why did my dashboard disappear?</a:t>
             </a:r>
-            <a:endParaRPr lang="en-US" sz="1050" dirty="0"/>
+            <a:endParaRPr lang="en-US" sz="1250" dirty="0"/>
           </a:p>
         </p:txBody>
       </p:sp>
@@ -8254,8 +8256,8 @@
         </p:nvSpPr>
         <p:spPr>
           <a:xfrm>
-            <a:off x="7001670" y="2076004"/>
-            <a:ext cx="207365" cy="238125"/>
+            <a:off x="6988766" y="1900089"/>
+            <a:ext cx="233172" cy="266700"/>
           </a:xfrm>
           <a:prstGeom prst="rect">
             <a:avLst/>
@@ -8271,7 +8273,7 @@
               <a:buNone/>
             </a:pPr>
             <a:r>
-              <a:rPr lang="en-US" sz="1600" dirty="0">
+              <a:rPr lang="en-US" sz="1800" dirty="0">
                 <a:solidFill>
                   <a:srgbClr val="818B98"/>
                 </a:solidFill>
@@ -8281,7 +8283,7 @@
               </a:rPr>
               <a:t>→</a:t>
             </a:r>
-            <a:endParaRPr lang="en-US" sz="1600" dirty="0"/>
+            <a:endParaRPr lang="en-US" sz="1800" dirty="0"/>
           </a:p>
         </p:txBody>
       </p:sp>
@@ -8293,7 +8295,7 @@
         </p:nvSpPr>
         <p:spPr>
           <a:xfrm>
-            <a:off x="7657802" y="1903065"/>
+            <a:off x="7657802" y="1741438"/>
             <a:ext cx="584150" cy="584150"/>
           </a:xfrm>
           <a:prstGeom prst="roundRect">
@@ -8333,7 +8335,7 @@
         </p:blipFill>
         <p:spPr>
           <a:xfrm>
-            <a:off x="7784753" y="2030016"/>
+            <a:off x="7784753" y="1868388"/>
             <a:ext cx="330101" cy="330101"/>
           </a:xfrm>
           <a:prstGeom prst="rect">
@@ -8349,8 +8351,8 @@
         </p:nvSpPr>
         <p:spPr>
           <a:xfrm>
-            <a:off x="7673819" y="2588716"/>
-            <a:ext cx="552265" cy="206425"/>
+            <a:off x="7631314" y="2427089"/>
+            <a:ext cx="637276" cy="238125"/>
           </a:xfrm>
           <a:prstGeom prst="rect">
             <a:avLst/>
@@ -8364,12 +8366,12 @@
           <a:p>
             <a:pPr algn="ctr" indent="0" marL="0">
               <a:lnSpc>
-                <a:spcPts val="1625"/>
+                <a:spcPts val="1875"/>
               </a:lnSpc>
               <a:buNone/>
             </a:pPr>
             <a:r>
-              <a:rPr lang="en-US" sz="1300" b="1" dirty="0">
+              <a:rPr lang="en-US" sz="1500" b="1" dirty="0">
                 <a:solidFill>
                   <a:srgbClr val="1F2328"/>
                 </a:solidFill>
@@ -8379,7 +8381,7 @@
               </a:rPr>
               <a:t>Decide</a:t>
             </a:r>
-            <a:endParaRPr lang="en-US" sz="1300" dirty="0"/>
+            <a:endParaRPr lang="en-US" sz="1500" dirty="0"/>
           </a:p>
         </p:txBody>
       </p:sp>
@@ -8391,8 +8393,8 @@
         </p:nvSpPr>
         <p:spPr>
           <a:xfrm>
-            <a:off x="7231005" y="2896642"/>
-            <a:ext cx="1437894" cy="360164"/>
+            <a:off x="7231005" y="2766715"/>
+            <a:ext cx="1437894" cy="428625"/>
           </a:xfrm>
           <a:prstGeom prst="rect">
             <a:avLst/>
@@ -8406,12 +8408,12 @@
           <a:p>
             <a:pPr algn="ctr" indent="0" marL="0">
               <a:lnSpc>
-                <a:spcPts val="1418"/>
+                <a:spcPts val="1688"/>
               </a:lnSpc>
               <a:buNone/>
             </a:pPr>
             <a:r>
-              <a:rPr lang="en-US" sz="1050" dirty="0">
+              <a:rPr lang="en-US" sz="1250" dirty="0">
                 <a:solidFill>
                   <a:srgbClr val="59636E"/>
                 </a:solidFill>
@@ -8421,7 +8423,7 @@
               </a:rPr>
               <a:t>PostgreSQL or Azure Files</a:t>
             </a:r>
-            <a:endParaRPr lang="en-US" sz="1050" dirty="0"/>
+            <a:endParaRPr lang="en-US" sz="1250" dirty="0"/>
           </a:p>
         </p:txBody>
       </p:sp>
@@ -8433,12 +8435,12 @@
         </p:nvSpPr>
         <p:spPr>
           <a:xfrm>
-            <a:off x="2622649" y="3688556"/>
-            <a:ext cx="3898404" cy="427732"/>
+            <a:off x="2348657" y="3866852"/>
+            <a:ext cx="4446240" cy="462111"/>
           </a:xfrm>
           <a:prstGeom prst="roundRect">
             <a:avLst>
-              <a:gd name="adj" fmla="val 17815"/>
+              <a:gd name="adj" fmla="val 16490"/>
             </a:avLst>
           </a:prstGeom>
           <a:solidFill>
@@ -8477,7 +8479,7 @@
         </p:blipFill>
         <p:spPr>
           <a:xfrm>
-            <a:off x="2784574" y="3813572"/>
+            <a:off x="2510582" y="4008983"/>
             <a:ext cx="177701" cy="177701"/>
           </a:xfrm>
           <a:prstGeom prst="rect">
@@ -8493,8 +8495,8 @@
         </p:nvSpPr>
         <p:spPr>
           <a:xfrm>
-            <a:off x="3063776" y="3799582"/>
-            <a:ext cx="3361259" cy="205680"/>
+            <a:off x="2789783" y="3977878"/>
+            <a:ext cx="3920052" cy="240060"/>
           </a:xfrm>
           <a:prstGeom prst="rect">
             <a:avLst/>
@@ -8508,12 +8510,12 @@
           <a:p>
             <a:pPr algn="l" indent="0" marL="0">
               <a:lnSpc>
-                <a:spcPts val="1620"/>
+                <a:spcPts val="1890"/>
               </a:lnSpc>
               <a:buNone/>
             </a:pPr>
             <a:r>
-              <a:rPr lang="en-US" sz="1200" dirty="0">
+              <a:rPr lang="en-US" sz="1400" dirty="0">
                 <a:solidFill>
                   <a:srgbClr val="1F2328"/>
                 </a:solidFill>
@@ -8523,7 +8525,7 @@
               </a:rPr>
               <a:t>Embedded storage is still a persistence decision.</a:t>
             </a:r>
-            <a:endParaRPr lang="en-US" sz="1200" dirty="0"/>
+            <a:endParaRPr lang="en-US" sz="1400" dirty="0"/>
           </a:p>
         </p:txBody>
       </p:sp>
@@ -8567,12 +8569,12 @@
         </p:nvSpPr>
         <p:spPr>
           <a:xfrm>
-            <a:off x="7740700" y="152400"/>
-            <a:ext cx="819150" cy="266700"/>
+            <a:off x="7652742" y="152400"/>
+            <a:ext cx="907107" cy="279350"/>
           </a:xfrm>
           <a:prstGeom prst="roundRect">
             <a:avLst>
-              <a:gd name="adj" fmla="val 23810"/>
+              <a:gd name="adj" fmla="val 22731"/>
             </a:avLst>
           </a:prstGeom>
           <a:solidFill>
@@ -8599,8 +8601,8 @@
         </p:nvSpPr>
         <p:spPr>
           <a:xfrm>
-            <a:off x="7861998" y="219075"/>
-            <a:ext cx="576554" cy="133350"/>
+            <a:off x="7786064" y="220563"/>
+            <a:ext cx="640464" cy="142875"/>
           </a:xfrm>
           <a:prstGeom prst="rect">
             <a:avLst/>
@@ -8616,7 +8618,7 @@
               <a:buNone/>
             </a:pPr>
             <a:r>
-              <a:rPr lang="en-US" sz="900" b="1" dirty="0">
+              <a:rPr lang="en-US" sz="1000" b="1" dirty="0">
                 <a:solidFill>
                   <a:srgbClr val="FFFFFF"/>
                 </a:solidFill>
@@ -8626,7 +8628,7 @@
               </a:rPr>
               <a:t>GRAFANA</a:t>
             </a:r>
-            <a:endParaRPr lang="en-US" sz="900" dirty="0"/>
+            <a:endParaRPr lang="en-US" sz="1000" dirty="0"/>
           </a:p>
         </p:txBody>
       </p:sp>
@@ -8663,7 +8665,7 @@
         <p:spPr>
           <a:xfrm>
             <a:off x="482501" y="330101"/>
-            <a:ext cx="7772400" cy="142875"/>
+            <a:ext cx="8342275" cy="152400"/>
           </a:xfrm>
           <a:prstGeom prst="rect">
             <a:avLst/>
@@ -8679,7 +8681,7 @@
               <a:buNone/>
             </a:pPr>
             <a:r>
-              <a:rPr lang="en-US" sz="1000" b="1" dirty="0">
+              <a:rPr lang="en-US" sz="1100" b="1" dirty="0">
                 <a:solidFill>
                   <a:srgbClr val="1A7F37"/>
                 </a:solidFill>
@@ -8689,7 +8691,7 @@
               </a:rPr>
               <a:t>CLEAN UP</a:t>
             </a:r>
-            <a:endParaRPr lang="en-US" sz="1000" dirty="0"/>
+            <a:endParaRPr lang="en-US" sz="1100" dirty="0"/>
           </a:p>
         </p:txBody>
       </p:sp>
@@ -8701,8 +8703,8 @@
         </p:nvSpPr>
         <p:spPr>
           <a:xfrm>
-            <a:off x="482501" y="523726"/>
-            <a:ext cx="7772400" cy="393650"/>
+            <a:off x="482501" y="533251"/>
+            <a:ext cx="8342275" cy="419100"/>
           </a:xfrm>
           <a:prstGeom prst="rect">
             <a:avLst/>
@@ -8716,7 +8718,7 @@
           <a:p>
             <a:pPr algn="l" indent="0" marL="0">
               <a:lnSpc>
-                <a:spcPts val="3100"/>
+                <a:spcPts val="3300"/>
               </a:lnSpc>
               <a:spcBef>
                 <a:spcPts val="400"/>
@@ -8724,7 +8726,7 @@
               <a:buNone/>
             </a:pPr>
             <a:r>
-              <a:rPr lang="en-US" sz="2600" b="1" dirty="0">
+              <a:rPr lang="en-US" sz="2800" b="1" dirty="0">
                 <a:solidFill>
                   <a:srgbClr val="1F2328"/>
                 </a:solidFill>
@@ -8734,7 +8736,7 @@
               </a:rPr>
               <a:t>Tear it down the same day</a:t>
             </a:r>
-            <a:endParaRPr lang="en-US" sz="2600" dirty="0"/>
+            <a:endParaRPr lang="en-US" sz="2800" dirty="0"/>
           </a:p>
         </p:txBody>
       </p:sp>
@@ -8746,7 +8748,7 @@
         </p:nvSpPr>
         <p:spPr>
           <a:xfrm>
-            <a:off x="1015901" y="1695301"/>
+            <a:off x="1015901" y="1670149"/>
             <a:ext cx="7111901" cy="1968252"/>
           </a:xfrm>
           <a:prstGeom prst="roundRect">
@@ -8785,7 +8787,7 @@
         </p:nvSpPr>
         <p:spPr>
           <a:xfrm>
-            <a:off x="1015901" y="1695301"/>
+            <a:off x="1015901" y="1670149"/>
             <a:ext cx="7111901" cy="253901"/>
           </a:xfrm>
           <a:prstGeom prst="roundRect">
@@ -8817,7 +8819,7 @@
         </p:nvSpPr>
         <p:spPr>
           <a:xfrm>
-            <a:off x="1142851" y="1777752"/>
+            <a:off x="1142851" y="1752600"/>
             <a:ext cx="88850" cy="88850"/>
           </a:xfrm>
           <a:prstGeom prst="roundRect">
@@ -8849,7 +8851,7 @@
         </p:nvSpPr>
         <p:spPr>
           <a:xfrm>
-            <a:off x="1295102" y="1777752"/>
+            <a:off x="1295102" y="1752600"/>
             <a:ext cx="88850" cy="88850"/>
           </a:xfrm>
           <a:prstGeom prst="roundRect">
@@ -8881,7 +8883,7 @@
         </p:nvSpPr>
         <p:spPr>
           <a:xfrm>
-            <a:off x="1447354" y="1777752"/>
+            <a:off x="1447354" y="1752600"/>
             <a:ext cx="88850" cy="88850"/>
           </a:xfrm>
           <a:prstGeom prst="roundRect">
@@ -8913,8 +8915,8 @@
         </p:nvSpPr>
         <p:spPr>
           <a:xfrm>
-            <a:off x="1701105" y="1765102"/>
-            <a:ext cx="528584" cy="114300"/>
+            <a:off x="1701105" y="1725662"/>
+            <a:ext cx="621792" cy="142875"/>
           </a:xfrm>
           <a:prstGeom prst="rect">
             <a:avLst/>
@@ -8930,7 +8932,7 @@
               <a:buNone/>
             </a:pPr>
             <a:r>
-              <a:rPr lang="en-US" sz="850" dirty="0">
+              <a:rPr lang="en-US" sz="1000" dirty="0">
                 <a:solidFill>
                   <a:srgbClr val="8B949E"/>
                 </a:solidFill>
@@ -8940,7 +8942,7 @@
               </a:rPr>
               <a:t>Terminal</a:t>
             </a:r>
-            <a:endParaRPr lang="en-US" sz="850" dirty="0"/>
+            <a:endParaRPr lang="en-US" sz="1000" dirty="0"/>
           </a:p>
         </p:txBody>
       </p:sp>
@@ -8952,7 +8954,7 @@
         </p:nvSpPr>
         <p:spPr>
           <a:xfrm>
-            <a:off x="1244501" y="2126903"/>
+            <a:off x="1244501" y="2101751"/>
             <a:ext cx="6787795" cy="295275"/>
           </a:xfrm>
           <a:prstGeom prst="rect">
@@ -9011,7 +9013,7 @@
         </p:nvSpPr>
         <p:spPr>
           <a:xfrm>
-            <a:off x="1244501" y="2574578"/>
+            <a:off x="1244501" y="2549426"/>
             <a:ext cx="6787795" cy="295275"/>
           </a:xfrm>
           <a:prstGeom prst="rect">
@@ -9053,7 +9055,7 @@
         </p:nvSpPr>
         <p:spPr>
           <a:xfrm>
-            <a:off x="1244501" y="2869853"/>
+            <a:off x="1244501" y="2844701"/>
             <a:ext cx="6787795" cy="295275"/>
           </a:xfrm>
           <a:prstGeom prst="rect">
@@ -9112,7 +9114,7 @@
         </p:nvSpPr>
         <p:spPr>
           <a:xfrm>
-            <a:off x="1244501" y="3165128"/>
+            <a:off x="1244501" y="3139976"/>
             <a:ext cx="6787795" cy="295275"/>
           </a:xfrm>
           <a:prstGeom prst="rect">
@@ -9162,8 +9164,8 @@
         </p:blipFill>
         <p:spPr>
           <a:xfrm>
-            <a:off x="1015901" y="4012853"/>
-            <a:ext cx="190500" cy="190500"/>
+            <a:off x="1015901" y="4051102"/>
+            <a:ext cx="215801" cy="215801"/>
           </a:xfrm>
           <a:prstGeom prst="rect">
             <a:avLst/>
@@ -9178,8 +9180,8 @@
         </p:nvSpPr>
         <p:spPr>
           <a:xfrm>
-            <a:off x="1307902" y="3892153"/>
-            <a:ext cx="6956298" cy="431899"/>
+            <a:off x="1333202" y="3917752"/>
+            <a:ext cx="6930491" cy="482501"/>
           </a:xfrm>
           <a:prstGeom prst="rect">
             <a:avLst/>
@@ -9193,12 +9195,12 @@
           <a:p>
             <a:pPr algn="l" indent="0" marL="0">
               <a:lnSpc>
-                <a:spcPts val="1700"/>
+                <a:spcPts val="1900"/>
               </a:lnSpc>
               <a:buNone/>
             </a:pPr>
             <a:r>
-              <a:rPr lang="en-US" sz="1250" dirty="0">
+              <a:rPr lang="en-US" sz="1400" dirty="0">
                 <a:solidFill>
                   <a:srgbClr val="1F2328"/>
                 </a:solidFill>
@@ -9210,12 +9212,12 @@
             </a:r>
             <a:pPr algn="l" indent="0" marL="0">
               <a:lnSpc>
-                <a:spcPts val="1700"/>
+                <a:spcPts val="1900"/>
               </a:lnSpc>
               <a:buNone/>
             </a:pPr>
             <a:r>
-              <a:rPr lang="en-US" sz="1250" b="1" dirty="0">
+              <a:rPr lang="en-US" sz="1400" b="1" dirty="0">
                 <a:solidFill>
                   <a:srgbClr val="1F2328"/>
                 </a:solidFill>
@@ -9227,12 +9229,12 @@
             </a:r>
             <a:pPr algn="l" indent="0" marL="0">
               <a:lnSpc>
-                <a:spcPts val="1700"/>
+                <a:spcPts val="1900"/>
               </a:lnSpc>
               <a:buNone/>
             </a:pPr>
             <a:r>
-              <a:rPr lang="en-US" sz="1250" dirty="0">
+              <a:rPr lang="en-US" sz="1400" dirty="0">
                 <a:solidFill>
                   <a:srgbClr val="1F2328"/>
                 </a:solidFill>
@@ -9242,7 +9244,7 @@
               </a:rPr>
               <a:t> also clears soft-deleted resources.</a:t>
             </a:r>
-            <a:endParaRPr lang="en-US" sz="1250" dirty="0"/>
+            <a:endParaRPr lang="en-US" sz="1400" dirty="0"/>
           </a:p>
         </p:txBody>
       </p:sp>
@@ -9286,12 +9288,12 @@
         </p:nvSpPr>
         <p:spPr>
           <a:xfrm>
-            <a:off x="7740700" y="152400"/>
-            <a:ext cx="819150" cy="266700"/>
+            <a:off x="7652742" y="152400"/>
+            <a:ext cx="907107" cy="279350"/>
           </a:xfrm>
           <a:prstGeom prst="roundRect">
             <a:avLst>
-              <a:gd name="adj" fmla="val 23810"/>
+              <a:gd name="adj" fmla="val 22731"/>
             </a:avLst>
           </a:prstGeom>
           <a:solidFill>
@@ -9318,8 +9320,8 @@
         </p:nvSpPr>
         <p:spPr>
           <a:xfrm>
-            <a:off x="7861998" y="219075"/>
-            <a:ext cx="576554" cy="133350"/>
+            <a:off x="7786064" y="220563"/>
+            <a:ext cx="640464" cy="142875"/>
           </a:xfrm>
           <a:prstGeom prst="rect">
             <a:avLst/>
@@ -9335,7 +9337,7 @@
               <a:buNone/>
             </a:pPr>
             <a:r>
-              <a:rPr lang="en-US" sz="900" b="1" dirty="0">
+              <a:rPr lang="en-US" sz="1000" b="1" dirty="0">
                 <a:solidFill>
                   <a:srgbClr val="FFFFFF"/>
                 </a:solidFill>
@@ -9345,7 +9347,7 @@
               </a:rPr>
               <a:t>GRAFANA</a:t>
             </a:r>
-            <a:endParaRPr lang="en-US" sz="900" dirty="0"/>
+            <a:endParaRPr lang="en-US" sz="1000" dirty="0"/>
           </a:p>
         </p:txBody>
       </p:sp>
@@ -9382,7 +9384,7 @@
         <p:spPr>
           <a:xfrm>
             <a:off x="482501" y="330101"/>
-            <a:ext cx="7772400" cy="142875"/>
+            <a:ext cx="8342275" cy="152400"/>
           </a:xfrm>
           <a:prstGeom prst="rect">
             <a:avLst/>
@@ -9398,7 +9400,7 @@
               <a:buNone/>
             </a:pPr>
             <a:r>
-              <a:rPr lang="en-US" sz="1000" b="1" dirty="0">
+              <a:rPr lang="en-US" sz="1100" b="1" dirty="0">
                 <a:solidFill>
                   <a:srgbClr val="1A7F37"/>
                 </a:solidFill>
@@ -9408,7 +9410,7 @@
               </a:rPr>
               <a:t>KEY TAKEAWAYS</a:t>
             </a:r>
-            <a:endParaRPr lang="en-US" sz="1000" dirty="0"/>
+            <a:endParaRPr lang="en-US" sz="1100" dirty="0"/>
           </a:p>
         </p:txBody>
       </p:sp>
@@ -9420,8 +9422,8 @@
         </p:nvSpPr>
         <p:spPr>
           <a:xfrm>
-            <a:off x="482501" y="523726"/>
-            <a:ext cx="7772400" cy="393650"/>
+            <a:off x="482501" y="533251"/>
+            <a:ext cx="8342275" cy="419100"/>
           </a:xfrm>
           <a:prstGeom prst="rect">
             <a:avLst/>
@@ -9435,7 +9437,7 @@
           <a:p>
             <a:pPr algn="l" indent="0" marL="0">
               <a:lnSpc>
-                <a:spcPts val="3100"/>
+                <a:spcPts val="3300"/>
               </a:lnSpc>
               <a:spcBef>
                 <a:spcPts val="400"/>
@@ -9443,7 +9445,7 @@
               <a:buNone/>
             </a:pPr>
             <a:r>
-              <a:rPr lang="en-US" sz="2600" b="1" dirty="0">
+              <a:rPr lang="en-US" sz="2800" b="1" dirty="0">
                 <a:solidFill>
                   <a:srgbClr val="1F2328"/>
                 </a:solidFill>
@@ -9453,7 +9455,7 @@
               </a:rPr>
               <a:t>What to remember</a:t>
             </a:r>
-            <a:endParaRPr lang="en-US" sz="2600" dirty="0"/>
+            <a:endParaRPr lang="en-US" sz="2800" dirty="0"/>
           </a:p>
         </p:txBody>
       </p:sp>
@@ -9465,12 +9467,12 @@
         </p:nvSpPr>
         <p:spPr>
           <a:xfrm>
-            <a:off x="482501" y="1320701"/>
-            <a:ext cx="431750" cy="431750"/>
+            <a:off x="482501" y="1422350"/>
+            <a:ext cx="507950" cy="507950"/>
           </a:xfrm>
           <a:prstGeom prst="roundRect">
             <a:avLst>
-              <a:gd name="adj" fmla="val 17649"/>
+              <a:gd name="adj" fmla="val 15001"/>
             </a:avLst>
           </a:prstGeom>
           <a:solidFill>
@@ -9505,8 +9507,8 @@
         </p:blipFill>
         <p:spPr>
           <a:xfrm>
-            <a:off x="577751" y="1415951"/>
-            <a:ext cx="241250" cy="241250"/>
+            <a:off x="596801" y="1536650"/>
+            <a:ext cx="279350" cy="279350"/>
           </a:xfrm>
           <a:prstGeom prst="rect">
             <a:avLst/>
@@ -9521,8 +9523,8 @@
         </p:nvSpPr>
         <p:spPr>
           <a:xfrm>
-            <a:off x="1066651" y="1320701"/>
-            <a:ext cx="3355035" cy="431899"/>
+            <a:off x="1155502" y="1435001"/>
+            <a:ext cx="3290367" cy="482501"/>
           </a:xfrm>
           <a:prstGeom prst="rect">
             <a:avLst/>
@@ -9536,12 +9538,12 @@
           <a:p>
             <a:pPr algn="l" indent="0" marL="0">
               <a:lnSpc>
-                <a:spcPts val="1700"/>
+                <a:spcPts val="1900"/>
               </a:lnSpc>
               <a:buNone/>
             </a:pPr>
             <a:r>
-              <a:rPr lang="en-US" sz="1300" dirty="0">
+              <a:rPr lang="en-US" sz="1500" dirty="0">
                 <a:solidFill>
                   <a:srgbClr val="1F2328"/>
                 </a:solidFill>
@@ -9551,7 +9553,7 @@
               </a:rPr>
               <a:t>Plan and preview before you create anything billable.</a:t>
             </a:r>
-            <a:endParaRPr lang="en-US" sz="1300" dirty="0"/>
+            <a:endParaRPr lang="en-US" sz="1500" dirty="0"/>
           </a:p>
         </p:txBody>
       </p:sp>
@@ -9563,12 +9565,12 @@
         </p:nvSpPr>
         <p:spPr>
           <a:xfrm>
-            <a:off x="4736902" y="1320701"/>
-            <a:ext cx="431750" cy="431750"/>
+            <a:off x="4762351" y="1422350"/>
+            <a:ext cx="507950" cy="507950"/>
           </a:xfrm>
           <a:prstGeom prst="roundRect">
             <a:avLst>
-              <a:gd name="adj" fmla="val 17649"/>
+              <a:gd name="adj" fmla="val 15001"/>
             </a:avLst>
           </a:prstGeom>
           <a:solidFill>
@@ -9603,8 +9605,8 @@
         </p:blipFill>
         <p:spPr>
           <a:xfrm>
-            <a:off x="4832152" y="1415951"/>
-            <a:ext cx="241250" cy="241250"/>
+            <a:off x="4876651" y="1536650"/>
+            <a:ext cx="279350" cy="279350"/>
           </a:xfrm>
           <a:prstGeom prst="rect">
             <a:avLst/>
@@ -9619,8 +9621,8 @@
         </p:nvSpPr>
         <p:spPr>
           <a:xfrm>
-            <a:off x="5321052" y="1320701"/>
-            <a:ext cx="3355035" cy="431899"/>
+            <a:off x="5435352" y="1435001"/>
+            <a:ext cx="3290367" cy="482501"/>
           </a:xfrm>
           <a:prstGeom prst="rect">
             <a:avLst/>
@@ -9634,12 +9636,12 @@
           <a:p>
             <a:pPr algn="l" indent="0" marL="0">
               <a:lnSpc>
-                <a:spcPts val="1700"/>
+                <a:spcPts val="1900"/>
               </a:lnSpc>
               <a:buNone/>
             </a:pPr>
             <a:r>
-              <a:rPr lang="en-US" sz="1300" dirty="0">
+              <a:rPr lang="en-US" sz="1500" dirty="0">
                 <a:solidFill>
                   <a:srgbClr val="1F2328"/>
                 </a:solidFill>
@@ -9649,7 +9651,7 @@
               </a:rPr>
               <a:t>An agent plus app skills can deploy, and then operate, the app.</a:t>
             </a:r>
-            <a:endParaRPr lang="en-US" sz="1300" dirty="0"/>
+            <a:endParaRPr lang="en-US" sz="1500" dirty="0"/>
           </a:p>
         </p:txBody>
       </p:sp>
@@ -9661,12 +9663,12 @@
         </p:nvSpPr>
         <p:spPr>
           <a:xfrm>
-            <a:off x="482501" y="2082701"/>
-            <a:ext cx="431750" cy="431750"/>
+            <a:off x="482501" y="2311301"/>
+            <a:ext cx="507950" cy="507950"/>
           </a:xfrm>
           <a:prstGeom prst="roundRect">
             <a:avLst>
-              <a:gd name="adj" fmla="val 17649"/>
+              <a:gd name="adj" fmla="val 15001"/>
             </a:avLst>
           </a:prstGeom>
           <a:solidFill>
@@ -9701,8 +9703,8 @@
         </p:blipFill>
         <p:spPr>
           <a:xfrm>
-            <a:off x="577751" y="2177951"/>
-            <a:ext cx="241250" cy="241250"/>
+            <a:off x="596801" y="2425601"/>
+            <a:ext cx="279350" cy="279350"/>
           </a:xfrm>
           <a:prstGeom prst="rect">
             <a:avLst/>
@@ -9717,8 +9719,8 @@
         </p:nvSpPr>
         <p:spPr>
           <a:xfrm>
-            <a:off x="1066651" y="2082701"/>
-            <a:ext cx="3355035" cy="431899"/>
+            <a:off x="1155502" y="2323951"/>
+            <a:ext cx="3290367" cy="482501"/>
           </a:xfrm>
           <a:prstGeom prst="rect">
             <a:avLst/>
@@ -9732,12 +9734,12 @@
           <a:p>
             <a:pPr algn="l" indent="0" marL="0">
               <a:lnSpc>
-                <a:spcPts val="1700"/>
+                <a:spcPts val="1900"/>
               </a:lnSpc>
               <a:buNone/>
             </a:pPr>
             <a:r>
-              <a:rPr lang="en-US" sz="1300" dirty="0">
+              <a:rPr lang="en-US" sz="1500" dirty="0">
                 <a:solidFill>
                   <a:srgbClr val="1F2328"/>
                 </a:solidFill>
@@ -9747,7 +9749,7 @@
               </a:rPr>
               <a:t>Embedded storage is a persistence decision. Test it.</a:t>
             </a:r>
-            <a:endParaRPr lang="en-US" sz="1300" dirty="0"/>
+            <a:endParaRPr lang="en-US" sz="1500" dirty="0"/>
           </a:p>
         </p:txBody>
       </p:sp>
@@ -9759,12 +9761,12 @@
         </p:nvSpPr>
         <p:spPr>
           <a:xfrm>
-            <a:off x="4736902" y="2082701"/>
-            <a:ext cx="431750" cy="431750"/>
+            <a:off x="4762351" y="2311301"/>
+            <a:ext cx="507950" cy="507950"/>
           </a:xfrm>
           <a:prstGeom prst="roundRect">
             <a:avLst>
-              <a:gd name="adj" fmla="val 17649"/>
+              <a:gd name="adj" fmla="val 15001"/>
             </a:avLst>
           </a:prstGeom>
           <a:solidFill>
@@ -9799,8 +9801,8 @@
         </p:blipFill>
         <p:spPr>
           <a:xfrm>
-            <a:off x="4832152" y="2177951"/>
-            <a:ext cx="241250" cy="241250"/>
+            <a:off x="4876651" y="2425601"/>
+            <a:ext cx="279350" cy="279350"/>
           </a:xfrm>
           <a:prstGeom prst="rect">
             <a:avLst/>
@@ -9815,8 +9817,8 @@
         </p:nvSpPr>
         <p:spPr>
           <a:xfrm>
-            <a:off x="5321052" y="2190601"/>
-            <a:ext cx="3106683" cy="215950"/>
+            <a:off x="5435352" y="2323951"/>
+            <a:ext cx="3290367" cy="482501"/>
           </a:xfrm>
           <a:prstGeom prst="rect">
             <a:avLst/>
@@ -9830,12 +9832,12 @@
           <a:p>
             <a:pPr algn="l" indent="0" marL="0">
               <a:lnSpc>
-                <a:spcPts val="1700"/>
+                <a:spcPts val="1900"/>
               </a:lnSpc>
               <a:buNone/>
             </a:pPr>
             <a:r>
-              <a:rPr lang="en-US" sz="1300" dirty="0">
+              <a:rPr lang="en-US" sz="1500" dirty="0">
                 <a:solidFill>
                   <a:srgbClr val="1F2328"/>
                 </a:solidFill>
@@ -9845,7 +9847,7 @@
               </a:rPr>
               <a:t>Cold starts after scale-to-zero are normal.</a:t>
             </a:r>
-            <a:endParaRPr lang="en-US" sz="1300" dirty="0"/>
+            <a:endParaRPr lang="en-US" sz="1500" dirty="0"/>
           </a:p>
         </p:txBody>
       </p:sp>
@@ -9857,12 +9859,12 @@
         </p:nvSpPr>
         <p:spPr>
           <a:xfrm>
-            <a:off x="482501" y="3886200"/>
-            <a:ext cx="8178701" cy="711101"/>
+            <a:off x="482501" y="3810000"/>
+            <a:ext cx="8178701" cy="787301"/>
           </a:xfrm>
           <a:prstGeom prst="roundRect">
             <a:avLst>
-              <a:gd name="adj" fmla="val 14288"/>
+              <a:gd name="adj" fmla="val 12905"/>
             </a:avLst>
           </a:prstGeom>
           <a:solidFill>
@@ -9893,12 +9895,12 @@
         </p:nvSpPr>
         <p:spPr>
           <a:xfrm>
-            <a:off x="669727" y="4051250"/>
-            <a:ext cx="381000" cy="381000"/>
+            <a:off x="669727" y="3987701"/>
+            <a:ext cx="431750" cy="431750"/>
           </a:xfrm>
           <a:prstGeom prst="roundRect">
             <a:avLst>
-              <a:gd name="adj" fmla="val 20000"/>
+              <a:gd name="adj" fmla="val 17649"/>
             </a:avLst>
           </a:prstGeom>
           <a:solidFill>
@@ -9933,8 +9935,8 @@
         </p:blipFill>
         <p:spPr>
           <a:xfrm>
-            <a:off x="752326" y="4133850"/>
-            <a:ext cx="215801" cy="215801"/>
+            <a:off x="764977" y="4082951"/>
+            <a:ext cx="241250" cy="241250"/>
           </a:xfrm>
           <a:prstGeom prst="rect">
             <a:avLst/>
@@ -9949,8 +9951,8 @@
         </p:nvSpPr>
         <p:spPr>
           <a:xfrm>
-            <a:off x="1203127" y="4067175"/>
-            <a:ext cx="4651903" cy="133350"/>
+            <a:off x="1253877" y="4008388"/>
+            <a:ext cx="5210240" cy="142875"/>
           </a:xfrm>
           <a:prstGeom prst="rect">
             <a:avLst/>
@@ -9966,7 +9968,7 @@
               <a:buNone/>
             </a:pPr>
             <a:r>
-              <a:rPr lang="en-US" sz="900" b="1" dirty="0">
+              <a:rPr lang="en-US" sz="1000" b="1" dirty="0">
                 <a:solidFill>
                   <a:srgbClr val="0969DA"/>
                 </a:solidFill>
@@ -9976,7 +9978,7 @@
               </a:rPr>
               <a:t>NEXT JOURNEY</a:t>
             </a:r>
-            <a:endParaRPr lang="en-US" sz="900" dirty="0"/>
+            <a:endParaRPr lang="en-US" sz="1000" dirty="0"/>
           </a:p>
         </p:txBody>
       </p:sp>
@@ -9988,8 +9990,8 @@
         </p:nvSpPr>
         <p:spPr>
           <a:xfrm>
-            <a:off x="1203127" y="4225826"/>
-            <a:ext cx="4651903" cy="190500"/>
+            <a:off x="1253877" y="4189363"/>
+            <a:ext cx="5210240" cy="209550"/>
           </a:xfrm>
           <a:prstGeom prst="rect">
             <a:avLst/>
@@ -10005,7 +10007,7 @@
               <a:buNone/>
             </a:pPr>
             <a:r>
-              <a:rPr lang="en-US" sz="1250" b="1" dirty="0">
+              <a:rPr lang="en-US" sz="1400" b="1" dirty="0">
                 <a:solidFill>
                   <a:srgbClr val="1F2328"/>
                 </a:solidFill>
@@ -10019,7 +10021,7 @@
               <a:buNone/>
             </a:pPr>
             <a:r>
-              <a:rPr lang="en-US" sz="1250" dirty="0">
+              <a:rPr lang="en-US" sz="1400" dirty="0">
                 <a:solidFill>
                   <a:srgbClr val="1F2328"/>
                 </a:solidFill>
@@ -10033,7 +10035,7 @@
               <a:buNone/>
             </a:pPr>
             <a:r>
-              <a:rPr lang="en-US" sz="1250" dirty="0">
+              <a:rPr lang="en-US" sz="1400" dirty="0">
                 <a:solidFill>
                   <a:srgbClr val="59636E"/>
                 </a:solidFill>
@@ -10043,7 +10045,7 @@
               </a:rPr>
               <a:t>· Add PostgreSQL, health probes, and a post-provision hook</a:t>
             </a:r>
-            <a:endParaRPr lang="en-US" sz="1250" dirty="0"/>
+            <a:endParaRPr lang="en-US" sz="1400" dirty="0"/>
           </a:p>
         </p:txBody>
       </p:sp>
@@ -10087,12 +10089,12 @@
         </p:nvSpPr>
         <p:spPr>
           <a:xfrm>
-            <a:off x="7740700" y="152400"/>
-            <a:ext cx="819150" cy="266700"/>
+            <a:off x="7652742" y="152400"/>
+            <a:ext cx="907107" cy="279350"/>
           </a:xfrm>
           <a:prstGeom prst="roundRect">
             <a:avLst>
-              <a:gd name="adj" fmla="val 23810"/>
+              <a:gd name="adj" fmla="val 22731"/>
             </a:avLst>
           </a:prstGeom>
           <a:solidFill>
@@ -10119,8 +10121,8 @@
         </p:nvSpPr>
         <p:spPr>
           <a:xfrm>
-            <a:off x="7861998" y="219075"/>
-            <a:ext cx="576554" cy="133350"/>
+            <a:off x="7786064" y="220563"/>
+            <a:ext cx="640464" cy="142875"/>
           </a:xfrm>
           <a:prstGeom prst="rect">
             <a:avLst/>
@@ -10136,7 +10138,7 @@
               <a:buNone/>
             </a:pPr>
             <a:r>
-              <a:rPr lang="en-US" sz="900" b="1" dirty="0">
+              <a:rPr lang="en-US" sz="1000" b="1" dirty="0">
                 <a:solidFill>
                   <a:srgbClr val="FFFFFF"/>
                 </a:solidFill>
@@ -10146,7 +10148,7 @@
               </a:rPr>
               <a:t>GRAFANA</a:t>
             </a:r>
-            <a:endParaRPr lang="en-US" sz="900" dirty="0"/>
+            <a:endParaRPr lang="en-US" sz="1000" dirty="0"/>
           </a:p>
         </p:txBody>
       </p:sp>
@@ -10183,7 +10185,7 @@
         <p:spPr>
           <a:xfrm>
             <a:off x="482501" y="330101"/>
-            <a:ext cx="7772400" cy="142875"/>
+            <a:ext cx="8342275" cy="152400"/>
           </a:xfrm>
           <a:prstGeom prst="rect">
             <a:avLst/>
@@ -10199,7 +10201,7 @@
               <a:buNone/>
             </a:pPr>
             <a:r>
-              <a:rPr lang="en-US" sz="1000" b="1" dirty="0">
+              <a:rPr lang="en-US" sz="1100" b="1" dirty="0">
                 <a:solidFill>
                   <a:srgbClr val="59636E"/>
                 </a:solidFill>
@@ -10209,7 +10211,7 @@
               </a:rPr>
               <a:t>WHERE WE ARE HEADED</a:t>
             </a:r>
-            <a:endParaRPr lang="en-US" sz="1000" dirty="0"/>
+            <a:endParaRPr lang="en-US" sz="1100" dirty="0"/>
           </a:p>
         </p:txBody>
       </p:sp>
@@ -10221,8 +10223,8 @@
         </p:nvSpPr>
         <p:spPr>
           <a:xfrm>
-            <a:off x="482501" y="523726"/>
-            <a:ext cx="7772400" cy="393650"/>
+            <a:off x="482501" y="533251"/>
+            <a:ext cx="8342275" cy="419100"/>
           </a:xfrm>
           <a:prstGeom prst="rect">
             <a:avLst/>
@@ -10236,7 +10238,7 @@
           <a:p>
             <a:pPr algn="l" indent="0" marL="0">
               <a:lnSpc>
-                <a:spcPts val="3100"/>
+                <a:spcPts val="3300"/>
               </a:lnSpc>
               <a:spcBef>
                 <a:spcPts val="400"/>
@@ -10244,7 +10246,7 @@
               <a:buNone/>
             </a:pPr>
             <a:r>
-              <a:rPr lang="en-US" sz="2600" b="1" dirty="0">
+              <a:rPr lang="en-US" sz="2800" b="1" dirty="0">
                 <a:solidFill>
                   <a:srgbClr val="1F2328"/>
                 </a:solidFill>
@@ -10254,7 +10256,7 @@
               </a:rPr>
               <a:t>Grafana dashboards, running on Azure</a:t>
             </a:r>
-            <a:endParaRPr lang="en-US" sz="2600" dirty="0"/>
+            <a:endParaRPr lang="en-US" sz="2800" dirty="0"/>
           </a:p>
         </p:txBody>
       </p:sp>
@@ -10274,7 +10276,7 @@
         </p:blipFill>
         <p:spPr>
           <a:xfrm>
-            <a:off x="1233041" y="1231702"/>
+            <a:off x="1233041" y="1257300"/>
             <a:ext cx="6677620" cy="3555950"/>
           </a:xfrm>
           <a:prstGeom prst="rect">
@@ -10322,12 +10324,12 @@
         </p:nvSpPr>
         <p:spPr>
           <a:xfrm>
-            <a:off x="7740700" y="152400"/>
-            <a:ext cx="819150" cy="266700"/>
+            <a:off x="7652742" y="152400"/>
+            <a:ext cx="907107" cy="279350"/>
           </a:xfrm>
           <a:prstGeom prst="roundRect">
             <a:avLst>
-              <a:gd name="adj" fmla="val 23810"/>
+              <a:gd name="adj" fmla="val 22731"/>
             </a:avLst>
           </a:prstGeom>
           <a:solidFill>
@@ -10354,8 +10356,8 @@
         </p:nvSpPr>
         <p:spPr>
           <a:xfrm>
-            <a:off x="7861998" y="219075"/>
-            <a:ext cx="576554" cy="133350"/>
+            <a:off x="7786064" y="220563"/>
+            <a:ext cx="640464" cy="142875"/>
           </a:xfrm>
           <a:prstGeom prst="rect">
             <a:avLst/>
@@ -10371,7 +10373,7 @@
               <a:buNone/>
             </a:pPr>
             <a:r>
-              <a:rPr lang="en-US" sz="900" b="1" dirty="0">
+              <a:rPr lang="en-US" sz="1000" b="1" dirty="0">
                 <a:solidFill>
                   <a:srgbClr val="FFFFFF"/>
                 </a:solidFill>
@@ -10381,7 +10383,7 @@
               </a:rPr>
               <a:t>GRAFANA</a:t>
             </a:r>
-            <a:endParaRPr lang="en-US" sz="900" dirty="0"/>
+            <a:endParaRPr lang="en-US" sz="1000" dirty="0"/>
           </a:p>
         </p:txBody>
       </p:sp>
@@ -10418,7 +10420,7 @@
         <p:spPr>
           <a:xfrm>
             <a:off x="482501" y="330101"/>
-            <a:ext cx="7772400" cy="142875"/>
+            <a:ext cx="8342275" cy="152400"/>
           </a:xfrm>
           <a:prstGeom prst="rect">
             <a:avLst/>
@@ -10434,7 +10436,7 @@
               <a:buNone/>
             </a:pPr>
             <a:r>
-              <a:rPr lang="en-US" sz="1000" b="1" dirty="0">
+              <a:rPr lang="en-US" sz="1100" b="1" dirty="0">
                 <a:solidFill>
                   <a:srgbClr val="59636E"/>
                 </a:solidFill>
@@ -10444,7 +10446,7 @@
               </a:rPr>
               <a:t>HOW IT WORKS</a:t>
             </a:r>
-            <a:endParaRPr lang="en-US" sz="1000" dirty="0"/>
+            <a:endParaRPr lang="en-US" sz="1100" dirty="0"/>
           </a:p>
         </p:txBody>
       </p:sp>
@@ -10456,8 +10458,8 @@
         </p:nvSpPr>
         <p:spPr>
           <a:xfrm>
-            <a:off x="482501" y="523726"/>
-            <a:ext cx="7772400" cy="393650"/>
+            <a:off x="482501" y="533251"/>
+            <a:ext cx="8342275" cy="419100"/>
           </a:xfrm>
           <a:prstGeom prst="rect">
             <a:avLst/>
@@ -10471,7 +10473,7 @@
           <a:p>
             <a:pPr algn="l" indent="0" marL="0">
               <a:lnSpc>
-                <a:spcPts val="3100"/>
+                <a:spcPts val="3300"/>
               </a:lnSpc>
               <a:spcBef>
                 <a:spcPts val="400"/>
@@ -10479,7 +10481,7 @@
               <a:buNone/>
             </a:pPr>
             <a:r>
-              <a:rPr lang="en-US" sz="2600" b="1" dirty="0">
+              <a:rPr lang="en-US" sz="2800" b="1" dirty="0">
                 <a:solidFill>
                   <a:srgbClr val="1F2328"/>
                 </a:solidFill>
@@ -10489,7 +10491,7 @@
               </a:rPr>
               <a:t>Your prompt, the agent, and the skills</a:t>
             </a:r>
-            <a:endParaRPr lang="en-US" sz="2600" dirty="0"/>
+            <a:endParaRPr lang="en-US" sz="2800" dirty="0"/>
           </a:p>
         </p:txBody>
       </p:sp>
@@ -10509,7 +10511,7 @@
         </p:blipFill>
         <p:spPr>
           <a:xfrm>
-            <a:off x="690711" y="1282601"/>
+            <a:off x="690711" y="1308050"/>
             <a:ext cx="7762131" cy="3454301"/>
           </a:xfrm>
           <a:prstGeom prst="rect">
@@ -10557,12 +10559,12 @@
         </p:nvSpPr>
         <p:spPr>
           <a:xfrm>
-            <a:off x="7740700" y="152400"/>
-            <a:ext cx="819150" cy="266700"/>
+            <a:off x="7652742" y="152400"/>
+            <a:ext cx="907107" cy="279350"/>
           </a:xfrm>
           <a:prstGeom prst="roundRect">
             <a:avLst>
-              <a:gd name="adj" fmla="val 23810"/>
+              <a:gd name="adj" fmla="val 22731"/>
             </a:avLst>
           </a:prstGeom>
           <a:solidFill>
@@ -10589,8 +10591,8 @@
         </p:nvSpPr>
         <p:spPr>
           <a:xfrm>
-            <a:off x="7861998" y="219075"/>
-            <a:ext cx="576554" cy="133350"/>
+            <a:off x="7786064" y="220563"/>
+            <a:ext cx="640464" cy="142875"/>
           </a:xfrm>
           <a:prstGeom prst="rect">
             <a:avLst/>
@@ -10606,7 +10608,7 @@
               <a:buNone/>
             </a:pPr>
             <a:r>
-              <a:rPr lang="en-US" sz="900" b="1" dirty="0">
+              <a:rPr lang="en-US" sz="1000" b="1" dirty="0">
                 <a:solidFill>
                   <a:srgbClr val="FFFFFF"/>
                 </a:solidFill>
@@ -10616,7 +10618,7 @@
               </a:rPr>
               <a:t>GRAFANA</a:t>
             </a:r>
-            <a:endParaRPr lang="en-US" sz="900" dirty="0"/>
+            <a:endParaRPr lang="en-US" sz="1000" dirty="0"/>
           </a:p>
         </p:txBody>
       </p:sp>
@@ -10653,7 +10655,7 @@
         <p:spPr>
           <a:xfrm>
             <a:off x="482501" y="330101"/>
-            <a:ext cx="7772400" cy="142875"/>
+            <a:ext cx="8342275" cy="152400"/>
           </a:xfrm>
           <a:prstGeom prst="rect">
             <a:avLst/>
@@ -10669,7 +10671,7 @@
               <a:buNone/>
             </a:pPr>
             <a:r>
-              <a:rPr lang="en-US" sz="1000" b="1" dirty="0">
+              <a:rPr lang="en-US" sz="1100" b="1" dirty="0">
                 <a:solidFill>
                   <a:srgbClr val="59636E"/>
                 </a:solidFill>
@@ -10679,7 +10681,7 @@
               </a:rPr>
               <a:t>ARCHITECTURE</a:t>
             </a:r>
-            <a:endParaRPr lang="en-US" sz="1000" dirty="0"/>
+            <a:endParaRPr lang="en-US" sz="1100" dirty="0"/>
           </a:p>
         </p:txBody>
       </p:sp>
@@ -10691,8 +10693,8 @@
         </p:nvSpPr>
         <p:spPr>
           <a:xfrm>
-            <a:off x="482501" y="523726"/>
-            <a:ext cx="7772400" cy="393650"/>
+            <a:off x="482501" y="533251"/>
+            <a:ext cx="8342275" cy="419100"/>
           </a:xfrm>
           <a:prstGeom prst="rect">
             <a:avLst/>
@@ -10706,7 +10708,7 @@
           <a:p>
             <a:pPr algn="l" indent="0" marL="0">
               <a:lnSpc>
-                <a:spcPts val="3100"/>
+                <a:spcPts val="3300"/>
               </a:lnSpc>
               <a:spcBef>
                 <a:spcPts val="400"/>
@@ -10714,7 +10716,7 @@
               <a:buNone/>
             </a:pPr>
             <a:r>
-              <a:rPr lang="en-US" sz="2600" b="1" dirty="0">
+              <a:rPr lang="en-US" sz="2800" b="1" dirty="0">
                 <a:solidFill>
                   <a:srgbClr val="1F2328"/>
                 </a:solidFill>
@@ -10724,7 +10726,7 @@
               </a:rPr>
               <a:t>One container. No database server.</a:t>
             </a:r>
-            <a:endParaRPr lang="en-US" sz="2600" dirty="0"/>
+            <a:endParaRPr lang="en-US" sz="2800" dirty="0"/>
           </a:p>
         </p:txBody>
       </p:sp>
@@ -10736,12 +10738,12 @@
         </p:nvSpPr>
         <p:spPr>
           <a:xfrm>
-            <a:off x="1111300" y="2479625"/>
-            <a:ext cx="1396901" cy="1060252"/>
+            <a:off x="762298" y="2390775"/>
+            <a:ext cx="1524000" cy="1288852"/>
           </a:xfrm>
           <a:prstGeom prst="roundRect">
             <a:avLst>
-              <a:gd name="adj" fmla="val 9583"/>
+              <a:gd name="adj" fmla="val 7883"/>
             </a:avLst>
           </a:prstGeom>
           <a:solidFill>
@@ -10772,12 +10774,12 @@
         </p:nvSpPr>
         <p:spPr>
           <a:xfrm>
-            <a:off x="1619250" y="2603450"/>
-            <a:ext cx="381000" cy="381000"/>
+            <a:off x="1295698" y="2539901"/>
+            <a:ext cx="457200" cy="457200"/>
           </a:xfrm>
           <a:prstGeom prst="roundRect">
             <a:avLst>
-              <a:gd name="adj" fmla="val 20000"/>
+              <a:gd name="adj" fmla="val 16667"/>
             </a:avLst>
           </a:prstGeom>
           <a:solidFill>
@@ -10812,8 +10814,8 @@
         </p:blipFill>
         <p:spPr>
           <a:xfrm>
-            <a:off x="1701850" y="2686050"/>
-            <a:ext cx="215801" cy="215801"/>
+            <a:off x="1397347" y="2641550"/>
+            <a:ext cx="253901" cy="253901"/>
           </a:xfrm>
           <a:prstGeom prst="rect">
             <a:avLst/>
@@ -10828,8 +10830,8 @@
         </p:nvSpPr>
         <p:spPr>
           <a:xfrm>
-            <a:off x="1686333" y="3047851"/>
-            <a:ext cx="246834" cy="165050"/>
+            <a:off x="1371432" y="3073301"/>
+            <a:ext cx="305583" cy="203150"/>
           </a:xfrm>
           <a:prstGeom prst="rect">
             <a:avLst/>
@@ -10843,12 +10845,12 @@
           <a:p>
             <a:pPr algn="ctr" indent="0" marL="0">
               <a:lnSpc>
-                <a:spcPts val="1300"/>
+                <a:spcPts val="1600"/>
               </a:lnSpc>
               <a:buNone/>
             </a:pPr>
             <a:r>
-              <a:rPr lang="en-US" sz="1050" b="1" dirty="0">
+              <a:rPr lang="en-US" sz="1300" b="1" dirty="0">
                 <a:solidFill>
                   <a:srgbClr val="1F2328"/>
                 </a:solidFill>
@@ -10858,7 +10860,7 @@
               </a:rPr>
               <a:t>You</a:t>
             </a:r>
-            <a:endParaRPr lang="en-US" sz="1050" dirty="0"/>
+            <a:endParaRPr lang="en-US" sz="1300" dirty="0"/>
           </a:p>
         </p:txBody>
       </p:sp>
@@ -10870,8 +10872,8 @@
         </p:nvSpPr>
         <p:spPr>
           <a:xfrm>
-            <a:off x="1442686" y="3276302"/>
-            <a:ext cx="734127" cy="139750"/>
+            <a:off x="1049301" y="3352651"/>
+            <a:ext cx="949994" cy="177850"/>
           </a:xfrm>
           <a:prstGeom prst="rect">
             <a:avLst/>
@@ -10885,12 +10887,12 @@
           <a:p>
             <a:pPr algn="ctr" indent="0" marL="0">
               <a:lnSpc>
-                <a:spcPts val="1100"/>
+                <a:spcPts val="1400"/>
               </a:lnSpc>
               <a:buNone/>
             </a:pPr>
             <a:r>
-              <a:rPr lang="en-US" sz="850" dirty="0">
+              <a:rPr lang="en-US" sz="1100" dirty="0">
                 <a:solidFill>
                   <a:srgbClr val="59636E"/>
                 </a:solidFill>
@@ -10900,7 +10902,7 @@
               </a:rPr>
               <a:t>Browser or API</a:t>
             </a:r>
-            <a:endParaRPr lang="en-US" sz="850" dirty="0"/>
+            <a:endParaRPr lang="en-US" sz="1100" dirty="0"/>
           </a:p>
         </p:txBody>
       </p:sp>
@@ -10912,8 +10914,8 @@
         </p:nvSpPr>
         <p:spPr>
           <a:xfrm>
-            <a:off x="2742608" y="2843064"/>
-            <a:ext cx="318486" cy="104775"/>
+            <a:off x="2467575" y="2836664"/>
+            <a:ext cx="424598" cy="142875"/>
           </a:xfrm>
           <a:prstGeom prst="rect">
             <a:avLst/>
@@ -10929,7 +10931,7 @@
               <a:buNone/>
             </a:pPr>
             <a:r>
-              <a:rPr lang="en-US" sz="750" dirty="0">
+              <a:rPr lang="en-US" sz="1000" dirty="0">
                 <a:solidFill>
                   <a:srgbClr val="59636E"/>
                 </a:solidFill>
@@ -10939,7 +10941,7 @@
               </a:rPr>
               <a:t>HTTPS</a:t>
             </a:r>
-            <a:endParaRPr lang="en-US" sz="750" dirty="0"/>
+            <a:endParaRPr lang="en-US" sz="1000" dirty="0"/>
           </a:p>
         </p:txBody>
       </p:sp>
@@ -10951,8 +10953,8 @@
         </p:nvSpPr>
         <p:spPr>
           <a:xfrm>
-            <a:off x="2798168" y="2947839"/>
-            <a:ext cx="207365" cy="228600"/>
+            <a:off x="2563362" y="2979539"/>
+            <a:ext cx="233172" cy="254050"/>
           </a:xfrm>
           <a:prstGeom prst="rect">
             <a:avLst/>
@@ -10966,12 +10968,12 @@
           <a:p>
             <a:pPr algn="ctr" indent="0" marL="0">
               <a:lnSpc>
-                <a:spcPts val="1800"/>
+                <a:spcPts val="2000"/>
               </a:lnSpc>
               <a:buNone/>
             </a:pPr>
             <a:r>
-              <a:rPr lang="en-US" sz="1600" dirty="0">
+              <a:rPr lang="en-US" sz="1800" dirty="0">
                 <a:solidFill>
                   <a:srgbClr val="818B98"/>
                 </a:solidFill>
@@ -10981,7 +10983,7 @@
               </a:rPr>
               <a:t>→</a:t>
             </a:r>
-            <a:endParaRPr lang="en-US" sz="1600" dirty="0"/>
+            <a:endParaRPr lang="en-US" sz="1800" dirty="0"/>
           </a:p>
         </p:txBody>
       </p:sp>
@@ -10993,12 +10995,12 @@
         </p:nvSpPr>
         <p:spPr>
           <a:xfrm>
-            <a:off x="3295501" y="1965424"/>
-            <a:ext cx="4736753" cy="2088654"/>
+            <a:off x="3073598" y="1851124"/>
+            <a:ext cx="5307806" cy="2368153"/>
           </a:xfrm>
           <a:prstGeom prst="roundRect">
             <a:avLst>
-              <a:gd name="adj" fmla="val 6080"/>
+              <a:gd name="adj" fmla="val 5363"/>
             </a:avLst>
           </a:prstGeom>
           <a:solidFill>
@@ -11037,8 +11039,8 @@
         </p:blipFill>
         <p:spPr>
           <a:xfrm>
-            <a:off x="3457426" y="2127349"/>
-            <a:ext cx="139601" cy="139601"/>
+            <a:off x="3235523" y="2013049"/>
+            <a:ext cx="165050" cy="165050"/>
           </a:xfrm>
           <a:prstGeom prst="rect">
             <a:avLst/>
@@ -11053,8 +11055,8 @@
         </p:nvSpPr>
         <p:spPr>
           <a:xfrm>
-            <a:off x="3660428" y="2140000"/>
-            <a:ext cx="1467951" cy="114300"/>
+            <a:off x="3463975" y="2024062"/>
+            <a:ext cx="1726930" cy="142875"/>
           </a:xfrm>
           <a:prstGeom prst="rect">
             <a:avLst/>
@@ -11070,7 +11072,7 @@
               <a:buNone/>
             </a:pPr>
             <a:r>
-              <a:rPr lang="en-US" sz="850" b="1" dirty="0">
+              <a:rPr lang="en-US" sz="1000" b="1" dirty="0">
                 <a:solidFill>
                   <a:srgbClr val="0969DA"/>
                 </a:solidFill>
@@ -11080,7 +11082,7 @@
               </a:rPr>
               <a:t>AZURE RESOURCE GROUP</a:t>
             </a:r>
-            <a:endParaRPr lang="en-US" sz="850" dirty="0"/>
+            <a:endParaRPr lang="en-US" sz="1000" dirty="0"/>
           </a:p>
         </p:txBody>
       </p:sp>
@@ -11092,12 +11094,12 @@
         </p:nvSpPr>
         <p:spPr>
           <a:xfrm>
-            <a:off x="3457426" y="2343150"/>
-            <a:ext cx="2304901" cy="1549003"/>
+            <a:off x="3235523" y="2254300"/>
+            <a:ext cx="2596604" cy="1803053"/>
           </a:xfrm>
           <a:prstGeom prst="roundRect">
             <a:avLst>
-              <a:gd name="adj" fmla="val 8199"/>
+              <a:gd name="adj" fmla="val 7044"/>
             </a:avLst>
           </a:prstGeom>
           <a:solidFill>
@@ -11136,8 +11138,8 @@
         </p:blipFill>
         <p:spPr>
           <a:xfrm>
-            <a:off x="3593902" y="2479625"/>
-            <a:ext cx="139601" cy="139601"/>
+            <a:off x="3371999" y="2390775"/>
+            <a:ext cx="165050" cy="165050"/>
           </a:xfrm>
           <a:prstGeom prst="rect">
             <a:avLst/>
@@ -11152,8 +11154,8 @@
         </p:nvSpPr>
         <p:spPr>
           <a:xfrm>
-            <a:off x="3796903" y="2492276"/>
-            <a:ext cx="1816495" cy="114300"/>
+            <a:off x="3600450" y="2401788"/>
+            <a:ext cx="2137106" cy="142875"/>
           </a:xfrm>
           <a:prstGeom prst="rect">
             <a:avLst/>
@@ -11169,7 +11171,7 @@
               <a:buNone/>
             </a:pPr>
             <a:r>
-              <a:rPr lang="en-US" sz="850" b="1" dirty="0">
+              <a:rPr lang="en-US" sz="1000" b="1" dirty="0">
                 <a:solidFill>
                   <a:srgbClr val="0969DA"/>
                 </a:solidFill>
@@ -11179,7 +11181,7 @@
               </a:rPr>
               <a:t>CONTAINER APPS ENVIRONMENT</a:t>
             </a:r>
-            <a:endParaRPr lang="en-US" sz="850" dirty="0"/>
+            <a:endParaRPr lang="en-US" sz="1000" dirty="0"/>
           </a:p>
         </p:txBody>
       </p:sp>
@@ -11191,12 +11193,12 @@
         </p:nvSpPr>
         <p:spPr>
           <a:xfrm>
-            <a:off x="3593902" y="2695426"/>
-            <a:ext cx="2031950" cy="1060252"/>
+            <a:off x="3454301" y="2632025"/>
+            <a:ext cx="2158901" cy="1288852"/>
           </a:xfrm>
           <a:prstGeom prst="roundRect">
             <a:avLst>
-              <a:gd name="adj" fmla="val 9583"/>
+              <a:gd name="adj" fmla="val 7883"/>
             </a:avLst>
           </a:prstGeom>
           <a:solidFill>
@@ -11227,12 +11229,12 @@
         </p:nvSpPr>
         <p:spPr>
           <a:xfrm>
-            <a:off x="4419302" y="2819251"/>
-            <a:ext cx="381000" cy="381000"/>
+            <a:off x="4305151" y="2781151"/>
+            <a:ext cx="457200" cy="457200"/>
           </a:xfrm>
           <a:prstGeom prst="roundRect">
             <a:avLst>
-              <a:gd name="adj" fmla="val 20000"/>
+              <a:gd name="adj" fmla="val 16667"/>
             </a:avLst>
           </a:prstGeom>
           <a:solidFill>
@@ -11267,8 +11269,8 @@
         </p:blipFill>
         <p:spPr>
           <a:xfrm>
-            <a:off x="4501902" y="2901851"/>
-            <a:ext cx="215801" cy="215801"/>
+            <a:off x="4406801" y="2882801"/>
+            <a:ext cx="253901" cy="253901"/>
           </a:xfrm>
           <a:prstGeom prst="rect">
             <a:avLst/>
@@ -11283,8 +11285,8 @@
         </p:nvSpPr>
         <p:spPr>
           <a:xfrm>
-            <a:off x="4352796" y="3263652"/>
-            <a:ext cx="514162" cy="165050"/>
+            <a:off x="4215569" y="3314551"/>
+            <a:ext cx="636365" cy="203150"/>
           </a:xfrm>
           <a:prstGeom prst="rect">
             <a:avLst/>
@@ -11298,12 +11300,12 @@
           <a:p>
             <a:pPr algn="ctr" indent="0" marL="0">
               <a:lnSpc>
-                <a:spcPts val="1300"/>
+                <a:spcPts val="1600"/>
               </a:lnSpc>
               <a:buNone/>
             </a:pPr>
             <a:r>
-              <a:rPr lang="en-US" sz="1050" b="1" dirty="0">
+              <a:rPr lang="en-US" sz="1300" b="1" dirty="0">
                 <a:solidFill>
                   <a:srgbClr val="1F2328"/>
                 </a:solidFill>
@@ -11313,7 +11315,7 @@
               </a:rPr>
               <a:t>Grafana</a:t>
             </a:r>
-            <a:endParaRPr lang="en-US" sz="1050" dirty="0"/>
+            <a:endParaRPr lang="en-US" sz="1300" dirty="0"/>
           </a:p>
         </p:txBody>
       </p:sp>
@@ -11325,8 +11327,8 @@
         </p:nvSpPr>
         <p:spPr>
           <a:xfrm>
-            <a:off x="3936700" y="3492103"/>
-            <a:ext cx="1346204" cy="139750"/>
+            <a:off x="3662848" y="3593902"/>
+            <a:ext cx="1741807" cy="177850"/>
           </a:xfrm>
           <a:prstGeom prst="rect">
             <a:avLst/>
@@ -11340,12 +11342,12 @@
           <a:p>
             <a:pPr algn="ctr" indent="0" marL="0">
               <a:lnSpc>
-                <a:spcPts val="1100"/>
+                <a:spcPts val="1400"/>
               </a:lnSpc>
               <a:buNone/>
             </a:pPr>
             <a:r>
-              <a:rPr lang="en-US" sz="850" dirty="0">
+              <a:rPr lang="en-US" sz="1100" dirty="0">
                 <a:solidFill>
                   <a:srgbClr val="59636E"/>
                 </a:solidFill>
@@ -11355,7 +11357,7 @@
               </a:rPr>
               <a:t>SQLite inside · 0–1 replicas</a:t>
             </a:r>
-            <a:endParaRPr lang="en-US" sz="850" dirty="0"/>
+            <a:endParaRPr lang="en-US" sz="1100" dirty="0"/>
           </a:p>
         </p:txBody>
       </p:sp>
@@ -11367,8 +11369,8 @@
         </p:nvSpPr>
         <p:spPr>
           <a:xfrm>
-            <a:off x="5977868" y="2950964"/>
-            <a:ext cx="178371" cy="104775"/>
+            <a:off x="6017916" y="2957364"/>
+            <a:ext cx="237726" cy="142875"/>
           </a:xfrm>
           <a:prstGeom prst="rect">
             <a:avLst/>
@@ -11384,7 +11386,7 @@
               <a:buNone/>
             </a:pPr>
             <a:r>
-              <a:rPr lang="en-US" sz="750" dirty="0">
+              <a:rPr lang="en-US" sz="1000" dirty="0">
                 <a:solidFill>
                   <a:srgbClr val="59636E"/>
                 </a:solidFill>
@@ -11394,7 +11396,7 @@
               </a:rPr>
               <a:t>logs</a:t>
             </a:r>
-            <a:endParaRPr lang="en-US" sz="750" dirty="0"/>
+            <a:endParaRPr lang="en-US" sz="1000" dirty="0"/>
           </a:p>
         </p:txBody>
       </p:sp>
@@ -11406,8 +11408,8 @@
         </p:nvSpPr>
         <p:spPr>
           <a:xfrm>
-            <a:off x="5963296" y="3055739"/>
-            <a:ext cx="207365" cy="228600"/>
+            <a:off x="6020193" y="3100239"/>
+            <a:ext cx="233172" cy="254050"/>
           </a:xfrm>
           <a:prstGeom prst="rect">
             <a:avLst/>
@@ -11421,12 +11423,12 @@
           <a:p>
             <a:pPr algn="ctr" indent="0" marL="0">
               <a:lnSpc>
-                <a:spcPts val="1800"/>
+                <a:spcPts val="2000"/>
               </a:lnSpc>
               <a:buNone/>
             </a:pPr>
             <a:r>
-              <a:rPr lang="en-US" sz="1600" dirty="0">
+              <a:rPr lang="en-US" sz="1800" dirty="0">
                 <a:solidFill>
                   <a:srgbClr val="818B98"/>
                 </a:solidFill>
@@ -11436,7 +11438,7 @@
               </a:rPr>
               <a:t>→</a:t>
             </a:r>
-            <a:endParaRPr lang="en-US" sz="1600" dirty="0"/>
+            <a:endParaRPr lang="en-US" sz="1800" dirty="0"/>
           </a:p>
         </p:txBody>
       </p:sp>
@@ -11448,12 +11450,12 @@
         </p:nvSpPr>
         <p:spPr>
           <a:xfrm>
-            <a:off x="6371779" y="2587526"/>
-            <a:ext cx="1498550" cy="1060252"/>
+            <a:off x="6441579" y="2511326"/>
+            <a:ext cx="1777901" cy="1288852"/>
           </a:xfrm>
           <a:prstGeom prst="roundRect">
             <a:avLst>
-              <a:gd name="adj" fmla="val 9583"/>
+              <a:gd name="adj" fmla="val 7883"/>
             </a:avLst>
           </a:prstGeom>
           <a:solidFill>
@@ -11484,12 +11486,12 @@
         </p:nvSpPr>
         <p:spPr>
           <a:xfrm>
-            <a:off x="6930479" y="2711351"/>
-            <a:ext cx="381000" cy="381000"/>
+            <a:off x="7101929" y="2660452"/>
+            <a:ext cx="457200" cy="457200"/>
           </a:xfrm>
           <a:prstGeom prst="roundRect">
             <a:avLst>
-              <a:gd name="adj" fmla="val 20000"/>
+              <a:gd name="adj" fmla="val 16667"/>
             </a:avLst>
           </a:prstGeom>
           <a:solidFill>
@@ -11524,8 +11526,8 @@
         </p:blipFill>
         <p:spPr>
           <a:xfrm>
-            <a:off x="7013079" y="2793950"/>
-            <a:ext cx="215801" cy="215801"/>
+            <a:off x="7203579" y="2762101"/>
+            <a:ext cx="253901" cy="253901"/>
           </a:xfrm>
           <a:prstGeom prst="rect">
             <a:avLst/>
@@ -11540,8 +11542,8 @@
         </p:nvSpPr>
         <p:spPr>
           <a:xfrm>
-            <a:off x="6677558" y="3155752"/>
-            <a:ext cx="886843" cy="165050"/>
+            <a:off x="6781605" y="3193852"/>
+            <a:ext cx="1097700" cy="203150"/>
           </a:xfrm>
           <a:prstGeom prst="rect">
             <a:avLst/>
@@ -11555,12 +11557,12 @@
           <a:p>
             <a:pPr algn="ctr" indent="0" marL="0">
               <a:lnSpc>
-                <a:spcPts val="1300"/>
+                <a:spcPts val="1600"/>
               </a:lnSpc>
               <a:buNone/>
             </a:pPr>
             <a:r>
-              <a:rPr lang="en-US" sz="1050" b="1" dirty="0">
+              <a:rPr lang="en-US" sz="1300" b="1" dirty="0">
                 <a:solidFill>
                   <a:srgbClr val="1F2328"/>
                 </a:solidFill>
@@ -11570,7 +11572,7 @@
               </a:rPr>
               <a:t>Log Analytics</a:t>
             </a:r>
-            <a:endParaRPr lang="en-US" sz="1050" dirty="0"/>
+            <a:endParaRPr lang="en-US" sz="1300" dirty="0"/>
           </a:p>
         </p:txBody>
       </p:sp>
@@ -11582,8 +11584,8 @@
         </p:nvSpPr>
         <p:spPr>
           <a:xfrm>
-            <a:off x="6701847" y="3384203"/>
-            <a:ext cx="838265" cy="139750"/>
+            <a:off x="6788133" y="3473202"/>
+            <a:ext cx="1084644" cy="177850"/>
           </a:xfrm>
           <a:prstGeom prst="rect">
             <a:avLst/>
@@ -11597,12 +11599,12 @@
           <a:p>
             <a:pPr algn="ctr" indent="0" marL="0">
               <a:lnSpc>
-                <a:spcPts val="1100"/>
+                <a:spcPts val="1400"/>
               </a:lnSpc>
               <a:buNone/>
             </a:pPr>
             <a:r>
-              <a:rPr lang="en-US" sz="850" dirty="0">
+              <a:rPr lang="en-US" sz="1100" dirty="0">
                 <a:solidFill>
                   <a:srgbClr val="59636E"/>
                 </a:solidFill>
@@ -11612,7 +11614,7 @@
               </a:rPr>
               <a:t>Logs and metrics</a:t>
             </a:r>
-            <a:endParaRPr lang="en-US" sz="850" dirty="0"/>
+            <a:endParaRPr lang="en-US" sz="1100" dirty="0"/>
           </a:p>
         </p:txBody>
       </p:sp>
@@ -11656,12 +11658,12 @@
         </p:nvSpPr>
         <p:spPr>
           <a:xfrm>
-            <a:off x="7740700" y="152400"/>
-            <a:ext cx="819150" cy="266700"/>
+            <a:off x="7652742" y="152400"/>
+            <a:ext cx="907107" cy="279350"/>
           </a:xfrm>
           <a:prstGeom prst="roundRect">
             <a:avLst>
-              <a:gd name="adj" fmla="val 23810"/>
+              <a:gd name="adj" fmla="val 22731"/>
             </a:avLst>
           </a:prstGeom>
           <a:solidFill>
@@ -11688,8 +11690,8 @@
         </p:nvSpPr>
         <p:spPr>
           <a:xfrm>
-            <a:off x="7861998" y="219075"/>
-            <a:ext cx="576554" cy="133350"/>
+            <a:off x="7786064" y="220563"/>
+            <a:ext cx="640464" cy="142875"/>
           </a:xfrm>
           <a:prstGeom prst="rect">
             <a:avLst/>
@@ -11705,7 +11707,7 @@
               <a:buNone/>
             </a:pPr>
             <a:r>
-              <a:rPr lang="en-US" sz="900" b="1" dirty="0">
+              <a:rPr lang="en-US" sz="1000" b="1" dirty="0">
                 <a:solidFill>
                   <a:srgbClr val="FFFFFF"/>
                 </a:solidFill>
@@ -11715,7 +11717,7 @@
               </a:rPr>
               <a:t>GRAFANA</a:t>
             </a:r>
-            <a:endParaRPr lang="en-US" sz="900" dirty="0"/>
+            <a:endParaRPr lang="en-US" sz="1000" dirty="0"/>
           </a:p>
         </p:txBody>
       </p:sp>
@@ -11824,7 +11826,7 @@
         <p:spPr>
           <a:xfrm>
             <a:off x="558701" y="1828651"/>
-            <a:ext cx="3886200" cy="142875"/>
+            <a:ext cx="3886200" cy="152400"/>
           </a:xfrm>
           <a:prstGeom prst="rect">
             <a:avLst/>
@@ -11843,7 +11845,7 @@
               <a:buNone/>
             </a:pPr>
             <a:r>
-              <a:rPr lang="en-US" sz="1000" b="1" dirty="0">
+              <a:rPr lang="en-US" sz="1100" b="1" dirty="0">
                 <a:solidFill>
                   <a:srgbClr val="59636E"/>
                 </a:solidFill>
@@ -11853,7 +11855,7 @@
               </a:rPr>
               <a:t>SECTION 1 OF 3</a:t>
             </a:r>
-            <a:endParaRPr lang="en-US" sz="1000" dirty="0"/>
+            <a:endParaRPr lang="en-US" sz="1100" dirty="0"/>
           </a:p>
         </p:txBody>
       </p:sp>
@@ -11865,8 +11867,8 @@
         </p:nvSpPr>
         <p:spPr>
           <a:xfrm>
-            <a:off x="558701" y="2034927"/>
-            <a:ext cx="3886200" cy="444550"/>
+            <a:off x="558701" y="2044452"/>
+            <a:ext cx="3886200" cy="469850"/>
           </a:xfrm>
           <a:prstGeom prst="rect">
             <a:avLst/>
@@ -11880,7 +11882,7 @@
           <a:p>
             <a:pPr algn="l" indent="0" marL="0">
               <a:lnSpc>
-                <a:spcPts val="3500"/>
+                <a:spcPts val="3700"/>
               </a:lnSpc>
               <a:spcBef>
                 <a:spcPts val="500"/>
@@ -11888,7 +11890,7 @@
               <a:buNone/>
             </a:pPr>
             <a:r>
-              <a:rPr lang="en-US" sz="3000" b="1" dirty="0">
+              <a:rPr lang="en-US" sz="3200" b="1" dirty="0">
                 <a:solidFill>
                   <a:srgbClr val="1F2328"/>
                 </a:solidFill>
@@ -11898,7 +11900,7 @@
               </a:rPr>
               <a:t>Plan and preview</a:t>
             </a:r>
-            <a:endParaRPr lang="en-US" sz="3000" dirty="0"/>
+            <a:endParaRPr lang="en-US" sz="3200" dirty="0"/>
           </a:p>
         </p:txBody>
       </p:sp>
@@ -11910,8 +11912,8 @@
         </p:nvSpPr>
         <p:spPr>
           <a:xfrm>
-            <a:off x="558701" y="2606427"/>
-            <a:ext cx="3886200" cy="723751"/>
+            <a:off x="558701" y="2666702"/>
+            <a:ext cx="3886200" cy="800100"/>
           </a:xfrm>
           <a:prstGeom prst="rect">
             <a:avLst/>
@@ -11925,15 +11927,15 @@
           <a:p>
             <a:pPr algn="l" indent="0" marL="0">
               <a:lnSpc>
-                <a:spcPts val="1900"/>
+                <a:spcPts val="2100"/>
               </a:lnSpc>
               <a:spcBef>
-                <a:spcPts val="1000"/>
+                <a:spcPts val="1200"/>
               </a:spcBef>
               <a:buNone/>
             </a:pPr>
             <a:r>
-              <a:rPr lang="en-US" sz="1400" dirty="0">
+              <a:rPr lang="en-US" sz="1600" dirty="0">
                 <a:solidFill>
                   <a:srgbClr val="59636E"/>
                 </a:solidFill>
@@ -11943,7 +11945,7 @@
               </a:rPr>
               <a:t>Describe what you want, see the cost, and preview the deployment before anything is created.</a:t>
             </a:r>
-            <a:endParaRPr lang="en-US" sz="1400" dirty="0"/>
+            <a:endParaRPr lang="en-US" sz="1600" dirty="0"/>
           </a:p>
         </p:txBody>
       </p:sp>
@@ -12012,11 +12014,11 @@
         <p:spPr>
           <a:xfrm>
             <a:off x="558701" y="4368701"/>
-            <a:ext cx="1422797" cy="336352"/>
+            <a:ext cx="1564184" cy="361652"/>
           </a:xfrm>
           <a:prstGeom prst="roundRect">
             <a:avLst>
-              <a:gd name="adj" fmla="val 52861"/>
+              <a:gd name="adj" fmla="val 52675"/>
             </a:avLst>
           </a:prstGeom>
           <a:solidFill>
@@ -12048,11 +12050,11 @@
         <p:spPr>
           <a:xfrm>
             <a:off x="644426" y="4441627"/>
-            <a:ext cx="190500" cy="190500"/>
+            <a:ext cx="215801" cy="215801"/>
           </a:xfrm>
           <a:prstGeom prst="roundRect">
             <a:avLst>
-              <a:gd name="adj" fmla="val 480000"/>
+              <a:gd name="adj" fmla="val 423724"/>
             </a:avLst>
           </a:prstGeom>
           <a:solidFill>
@@ -12079,8 +12081,8 @@
         </p:nvSpPr>
         <p:spPr>
           <a:xfrm>
-            <a:off x="710833" y="4479727"/>
-            <a:ext cx="57686" cy="114300"/>
+            <a:off x="719840" y="4482852"/>
+            <a:ext cx="64972" cy="133350"/>
           </a:xfrm>
           <a:prstGeom prst="rect">
             <a:avLst/>
@@ -12096,7 +12098,7 @@
               <a:buNone/>
             </a:pPr>
             <a:r>
-              <a:rPr lang="en-US" sz="800" b="1" dirty="0">
+              <a:rPr lang="en-US" sz="900" b="1" dirty="0">
                 <a:solidFill>
                   <a:srgbClr val="0969DA"/>
                 </a:solidFill>
@@ -12106,7 +12108,7 @@
               </a:rPr>
               <a:t>1</a:t>
             </a:r>
-            <a:endParaRPr lang="en-US" sz="800" dirty="0"/>
+            <a:endParaRPr lang="en-US" sz="900" dirty="0"/>
           </a:p>
         </p:txBody>
       </p:sp>
@@ -12118,8 +12120,8 @@
         </p:nvSpPr>
         <p:spPr>
           <a:xfrm>
-            <a:off x="911126" y="4470202"/>
-            <a:ext cx="952574" cy="133350"/>
+            <a:off x="936427" y="4478089"/>
+            <a:ext cx="1058079" cy="142875"/>
           </a:xfrm>
           <a:prstGeom prst="rect">
             <a:avLst/>
@@ -12135,7 +12137,7 @@
               <a:buNone/>
             </a:pPr>
             <a:r>
-              <a:rPr lang="en-US" sz="900" b="1" dirty="0">
+              <a:rPr lang="en-US" sz="1000" b="1" dirty="0">
                 <a:solidFill>
                   <a:srgbClr val="FFFFFF"/>
                 </a:solidFill>
@@ -12145,7 +12147,7 @@
               </a:rPr>
               <a:t>Plan and preview</a:t>
             </a:r>
-            <a:endParaRPr lang="en-US" sz="900" dirty="0"/>
+            <a:endParaRPr lang="en-US" sz="1000" dirty="0"/>
           </a:p>
         </p:txBody>
       </p:sp>
@@ -12157,12 +12159,12 @@
         </p:nvSpPr>
         <p:spPr>
           <a:xfrm>
-            <a:off x="2082998" y="4368701"/>
-            <a:ext cx="1441698" cy="336352"/>
+            <a:off x="2224385" y="4368701"/>
+            <a:ext cx="1585317" cy="361652"/>
           </a:xfrm>
           <a:prstGeom prst="roundRect">
             <a:avLst>
-              <a:gd name="adj" fmla="val 52861"/>
+              <a:gd name="adj" fmla="val 52675"/>
             </a:avLst>
           </a:prstGeom>
           <a:solidFill>
@@ -12193,12 +12195,12 @@
         </p:nvSpPr>
         <p:spPr>
           <a:xfrm>
-            <a:off x="2168723" y="4441627"/>
-            <a:ext cx="190500" cy="190500"/>
+            <a:off x="2310110" y="4441627"/>
+            <a:ext cx="215801" cy="215801"/>
           </a:xfrm>
           <a:prstGeom prst="roundRect">
             <a:avLst>
-              <a:gd name="adj" fmla="val 480000"/>
+              <a:gd name="adj" fmla="val 423724"/>
             </a:avLst>
           </a:prstGeom>
           <a:solidFill>
@@ -12225,8 +12227,8 @@
         </p:nvSpPr>
         <p:spPr>
           <a:xfrm>
-            <a:off x="2235131" y="4479727"/>
-            <a:ext cx="57686" cy="114300"/>
+            <a:off x="2385524" y="4482852"/>
+            <a:ext cx="64972" cy="133350"/>
           </a:xfrm>
           <a:prstGeom prst="rect">
             <a:avLst/>
@@ -12242,7 +12244,7 @@
               <a:buNone/>
             </a:pPr>
             <a:r>
-              <a:rPr lang="en-US" sz="800" b="1" dirty="0">
+              <a:rPr lang="en-US" sz="900" b="1" dirty="0">
                 <a:solidFill>
                   <a:srgbClr val="818B98"/>
                 </a:solidFill>
@@ -12252,7 +12254,7 @@
               </a:rPr>
               <a:t>2</a:t>
             </a:r>
-            <a:endParaRPr lang="en-US" sz="800" dirty="0"/>
+            <a:endParaRPr lang="en-US" sz="900" dirty="0"/>
           </a:p>
         </p:txBody>
       </p:sp>
@@ -12264,8 +12266,8 @@
         </p:nvSpPr>
         <p:spPr>
           <a:xfrm>
-            <a:off x="2435423" y="4470202"/>
-            <a:ext cx="971854" cy="133350"/>
+            <a:off x="2602111" y="4478089"/>
+            <a:ext cx="1079635" cy="142875"/>
           </a:xfrm>
           <a:prstGeom prst="rect">
             <a:avLst/>
@@ -12281,7 +12283,7 @@
               <a:buNone/>
             </a:pPr>
             <a:r>
-              <a:rPr lang="en-US" sz="900" b="1" dirty="0">
+              <a:rPr lang="en-US" sz="1000" b="1" dirty="0">
                 <a:solidFill>
                   <a:srgbClr val="818B98"/>
                 </a:solidFill>
@@ -12291,7 +12293,7 @@
               </a:rPr>
               <a:t>Deploy and verify</a:t>
             </a:r>
-            <a:endParaRPr lang="en-US" sz="900" dirty="0"/>
+            <a:endParaRPr lang="en-US" sz="1000" dirty="0"/>
           </a:p>
         </p:txBody>
       </p:sp>
@@ -12303,12 +12305,12 @@
         </p:nvSpPr>
         <p:spPr>
           <a:xfrm>
-            <a:off x="3626197" y="4368701"/>
-            <a:ext cx="1460897" cy="336352"/>
+            <a:off x="3911203" y="4368701"/>
+            <a:ext cx="1606600" cy="361652"/>
           </a:xfrm>
           <a:prstGeom prst="roundRect">
             <a:avLst>
-              <a:gd name="adj" fmla="val 52861"/>
+              <a:gd name="adj" fmla="val 52675"/>
             </a:avLst>
           </a:prstGeom>
           <a:solidFill>
@@ -12339,12 +12341,12 @@
         </p:nvSpPr>
         <p:spPr>
           <a:xfrm>
-            <a:off x="3711922" y="4441627"/>
-            <a:ext cx="190500" cy="190500"/>
+            <a:off x="3996928" y="4441627"/>
+            <a:ext cx="215801" cy="215801"/>
           </a:xfrm>
           <a:prstGeom prst="roundRect">
             <a:avLst>
-              <a:gd name="adj" fmla="val 480000"/>
+              <a:gd name="adj" fmla="val 423724"/>
             </a:avLst>
           </a:prstGeom>
           <a:solidFill>
@@ -12371,8 +12373,8 @@
         </p:nvSpPr>
         <p:spPr>
           <a:xfrm>
-            <a:off x="3778329" y="4479727"/>
-            <a:ext cx="57686" cy="114300"/>
+            <a:off x="4072342" y="4482852"/>
+            <a:ext cx="64972" cy="133350"/>
           </a:xfrm>
           <a:prstGeom prst="rect">
             <a:avLst/>
@@ -12388,7 +12390,7 @@
               <a:buNone/>
             </a:pPr>
             <a:r>
-              <a:rPr lang="en-US" sz="800" b="1" dirty="0">
+              <a:rPr lang="en-US" sz="900" b="1" dirty="0">
                 <a:solidFill>
                   <a:srgbClr val="818B98"/>
                 </a:solidFill>
@@ -12398,7 +12400,7 @@
               </a:rPr>
               <a:t>3</a:t>
             </a:r>
-            <a:endParaRPr lang="en-US" sz="800" dirty="0"/>
+            <a:endParaRPr lang="en-US" sz="900" dirty="0"/>
           </a:p>
         </p:txBody>
       </p:sp>
@@ -12410,8 +12412,8 @@
         </p:nvSpPr>
         <p:spPr>
           <a:xfrm>
-            <a:off x="3978622" y="4470202"/>
-            <a:ext cx="991436" cy="133350"/>
+            <a:off x="4288929" y="4478089"/>
+            <a:ext cx="1101343" cy="142875"/>
           </a:xfrm>
           <a:prstGeom prst="rect">
             <a:avLst/>
@@ -12427,7 +12429,7 @@
               <a:buNone/>
             </a:pPr>
             <a:r>
-              <a:rPr lang="en-US" sz="900" b="1" dirty="0">
+              <a:rPr lang="en-US" sz="1000" b="1" dirty="0">
                 <a:solidFill>
                   <a:srgbClr val="818B98"/>
                 </a:solidFill>
@@ -12437,7 +12439,7 @@
               </a:rPr>
               <a:t>Operate and learn</a:t>
             </a:r>
-            <a:endParaRPr lang="en-US" sz="900" dirty="0"/>
+            <a:endParaRPr lang="en-US" sz="1000" dirty="0"/>
           </a:p>
         </p:txBody>
       </p:sp>
@@ -12481,12 +12483,12 @@
         </p:nvSpPr>
         <p:spPr>
           <a:xfrm>
-            <a:off x="7740700" y="152400"/>
-            <a:ext cx="819150" cy="266700"/>
+            <a:off x="7652742" y="152400"/>
+            <a:ext cx="907107" cy="279350"/>
           </a:xfrm>
           <a:prstGeom prst="roundRect">
             <a:avLst>
-              <a:gd name="adj" fmla="val 23810"/>
+              <a:gd name="adj" fmla="val 22731"/>
             </a:avLst>
           </a:prstGeom>
           <a:solidFill>
@@ -12513,8 +12515,8 @@
         </p:nvSpPr>
         <p:spPr>
           <a:xfrm>
-            <a:off x="7861998" y="219075"/>
-            <a:ext cx="576554" cy="133350"/>
+            <a:off x="7786064" y="220563"/>
+            <a:ext cx="640464" cy="142875"/>
           </a:xfrm>
           <a:prstGeom prst="rect">
             <a:avLst/>
@@ -12530,7 +12532,7 @@
               <a:buNone/>
             </a:pPr>
             <a:r>
-              <a:rPr lang="en-US" sz="900" b="1" dirty="0">
+              <a:rPr lang="en-US" sz="1000" b="1" dirty="0">
                 <a:solidFill>
                   <a:srgbClr val="FFFFFF"/>
                 </a:solidFill>
@@ -12540,7 +12542,7 @@
               </a:rPr>
               <a:t>GRAFANA</a:t>
             </a:r>
-            <a:endParaRPr lang="en-US" sz="900" dirty="0"/>
+            <a:endParaRPr lang="en-US" sz="1000" dirty="0"/>
           </a:p>
         </p:txBody>
       </p:sp>
@@ -12577,7 +12579,7 @@
         <p:spPr>
           <a:xfrm>
             <a:off x="482501" y="330101"/>
-            <a:ext cx="7772400" cy="142875"/>
+            <a:ext cx="8342275" cy="152400"/>
           </a:xfrm>
           <a:prstGeom prst="rect">
             <a:avLst/>
@@ -12593,7 +12595,7 @@
               <a:buNone/>
             </a:pPr>
             <a:r>
-              <a:rPr lang="en-US" sz="1000" b="1" dirty="0">
+              <a:rPr lang="en-US" sz="1100" b="1" dirty="0">
                 <a:solidFill>
                   <a:srgbClr val="0969DA"/>
                 </a:solidFill>
@@ -12603,7 +12605,7 @@
               </a:rPr>
               <a:t>GET STARTED</a:t>
             </a:r>
-            <a:endParaRPr lang="en-US" sz="1000" dirty="0"/>
+            <a:endParaRPr lang="en-US" sz="1100" dirty="0"/>
           </a:p>
         </p:txBody>
       </p:sp>
@@ -12615,8 +12617,8 @@
         </p:nvSpPr>
         <p:spPr>
           <a:xfrm>
-            <a:off x="482501" y="523726"/>
-            <a:ext cx="7772400" cy="393650"/>
+            <a:off x="482501" y="533251"/>
+            <a:ext cx="8342275" cy="419100"/>
           </a:xfrm>
           <a:prstGeom prst="rect">
             <a:avLst/>
@@ -12630,7 +12632,7 @@
           <a:p>
             <a:pPr algn="l" indent="0" marL="0">
               <a:lnSpc>
-                <a:spcPts val="3100"/>
+                <a:spcPts val="3300"/>
               </a:lnSpc>
               <a:spcBef>
                 <a:spcPts val="400"/>
@@ -12638,7 +12640,7 @@
               <a:buNone/>
             </a:pPr>
             <a:r>
-              <a:rPr lang="en-US" sz="2600" b="1" dirty="0">
+              <a:rPr lang="en-US" sz="2800" b="1" dirty="0">
                 <a:solidFill>
                   <a:srgbClr val="1F2328"/>
                 </a:solidFill>
@@ -12648,7 +12650,7 @@
               </a:rPr>
               <a:t>Load the Azure skills and the deploy agent</a:t>
             </a:r>
-            <a:endParaRPr lang="en-US" sz="2600" dirty="0"/>
+            <a:endParaRPr lang="en-US" sz="2800" dirty="0"/>
           </a:p>
         </p:txBody>
       </p:sp>
@@ -12660,7 +12662,7 @@
         </p:nvSpPr>
         <p:spPr>
           <a:xfrm>
-            <a:off x="1269802" y="1847701"/>
+            <a:off x="1269802" y="1835200"/>
             <a:ext cx="6603950" cy="1879402"/>
           </a:xfrm>
           <a:prstGeom prst="roundRect">
@@ -12699,7 +12701,7 @@
         </p:nvSpPr>
         <p:spPr>
           <a:xfrm>
-            <a:off x="1269802" y="1847701"/>
+            <a:off x="1269802" y="1835200"/>
             <a:ext cx="6603950" cy="253901"/>
           </a:xfrm>
           <a:prstGeom prst="roundRect">
@@ -12731,7 +12733,7 @@
         </p:nvSpPr>
         <p:spPr>
           <a:xfrm>
-            <a:off x="1396752" y="1930152"/>
+            <a:off x="1396752" y="1917650"/>
             <a:ext cx="88850" cy="88850"/>
           </a:xfrm>
           <a:prstGeom prst="roundRect">
@@ -12763,7 +12765,7 @@
         </p:nvSpPr>
         <p:spPr>
           <a:xfrm>
-            <a:off x="1549003" y="1930152"/>
+            <a:off x="1549003" y="1917650"/>
             <a:ext cx="88850" cy="88850"/>
           </a:xfrm>
           <a:prstGeom prst="roundRect">
@@ -12795,7 +12797,7 @@
         </p:nvSpPr>
         <p:spPr>
           <a:xfrm>
-            <a:off x="1701254" y="1930152"/>
+            <a:off x="1701254" y="1917650"/>
             <a:ext cx="88850" cy="88850"/>
           </a:xfrm>
           <a:prstGeom prst="roundRect">
@@ -12827,8 +12829,8 @@
         </p:nvSpPr>
         <p:spPr>
           <a:xfrm>
-            <a:off x="1955006" y="1917502"/>
-            <a:ext cx="462397" cy="114300"/>
+            <a:off x="1955006" y="1890713"/>
+            <a:ext cx="544068" cy="142875"/>
           </a:xfrm>
           <a:prstGeom prst="rect">
             <a:avLst/>
@@ -12844,7 +12846,7 @@
               <a:buNone/>
             </a:pPr>
             <a:r>
-              <a:rPr lang="en-US" sz="850" dirty="0">
+              <a:rPr lang="en-US" sz="1000" dirty="0">
                 <a:solidFill>
                   <a:srgbClr val="8B949E"/>
                 </a:solidFill>
@@ -12854,7 +12856,7 @@
               </a:rPr>
               <a:t>copilot</a:t>
             </a:r>
-            <a:endParaRPr lang="en-US" sz="850" dirty="0"/>
+            <a:endParaRPr lang="en-US" sz="1000" dirty="0"/>
           </a:p>
         </p:txBody>
       </p:sp>
@@ -12866,7 +12868,7 @@
         </p:nvSpPr>
         <p:spPr>
           <a:xfrm>
-            <a:off x="1498402" y="2279303"/>
+            <a:off x="1498402" y="2266801"/>
             <a:ext cx="6269685" cy="275630"/>
           </a:xfrm>
           <a:prstGeom prst="rect">
@@ -12925,7 +12927,7 @@
         </p:nvSpPr>
         <p:spPr>
           <a:xfrm>
-            <a:off x="1498402" y="2554932"/>
+            <a:off x="1498402" y="2542431"/>
             <a:ext cx="6269685" cy="275630"/>
           </a:xfrm>
           <a:prstGeom prst="rect">
@@ -12984,7 +12986,7 @@
         </p:nvSpPr>
         <p:spPr>
           <a:xfrm>
-            <a:off x="1498402" y="2972693"/>
+            <a:off x="1498402" y="2960191"/>
             <a:ext cx="6269685" cy="275630"/>
           </a:xfrm>
           <a:prstGeom prst="rect">
@@ -13043,7 +13045,7 @@
         </p:nvSpPr>
         <p:spPr>
           <a:xfrm>
-            <a:off x="1498402" y="3248323"/>
+            <a:off x="1498402" y="3235821"/>
             <a:ext cx="6269685" cy="275630"/>
           </a:xfrm>
           <a:prstGeom prst="rect">
@@ -13093,8 +13095,8 @@
         </p:blipFill>
         <p:spPr>
           <a:xfrm>
-            <a:off x="1269802" y="3968353"/>
-            <a:ext cx="190500" cy="190500"/>
+            <a:off x="1269802" y="4006602"/>
+            <a:ext cx="215801" cy="215801"/>
           </a:xfrm>
           <a:prstGeom prst="rect">
             <a:avLst/>
@@ -13109,8 +13111,8 @@
         </p:nvSpPr>
         <p:spPr>
           <a:xfrm>
-            <a:off x="1561802" y="3955703"/>
-            <a:ext cx="5011225" cy="215950"/>
+            <a:off x="1587103" y="3993952"/>
+            <a:ext cx="5612827" cy="241250"/>
           </a:xfrm>
           <a:prstGeom prst="rect">
             <a:avLst/>
@@ -13124,12 +13126,12 @@
           <a:p>
             <a:pPr algn="l" indent="0" marL="0">
               <a:lnSpc>
-                <a:spcPts val="1700"/>
+                <a:spcPts val="1900"/>
               </a:lnSpc>
               <a:buNone/>
             </a:pPr>
             <a:r>
-              <a:rPr lang="en-US" sz="1250" dirty="0">
+              <a:rPr lang="en-US" sz="1400" dirty="0">
                 <a:solidFill>
                   <a:srgbClr val="1F2328"/>
                 </a:solidFill>
@@ -13139,7 +13141,7 @@
               </a:rPr>
               <a:t>The agent brings the workflow. Skills bring the app-specific know-how.</a:t>
             </a:r>
-            <a:endParaRPr lang="en-US" sz="1250" dirty="0"/>
+            <a:endParaRPr lang="en-US" sz="1400" dirty="0"/>
           </a:p>
         </p:txBody>
       </p:sp>
@@ -13183,12 +13185,12 @@
         </p:nvSpPr>
         <p:spPr>
           <a:xfrm>
-            <a:off x="7740700" y="152400"/>
-            <a:ext cx="819150" cy="266700"/>
+            <a:off x="7652742" y="152400"/>
+            <a:ext cx="907107" cy="279350"/>
           </a:xfrm>
           <a:prstGeom prst="roundRect">
             <a:avLst>
-              <a:gd name="adj" fmla="val 23810"/>
+              <a:gd name="adj" fmla="val 22731"/>
             </a:avLst>
           </a:prstGeom>
           <a:solidFill>
@@ -13215,8 +13217,8 @@
         </p:nvSpPr>
         <p:spPr>
           <a:xfrm>
-            <a:off x="7861998" y="219075"/>
-            <a:ext cx="576554" cy="133350"/>
+            <a:off x="7786064" y="220563"/>
+            <a:ext cx="640464" cy="142875"/>
           </a:xfrm>
           <a:prstGeom prst="rect">
             <a:avLst/>
@@ -13232,7 +13234,7 @@
               <a:buNone/>
             </a:pPr>
             <a:r>
-              <a:rPr lang="en-US" sz="900" b="1" dirty="0">
+              <a:rPr lang="en-US" sz="1000" b="1" dirty="0">
                 <a:solidFill>
                   <a:srgbClr val="FFFFFF"/>
                 </a:solidFill>
@@ -13242,7 +13244,7 @@
               </a:rPr>
               <a:t>GRAFANA</a:t>
             </a:r>
-            <a:endParaRPr lang="en-US" sz="900" dirty="0"/>
+            <a:endParaRPr lang="en-US" sz="1000" dirty="0"/>
           </a:p>
         </p:txBody>
       </p:sp>
@@ -13279,7 +13281,7 @@
         <p:spPr>
           <a:xfrm>
             <a:off x="482501" y="330101"/>
-            <a:ext cx="7772400" cy="142875"/>
+            <a:ext cx="8342275" cy="152400"/>
           </a:xfrm>
           <a:prstGeom prst="rect">
             <a:avLst/>
@@ -13295,7 +13297,7 @@
               <a:buNone/>
             </a:pPr>
             <a:r>
-              <a:rPr lang="en-US" sz="1000" b="1" dirty="0">
+              <a:rPr lang="en-US" sz="1100" b="1" dirty="0">
                 <a:solidFill>
                   <a:srgbClr val="0969DA"/>
                 </a:solidFill>
@@ -13305,7 +13307,7 @@
               </a:rPr>
               <a:t>PLAN AND COST FIRST</a:t>
             </a:r>
-            <a:endParaRPr lang="en-US" sz="1000" dirty="0"/>
+            <a:endParaRPr lang="en-US" sz="1100" dirty="0"/>
           </a:p>
         </p:txBody>
       </p:sp>
@@ -13317,8 +13319,8 @@
         </p:nvSpPr>
         <p:spPr>
           <a:xfrm>
-            <a:off x="482501" y="523726"/>
-            <a:ext cx="7772400" cy="393650"/>
+            <a:off x="482501" y="533251"/>
+            <a:ext cx="8342275" cy="419100"/>
           </a:xfrm>
           <a:prstGeom prst="rect">
             <a:avLst/>
@@ -13332,7 +13334,7 @@
           <a:p>
             <a:pPr algn="l" indent="0" marL="0">
               <a:lnSpc>
-                <a:spcPts val="3100"/>
+                <a:spcPts val="3300"/>
               </a:lnSpc>
               <a:spcBef>
                 <a:spcPts val="400"/>
@@ -13340,7 +13342,7 @@
               <a:buNone/>
             </a:pPr>
             <a:r>
-              <a:rPr lang="en-US" sz="2600" b="1" dirty="0">
+              <a:rPr lang="en-US" sz="2800" b="1" dirty="0">
                 <a:solidFill>
                   <a:srgbClr val="1F2328"/>
                 </a:solidFill>
@@ -13350,7 +13352,7 @@
               </a:rPr>
               <a:t>Describe it. Ask what it costs.</a:t>
             </a:r>
-            <a:endParaRPr lang="en-US" sz="2600" dirty="0"/>
+            <a:endParaRPr lang="en-US" sz="2800" dirty="0"/>
           </a:p>
         </p:txBody>
       </p:sp>
@@ -13362,12 +13364,12 @@
         </p:nvSpPr>
         <p:spPr>
           <a:xfrm>
-            <a:off x="634901" y="1993850"/>
-            <a:ext cx="7873901" cy="2082850"/>
+            <a:off x="634901" y="1846064"/>
+            <a:ext cx="7873901" cy="2429173"/>
           </a:xfrm>
           <a:prstGeom prst="roundRect">
             <a:avLst>
-              <a:gd name="adj" fmla="val 4878"/>
+              <a:gd name="adj" fmla="val 4183"/>
             </a:avLst>
           </a:prstGeom>
           <a:solidFill>
@@ -13401,7 +13403,7 @@
         </p:nvSpPr>
         <p:spPr>
           <a:xfrm>
-            <a:off x="634901" y="1998613"/>
+            <a:off x="634901" y="1850827"/>
             <a:ext cx="7873901" cy="0"/>
           </a:xfrm>
           <a:prstGeom prst="line">
@@ -13424,8 +13426,8 @@
         </p:nvSpPr>
         <p:spPr>
           <a:xfrm>
-            <a:off x="8504039" y="1993850"/>
-            <a:ext cx="0" cy="2082850"/>
+            <a:off x="8504039" y="1846064"/>
+            <a:ext cx="0" cy="2429173"/>
           </a:xfrm>
           <a:prstGeom prst="line">
             <a:avLst/>
@@ -13447,7 +13449,7 @@
         </p:nvSpPr>
         <p:spPr>
           <a:xfrm>
-            <a:off x="634901" y="4071938"/>
+            <a:off x="634901" y="4270474"/>
             <a:ext cx="7873901" cy="0"/>
           </a:xfrm>
           <a:prstGeom prst="line">
@@ -13470,8 +13472,8 @@
         </p:nvSpPr>
         <p:spPr>
           <a:xfrm>
-            <a:off x="663476" y="1993850"/>
-            <a:ext cx="0" cy="2082850"/>
+            <a:off x="663476" y="1846064"/>
+            <a:ext cx="0" cy="2429173"/>
           </a:xfrm>
           <a:prstGeom prst="line">
             <a:avLst/>
@@ -13501,8 +13503,8 @@
         </p:blipFill>
         <p:spPr>
           <a:xfrm>
-            <a:off x="945952" y="2206526"/>
-            <a:ext cx="165050" cy="165050"/>
+            <a:off x="971401" y="2084189"/>
+            <a:ext cx="190500" cy="190500"/>
           </a:xfrm>
           <a:prstGeom prst="rect">
             <a:avLst/>
@@ -13517,8 +13519,8 @@
         </p:nvSpPr>
         <p:spPr>
           <a:xfrm>
-            <a:off x="1187202" y="2222302"/>
-            <a:ext cx="498830" cy="133350"/>
+            <a:off x="1238101" y="2103239"/>
+            <a:ext cx="1423169" cy="152400"/>
           </a:xfrm>
           <a:prstGeom prst="rect">
             <a:avLst/>
@@ -13534,7 +13536,7 @@
               <a:buNone/>
             </a:pPr>
             <a:r>
-              <a:rPr lang="en-US" sz="900" b="1" dirty="0">
+              <a:rPr lang="en-US" sz="1050" dirty="0">
                 <a:solidFill>
                   <a:srgbClr val="8250DF"/>
                 </a:solidFill>
@@ -13544,7 +13546,21 @@
               </a:rPr>
               <a:t>PROMPT</a:t>
             </a:r>
-            <a:endParaRPr lang="en-US" sz="900" dirty="0"/>
+            <a:pPr algn="l" indent="0" marL="0">
+              <a:buNone/>
+            </a:pPr>
+            <a:r>
+              <a:rPr lang="en-US" sz="1050" b="1" dirty="0">
+                <a:solidFill>
+                  <a:srgbClr val="818B98"/>
+                </a:solidFill>
+                <a:latin typeface="Arial" pitchFamily="34" charset="0"/>
+                <a:ea typeface="Arial" pitchFamily="34" charset="-122"/>
+                <a:cs typeface="Arial" pitchFamily="34" charset="-120"/>
+              </a:rPr>
+              <a:t> · ABRIDGED</a:t>
+            </a:r>
+            <a:endParaRPr lang="en-US" sz="1050" dirty="0"/>
           </a:p>
         </p:txBody>
       </p:sp>
@@ -13556,8 +13572,8 @@
         </p:nvSpPr>
         <p:spPr>
           <a:xfrm>
-            <a:off x="945952" y="2485727"/>
-            <a:ext cx="7445413" cy="1352848"/>
+            <a:off x="971401" y="2388840"/>
+            <a:ext cx="7393496" cy="1622971"/>
           </a:xfrm>
           <a:prstGeom prst="rect">
             <a:avLst/>
@@ -13571,12 +13587,12 @@
           <a:p>
             <a:pPr algn="l" indent="0" marL="0">
               <a:lnSpc>
-                <a:spcPts val="2130"/>
+                <a:spcPts val="2556"/>
               </a:lnSpc>
               <a:buNone/>
             </a:pPr>
             <a:r>
-              <a:rPr lang="en-US" sz="1500" dirty="0">
+              <a:rPr lang="en-US" sz="1800" dirty="0">
                 <a:solidFill>
                   <a:srgbClr val="1F2328"/>
                 </a:solidFill>
@@ -13584,16 +13600,16 @@
                 <a:ea typeface="Arial" pitchFamily="34" charset="-122"/>
                 <a:cs typeface="Arial" pitchFamily="34" charset="-120"/>
               </a:rPr>
-              <a:t>Plan a Grafana deployment to Azure Container Apps with Bicep and azd: SQLite in the container's local storage (no Azure Files mount), minReplicas: 0 and maxReplicas: 1, /api/health for probes, and the westus region. </a:t>
+              <a:t>Plan a Grafana deployment to Azure Container Apps with Bicep and azd: SQLite in the container's local storage … /api/health for probes, and the westus region. </a:t>
             </a:r>
             <a:pPr algn="l" indent="0" marL="0">
               <a:lnSpc>
-                <a:spcPts val="2130"/>
+                <a:spcPts val="2556"/>
               </a:lnSpc>
               <a:buNone/>
             </a:pPr>
             <a:r>
-              <a:rPr lang="en-US" sz="1500" b="1" dirty="0">
+              <a:rPr lang="en-US" sz="1800" b="1" dirty="0">
                 <a:solidFill>
                   <a:srgbClr val="1F2328"/>
                 </a:solidFill>
@@ -13605,12 +13621,12 @@
             </a:r>
             <a:pPr algn="l" indent="0" marL="0">
               <a:lnSpc>
-                <a:spcPts val="2130"/>
+                <a:spcPts val="2556"/>
               </a:lnSpc>
               <a:buNone/>
             </a:pPr>
             <a:r>
-              <a:rPr lang="en-US" sz="1500" dirty="0">
+              <a:rPr lang="en-US" sz="1800" dirty="0">
                 <a:solidFill>
                   <a:srgbClr val="1F2328"/>
                 </a:solidFill>
@@ -13622,12 +13638,12 @@
             </a:r>
             <a:pPr algn="l" indent="0" marL="0">
               <a:lnSpc>
-                <a:spcPts val="2130"/>
+                <a:spcPts val="2556"/>
               </a:lnSpc>
               <a:buNone/>
             </a:pPr>
             <a:r>
-              <a:rPr lang="en-US" sz="1500" b="1" dirty="0">
+              <a:rPr lang="en-US" sz="1800" b="1" dirty="0">
                 <a:solidFill>
                   <a:srgbClr val="1F2328"/>
                 </a:solidFill>
@@ -13637,7 +13653,7 @@
               </a:rPr>
               <a:t>Don't create files or Azure resources yet.</a:t>
             </a:r>
-            <a:endParaRPr lang="en-US" sz="1500" dirty="0"/>
+            <a:endParaRPr lang="en-US" sz="1800" dirty="0"/>
           </a:p>
         </p:txBody>
       </p:sp>
@@ -13681,12 +13697,12 @@
         </p:nvSpPr>
         <p:spPr>
           <a:xfrm>
-            <a:off x="7740700" y="152400"/>
-            <a:ext cx="819150" cy="266700"/>
+            <a:off x="7652742" y="152400"/>
+            <a:ext cx="907107" cy="279350"/>
           </a:xfrm>
           <a:prstGeom prst="roundRect">
             <a:avLst>
-              <a:gd name="adj" fmla="val 23810"/>
+              <a:gd name="adj" fmla="val 22731"/>
             </a:avLst>
           </a:prstGeom>
           <a:solidFill>
@@ -13713,8 +13729,8 @@
         </p:nvSpPr>
         <p:spPr>
           <a:xfrm>
-            <a:off x="7861998" y="219075"/>
-            <a:ext cx="576554" cy="133350"/>
+            <a:off x="7786064" y="220563"/>
+            <a:ext cx="640464" cy="142875"/>
           </a:xfrm>
           <a:prstGeom prst="rect">
             <a:avLst/>
@@ -13730,7 +13746,7 @@
               <a:buNone/>
             </a:pPr>
             <a:r>
-              <a:rPr lang="en-US" sz="900" b="1" dirty="0">
+              <a:rPr lang="en-US" sz="1000" b="1" dirty="0">
                 <a:solidFill>
                   <a:srgbClr val="FFFFFF"/>
                 </a:solidFill>
@@ -13740,7 +13756,7 @@
               </a:rPr>
               <a:t>GRAFANA</a:t>
             </a:r>
-            <a:endParaRPr lang="en-US" sz="900" dirty="0"/>
+            <a:endParaRPr lang="en-US" sz="1000" dirty="0"/>
           </a:p>
         </p:txBody>
       </p:sp>
@@ -13777,7 +13793,7 @@
         <p:spPr>
           <a:xfrm>
             <a:off x="482501" y="330101"/>
-            <a:ext cx="7772400" cy="142875"/>
+            <a:ext cx="8342275" cy="152400"/>
           </a:xfrm>
           <a:prstGeom prst="rect">
             <a:avLst/>
@@ -13793,7 +13809,7 @@
               <a:buNone/>
             </a:pPr>
             <a:r>
-              <a:rPr lang="en-US" sz="1000" b="1" dirty="0">
+              <a:rPr lang="en-US" sz="1100" b="1" dirty="0">
                 <a:solidFill>
                   <a:srgbClr val="0969DA"/>
                 </a:solidFill>
@@ -13803,7 +13819,7 @@
               </a:rPr>
               <a:t>QUESTION THE PLAN</a:t>
             </a:r>
-            <a:endParaRPr lang="en-US" sz="1000" dirty="0"/>
+            <a:endParaRPr lang="en-US" sz="1100" dirty="0"/>
           </a:p>
         </p:txBody>
       </p:sp>
@@ -13815,8 +13831,8 @@
         </p:nvSpPr>
         <p:spPr>
           <a:xfrm>
-            <a:off x="482501" y="523726"/>
-            <a:ext cx="7772400" cy="393650"/>
+            <a:off x="482501" y="533251"/>
+            <a:ext cx="8342275" cy="419100"/>
           </a:xfrm>
           <a:prstGeom prst="rect">
             <a:avLst/>
@@ -13830,7 +13846,7 @@
           <a:p>
             <a:pPr algn="l" indent="0" marL="0">
               <a:lnSpc>
-                <a:spcPts val="3100"/>
+                <a:spcPts val="3300"/>
               </a:lnSpc>
               <a:spcBef>
                 <a:spcPts val="400"/>
@@ -13838,7 +13854,7 @@
               <a:buNone/>
             </a:pPr>
             <a:r>
-              <a:rPr lang="en-US" sz="2600" b="1" dirty="0">
+              <a:rPr lang="en-US" sz="2800" b="1" dirty="0">
                 <a:solidFill>
                   <a:srgbClr val="1F2328"/>
                 </a:solidFill>
@@ -13848,7 +13864,7 @@
               </a:rPr>
               <a:t>Ask the design question out loud</a:t>
             </a:r>
-            <a:endParaRPr lang="en-US" sz="2600" dirty="0"/>
+            <a:endParaRPr lang="en-US" sz="2800" dirty="0"/>
           </a:p>
         </p:txBody>
       </p:sp>
@@ -13860,12 +13876,12 @@
         </p:nvSpPr>
         <p:spPr>
           <a:xfrm>
-            <a:off x="634901" y="2280345"/>
-            <a:ext cx="7873901" cy="1103412"/>
+            <a:off x="634901" y="1970782"/>
+            <a:ext cx="7873901" cy="1697236"/>
           </a:xfrm>
           <a:prstGeom prst="roundRect">
             <a:avLst>
-              <a:gd name="adj" fmla="val 9208"/>
+              <a:gd name="adj" fmla="val 5986"/>
             </a:avLst>
           </a:prstGeom>
           <a:solidFill>
@@ -13899,7 +13915,7 @@
         </p:nvSpPr>
         <p:spPr>
           <a:xfrm>
-            <a:off x="634901" y="2285107"/>
+            <a:off x="634901" y="1975545"/>
             <a:ext cx="7873901" cy="0"/>
           </a:xfrm>
           <a:prstGeom prst="line">
@@ -13922,8 +13938,8 @@
         </p:nvSpPr>
         <p:spPr>
           <a:xfrm>
-            <a:off x="8504039" y="2280345"/>
-            <a:ext cx="0" cy="1103412"/>
+            <a:off x="8504039" y="1970782"/>
+            <a:ext cx="0" cy="1697236"/>
           </a:xfrm>
           <a:prstGeom prst="line">
             <a:avLst/>
@@ -13945,7 +13961,7 @@
         </p:nvSpPr>
         <p:spPr>
           <a:xfrm>
-            <a:off x="634901" y="3378994"/>
+            <a:off x="634901" y="3663255"/>
             <a:ext cx="7873901" cy="0"/>
           </a:xfrm>
           <a:prstGeom prst="line">
@@ -13968,8 +13984,8 @@
         </p:nvSpPr>
         <p:spPr>
           <a:xfrm>
-            <a:off x="663476" y="2280345"/>
-            <a:ext cx="0" cy="1103412"/>
+            <a:off x="663476" y="1970782"/>
+            <a:ext cx="0" cy="1697236"/>
           </a:xfrm>
           <a:prstGeom prst="line">
             <a:avLst/>
@@ -13999,8 +14015,8 @@
         </p:blipFill>
         <p:spPr>
           <a:xfrm>
-            <a:off x="945952" y="2493020"/>
-            <a:ext cx="165050" cy="165050"/>
+            <a:off x="971401" y="2208907"/>
+            <a:ext cx="190500" cy="190500"/>
           </a:xfrm>
           <a:prstGeom prst="rect">
             <a:avLst/>
@@ -14015,8 +14031,8 @@
         </p:nvSpPr>
         <p:spPr>
           <a:xfrm>
-            <a:off x="1187202" y="2508796"/>
-            <a:ext cx="498830" cy="133350"/>
+            <a:off x="1238101" y="2227957"/>
+            <a:ext cx="581867" cy="152400"/>
           </a:xfrm>
           <a:prstGeom prst="rect">
             <a:avLst/>
@@ -14032,7 +14048,7 @@
               <a:buNone/>
             </a:pPr>
             <a:r>
-              <a:rPr lang="en-US" sz="900" b="1" dirty="0">
+              <a:rPr lang="en-US" sz="1050" b="1" dirty="0">
                 <a:solidFill>
                   <a:srgbClr val="8250DF"/>
                 </a:solidFill>
@@ -14042,7 +14058,7 @@
               </a:rPr>
               <a:t>PROMPT</a:t>
             </a:r>
-            <a:endParaRPr lang="en-US" sz="900" dirty="0"/>
+            <a:endParaRPr lang="en-US" sz="1050" dirty="0"/>
           </a:p>
         </p:txBody>
       </p:sp>
@@ -14054,8 +14070,8 @@
         </p:nvSpPr>
         <p:spPr>
           <a:xfrm>
-            <a:off x="945952" y="2785021"/>
-            <a:ext cx="7445413" cy="360611"/>
+            <a:off x="971401" y="2539008"/>
+            <a:ext cx="7393496" cy="865584"/>
           </a:xfrm>
           <a:prstGeom prst="rect">
             <a:avLst/>
@@ -14069,12 +14085,12 @@
           <a:p>
             <a:pPr algn="l" indent="0" marL="0">
               <a:lnSpc>
-                <a:spcPts val="2840"/>
+                <a:spcPts val="3408"/>
               </a:lnSpc>
               <a:buNone/>
             </a:pPr>
             <a:r>
-              <a:rPr lang="en-US" sz="2000" dirty="0">
+              <a:rPr lang="en-US" sz="2400" dirty="0">
                 <a:solidFill>
                   <a:srgbClr val="1F2328"/>
                 </a:solidFill>
@@ -14084,7 +14100,7 @@
               </a:rPr>
               <a:t>Should I use PostgreSQL instead of SQLite for Grafana?</a:t>
             </a:r>
-            <a:endParaRPr lang="en-US" sz="2000" dirty="0"/>
+            <a:endParaRPr lang="en-US" sz="2400" dirty="0"/>
           </a:p>
         </p:txBody>
       </p:sp>
@@ -14104,8 +14120,8 @@
         </p:blipFill>
         <p:spPr>
           <a:xfrm>
-            <a:off x="634901" y="3599557"/>
-            <a:ext cx="177701" cy="177701"/>
+            <a:off x="634901" y="3928318"/>
+            <a:ext cx="215801" cy="215801"/>
           </a:xfrm>
           <a:prstGeom prst="rect">
             <a:avLst/>
@@ -14120,8 +14136,8 @@
         </p:nvSpPr>
         <p:spPr>
           <a:xfrm>
-            <a:off x="914102" y="3586907"/>
-            <a:ext cx="3618113" cy="203150"/>
+            <a:off x="952202" y="3921919"/>
+            <a:ext cx="4219563" cy="228600"/>
           </a:xfrm>
           <a:prstGeom prst="rect">
             <a:avLst/>
@@ -14135,12 +14151,12 @@
           <a:p>
             <a:pPr algn="l" indent="0" marL="0">
               <a:lnSpc>
-                <a:spcPts val="1600"/>
+                <a:spcPts val="1800"/>
               </a:lnSpc>
               <a:buNone/>
             </a:pPr>
             <a:r>
-              <a:rPr lang="en-US" sz="1200" dirty="0">
+              <a:rPr lang="en-US" sz="1400" dirty="0">
                 <a:solidFill>
                   <a:srgbClr val="59636E"/>
                 </a:solidFill>
@@ -14150,7 +14166,7 @@
               </a:rPr>
               <a:t>Agents are good at tradeoffs. Ask before you decide.</a:t>
             </a:r>
-            <a:endParaRPr lang="en-US" sz="1200" dirty="0"/>
+            <a:endParaRPr lang="en-US" sz="1400" dirty="0"/>
           </a:p>
         </p:txBody>
       </p:sp>
@@ -14194,12 +14210,12 @@
         </p:nvSpPr>
         <p:spPr>
           <a:xfrm>
-            <a:off x="7740700" y="152400"/>
-            <a:ext cx="819150" cy="266700"/>
+            <a:off x="7652742" y="152400"/>
+            <a:ext cx="907107" cy="279350"/>
           </a:xfrm>
           <a:prstGeom prst="roundRect">
             <a:avLst>
-              <a:gd name="adj" fmla="val 23810"/>
+              <a:gd name="adj" fmla="val 22731"/>
             </a:avLst>
           </a:prstGeom>
           <a:solidFill>
@@ -14226,8 +14242,8 @@
         </p:nvSpPr>
         <p:spPr>
           <a:xfrm>
-            <a:off x="7861998" y="219075"/>
-            <a:ext cx="576554" cy="133350"/>
+            <a:off x="7786064" y="220563"/>
+            <a:ext cx="640464" cy="142875"/>
           </a:xfrm>
           <a:prstGeom prst="rect">
             <a:avLst/>
@@ -14243,7 +14259,7 @@
               <a:buNone/>
             </a:pPr>
             <a:r>
-              <a:rPr lang="en-US" sz="900" b="1" dirty="0">
+              <a:rPr lang="en-US" sz="1000" b="1" dirty="0">
                 <a:solidFill>
                   <a:srgbClr val="FFFFFF"/>
                 </a:solidFill>
@@ -14253,7 +14269,7 @@
               </a:rPr>
               <a:t>GRAFANA</a:t>
             </a:r>
-            <a:endParaRPr lang="en-US" sz="900" dirty="0"/>
+            <a:endParaRPr lang="en-US" sz="1000" dirty="0"/>
           </a:p>
         </p:txBody>
       </p:sp>
@@ -14290,7 +14306,7 @@
         <p:spPr>
           <a:xfrm>
             <a:off x="482501" y="330101"/>
-            <a:ext cx="7772400" cy="142875"/>
+            <a:ext cx="8342275" cy="152400"/>
           </a:xfrm>
           <a:prstGeom prst="rect">
             <a:avLst/>
@@ -14306,7 +14322,7 @@
               <a:buNone/>
             </a:pPr>
             <a:r>
-              <a:rPr lang="en-US" sz="1000" b="1" dirty="0">
+              <a:rPr lang="en-US" sz="1100" b="1" dirty="0">
                 <a:solidFill>
                   <a:srgbClr val="0969DA"/>
                 </a:solidFill>
@@ -14316,7 +14332,7 @@
               </a:rPr>
               <a:t>THE TRADEOFF</a:t>
             </a:r>
-            <a:endParaRPr lang="en-US" sz="1000" dirty="0"/>
+            <a:endParaRPr lang="en-US" sz="1100" dirty="0"/>
           </a:p>
         </p:txBody>
       </p:sp>
@@ -14328,8 +14344,8 @@
         </p:nvSpPr>
         <p:spPr>
           <a:xfrm>
-            <a:off x="482501" y="523726"/>
-            <a:ext cx="7772400" cy="393650"/>
+            <a:off x="482501" y="533251"/>
+            <a:ext cx="8342275" cy="419100"/>
           </a:xfrm>
           <a:prstGeom prst="rect">
             <a:avLst/>
@@ -14343,7 +14359,7 @@
           <a:p>
             <a:pPr algn="l" indent="0" marL="0">
               <a:lnSpc>
-                <a:spcPts val="3100"/>
+                <a:spcPts val="3300"/>
               </a:lnSpc>
               <a:spcBef>
                 <a:spcPts val="400"/>
@@ -14351,7 +14367,7 @@
               <a:buNone/>
             </a:pPr>
             <a:r>
-              <a:rPr lang="en-US" sz="2600" b="1" dirty="0">
+              <a:rPr lang="en-US" sz="2800" b="1" dirty="0">
                 <a:solidFill>
                   <a:srgbClr val="1F2328"/>
                 </a:solidFill>
@@ -14361,7 +14377,7 @@
               </a:rPr>
               <a:t>SQLite or PostgreSQL?</a:t>
             </a:r>
-            <a:endParaRPr lang="en-US" sz="2600" dirty="0"/>
+            <a:endParaRPr lang="en-US" sz="2800" dirty="0"/>
           </a:p>
         </p:txBody>
       </p:sp>
@@ -14381,7 +14397,7 @@
         </p:blipFill>
         <p:spPr>
           <a:xfrm>
-            <a:off x="1837581" y="1282601"/>
+            <a:off x="1837581" y="1308050"/>
             <a:ext cx="5468541" cy="3454301"/>
           </a:xfrm>
           <a:prstGeom prst="rect">
